--- a/PPT_Analysis_370.pptx
+++ b/PPT_Analysis_370.pptx
@@ -5,14 +5,18 @@
     <p:sldMasterId id="2147483650" r:id="rId4"/>
   </p:sldMasterIdLst>
   <p:notesMasterIdLst>
-    <p:notesMasterId r:id="rId7"/>
+    <p:notesMasterId r:id="rId11"/>
   </p:notesMasterIdLst>
   <p:handoutMasterIdLst>
-    <p:handoutMasterId r:id="rId8"/>
+    <p:handoutMasterId r:id="rId12"/>
   </p:handoutMasterIdLst>
   <p:sldIdLst>
     <p:sldId id="312" r:id="rId5"/>
     <p:sldId id="313" r:id="rId6"/>
+    <p:sldId id="314" r:id="rId7"/>
+    <p:sldId id="315" r:id="rId8"/>
+    <p:sldId id="316" r:id="rId9"/>
+    <p:sldId id="317" r:id="rId10"/>
   </p:sldIdLst>
   <p:sldSz cx="12192000" cy="6858000"/>
   <p:notesSz cx="13716000" cy="24384000"/>
@@ -217,6 +221,6071 @@
 <p188:authorLst xmlns:a="http://schemas.openxmlformats.org/drawingml/2006/main" xmlns:r="http://schemas.openxmlformats.org/officeDocument/2006/relationships" xmlns:p188="http://schemas.microsoft.com/office/powerpoint/2018/8/main">
   <p188:author id="{00000000-0000-0000-0000-000000000000}" name="Author" initials="A" userId="Author" providerId="AD"/>
 </p188:authorLst>
+</file>
+
+<file path=ppt/revisionInfo.xml><?xml version="1.0" encoding="utf-8"?>
+<p1510:revInfo xmlns:a="http://schemas.openxmlformats.org/drawingml/2006/main" xmlns:r="http://schemas.openxmlformats.org/officeDocument/2006/relationships" xmlns:p1510="http://schemas.microsoft.com/office/powerpoint/2015/10/main">
+  <p1510:revLst>
+    <p1510:client id="{D0C6D91D-1C4A-41CE-83D0-FCCADBA809D0}" v="22" dt="2026-09-19T16:44:53.120"/>
+  </p1510:revLst>
+</p1510:revInfo>
+</file>
+
+<file path=ppt/changesInfos/changesInfo1.xml><?xml version="1.0" encoding="utf-8"?>
+<pc:chgInfo xmlns:a="http://schemas.openxmlformats.org/drawingml/2006/main" xmlns:r="http://schemas.openxmlformats.org/officeDocument/2006/relationships" xmlns:ac="http://schemas.microsoft.com/office/drawing/2013/main/command" xmlns:pc="http://schemas.microsoft.com/office/powerpoint/2013/main/command">
+  <pc:docChgLst>
+    <pc:chgData name="Shreena Solia" userId="ce99177b26c586f9" providerId="LiveId" clId="{1F1047B7-353E-4D5F-BD1C-2AC2A6DBBBA4}"/>
+    <pc:docChg chg="undo custSel addSld delSld modSld modMainMaster">
+      <pc:chgData name="Shreena Solia" userId="ce99177b26c586f9" providerId="LiveId" clId="{1F1047B7-353E-4D5F-BD1C-2AC2A6DBBBA4}" dt="2026-09-19T16:44:53.119" v="471"/>
+      <pc:docMkLst>
+        <pc:docMk/>
+      </pc:docMkLst>
+      <pc:sldChg chg="modTransition">
+        <pc:chgData name="Shreena Solia" userId="ce99177b26c586f9" providerId="LiveId" clId="{1F1047B7-353E-4D5F-BD1C-2AC2A6DBBBA4}" dt="2026-09-19T16:44:53.119" v="471"/>
+        <pc:sldMkLst>
+          <pc:docMk/>
+          <pc:sldMk cId="2202437675" sldId="312"/>
+        </pc:sldMkLst>
+      </pc:sldChg>
+      <pc:sldChg chg="addSp delSp modSp mod modTransition">
+        <pc:chgData name="Shreena Solia" userId="ce99177b26c586f9" providerId="LiveId" clId="{1F1047B7-353E-4D5F-BD1C-2AC2A6DBBBA4}" dt="2026-09-19T16:44:53.119" v="471"/>
+        <pc:sldMkLst>
+          <pc:docMk/>
+          <pc:sldMk cId="2039248300" sldId="313"/>
+        </pc:sldMkLst>
+        <pc:spChg chg="mod">
+          <ac:chgData name="Shreena Solia" userId="ce99177b26c586f9" providerId="LiveId" clId="{1F1047B7-353E-4D5F-BD1C-2AC2A6DBBBA4}" dt="2026-09-19T16:32:08.204" v="7" actId="20577"/>
+          <ac:spMkLst>
+            <pc:docMk/>
+            <pc:sldMk cId="2039248300" sldId="313"/>
+            <ac:spMk id="2" creationId="{6D0DEE2B-BA2C-7F72-1121-CD798B67711E}"/>
+          </ac:spMkLst>
+        </pc:spChg>
+        <pc:spChg chg="del mod">
+          <ac:chgData name="Shreena Solia" userId="ce99177b26c586f9" providerId="LiveId" clId="{1F1047B7-353E-4D5F-BD1C-2AC2A6DBBBA4}" dt="2026-09-19T16:32:18.196" v="8" actId="3680"/>
+          <ac:spMkLst>
+            <pc:docMk/>
+            <pc:sldMk cId="2039248300" sldId="313"/>
+            <ac:spMk id="3" creationId="{BA6D5B73-59D7-DC97-D1A7-5134E45B715C}"/>
+          </ac:spMkLst>
+        </pc:spChg>
+        <pc:graphicFrameChg chg="add mod ord modGraphic">
+          <ac:chgData name="Shreena Solia" userId="ce99177b26c586f9" providerId="LiveId" clId="{1F1047B7-353E-4D5F-BD1C-2AC2A6DBBBA4}" dt="2026-09-19T16:34:57.127" v="193" actId="12385"/>
+          <ac:graphicFrameMkLst>
+            <pc:docMk/>
+            <pc:sldMk cId="2039248300" sldId="313"/>
+            <ac:graphicFrameMk id="5" creationId="{4F0D3DB0-F9C6-51C0-44D3-AE32B8BCFDFD}"/>
+          </ac:graphicFrameMkLst>
+        </pc:graphicFrameChg>
+      </pc:sldChg>
+      <pc:sldChg chg="addSp delSp modSp new mod modTransition">
+        <pc:chgData name="Shreena Solia" userId="ce99177b26c586f9" providerId="LiveId" clId="{1F1047B7-353E-4D5F-BD1C-2AC2A6DBBBA4}" dt="2026-09-19T16:44:53.119" v="471"/>
+        <pc:sldMkLst>
+          <pc:docMk/>
+          <pc:sldMk cId="698342303" sldId="314"/>
+        </pc:sldMkLst>
+        <pc:spChg chg="mod">
+          <ac:chgData name="Shreena Solia" userId="ce99177b26c586f9" providerId="LiveId" clId="{1F1047B7-353E-4D5F-BD1C-2AC2A6DBBBA4}" dt="2026-09-19T16:35:38.349" v="227" actId="20577"/>
+          <ac:spMkLst>
+            <pc:docMk/>
+            <pc:sldMk cId="698342303" sldId="314"/>
+            <ac:spMk id="2" creationId="{956C78D0-370D-5B52-FDDB-04139CD78388}"/>
+          </ac:spMkLst>
+        </pc:spChg>
+        <pc:spChg chg="del">
+          <ac:chgData name="Shreena Solia" userId="ce99177b26c586f9" providerId="LiveId" clId="{1F1047B7-353E-4D5F-BD1C-2AC2A6DBBBA4}" dt="2026-09-19T16:36:03.151" v="229" actId="1957"/>
+          <ac:spMkLst>
+            <pc:docMk/>
+            <pc:sldMk cId="698342303" sldId="314"/>
+            <ac:spMk id="3" creationId="{BB77D32C-3320-E227-7392-0275227B244E}"/>
+          </ac:spMkLst>
+        </pc:spChg>
+        <pc:graphicFrameChg chg="add mod">
+          <ac:chgData name="Shreena Solia" userId="ce99177b26c586f9" providerId="LiveId" clId="{1F1047B7-353E-4D5F-BD1C-2AC2A6DBBBA4}" dt="2026-09-19T16:36:03.151" v="229" actId="1957"/>
+          <ac:graphicFrameMkLst>
+            <pc:docMk/>
+            <pc:sldMk cId="698342303" sldId="314"/>
+            <ac:graphicFrameMk id="7" creationId="{C4151A5B-8970-3BE1-27C2-938313A8C7B5}"/>
+          </ac:graphicFrameMkLst>
+        </pc:graphicFrameChg>
+      </pc:sldChg>
+      <pc:sldChg chg="new del">
+        <pc:chgData name="Shreena Solia" userId="ce99177b26c586f9" providerId="LiveId" clId="{1F1047B7-353E-4D5F-BD1C-2AC2A6DBBBA4}" dt="2026-09-19T16:35:06.675" v="195" actId="47"/>
+        <pc:sldMkLst>
+          <pc:docMk/>
+          <pc:sldMk cId="2646566566" sldId="314"/>
+        </pc:sldMkLst>
+      </pc:sldChg>
+      <pc:sldChg chg="addSp delSp modSp new mod modTransition">
+        <pc:chgData name="Shreena Solia" userId="ce99177b26c586f9" providerId="LiveId" clId="{1F1047B7-353E-4D5F-BD1C-2AC2A6DBBBA4}" dt="2026-09-19T16:44:53.119" v="471"/>
+        <pc:sldMkLst>
+          <pc:docMk/>
+          <pc:sldMk cId="2113920447" sldId="315"/>
+        </pc:sldMkLst>
+        <pc:spChg chg="mod">
+          <ac:chgData name="Shreena Solia" userId="ce99177b26c586f9" providerId="LiveId" clId="{1F1047B7-353E-4D5F-BD1C-2AC2A6DBBBA4}" dt="2026-09-19T16:42:34.876" v="402" actId="20577"/>
+          <ac:spMkLst>
+            <pc:docMk/>
+            <pc:sldMk cId="2113920447" sldId="315"/>
+            <ac:spMk id="2" creationId="{FC39CBBB-3FBB-34D6-AB46-464C55BA8386}"/>
+          </ac:spMkLst>
+        </pc:spChg>
+        <pc:spChg chg="del">
+          <ac:chgData name="Shreena Solia" userId="ce99177b26c586f9" providerId="LiveId" clId="{1F1047B7-353E-4D5F-BD1C-2AC2A6DBBBA4}" dt="2026-09-19T16:38:42.337" v="258" actId="1032"/>
+          <ac:spMkLst>
+            <pc:docMk/>
+            <pc:sldMk cId="2113920447" sldId="315"/>
+            <ac:spMk id="4" creationId="{010C544B-1E56-EC70-9B7A-E330EAAF2E69}"/>
+          </ac:spMkLst>
+        </pc:spChg>
+        <pc:spChg chg="del">
+          <ac:chgData name="Shreena Solia" userId="ce99177b26c586f9" providerId="LiveId" clId="{1F1047B7-353E-4D5F-BD1C-2AC2A6DBBBA4}" dt="2026-09-19T16:39:20.725" v="308" actId="21"/>
+          <ac:spMkLst>
+            <pc:docMk/>
+            <pc:sldMk cId="2113920447" sldId="315"/>
+            <ac:spMk id="5" creationId="{FC3CE201-2DE5-EF67-47DF-89F7E208A1A4}"/>
+          </ac:spMkLst>
+        </pc:spChg>
+        <pc:graphicFrameChg chg="add mod modGraphic">
+          <ac:chgData name="Shreena Solia" userId="ce99177b26c586f9" providerId="LiveId" clId="{1F1047B7-353E-4D5F-BD1C-2AC2A6DBBBA4}" dt="2026-09-19T16:42:17.715" v="372" actId="1076"/>
+          <ac:graphicFrameMkLst>
+            <pc:docMk/>
+            <pc:sldMk cId="2113920447" sldId="315"/>
+            <ac:graphicFrameMk id="6" creationId="{A1AA89A9-C27E-5E79-A2C2-4A2934D703A1}"/>
+          </ac:graphicFrameMkLst>
+        </pc:graphicFrameChg>
+      </pc:sldChg>
+      <pc:sldChg chg="addSp delSp modSp new mod modTransition">
+        <pc:chgData name="Shreena Solia" userId="ce99177b26c586f9" providerId="LiveId" clId="{1F1047B7-353E-4D5F-BD1C-2AC2A6DBBBA4}" dt="2026-09-19T16:44:53.119" v="471"/>
+        <pc:sldMkLst>
+          <pc:docMk/>
+          <pc:sldMk cId="3030372584" sldId="316"/>
+        </pc:sldMkLst>
+        <pc:spChg chg="mod">
+          <ac:chgData name="Shreena Solia" userId="ce99177b26c586f9" providerId="LiveId" clId="{1F1047B7-353E-4D5F-BD1C-2AC2A6DBBBA4}" dt="2026-09-19T16:44:13.437" v="442" actId="1076"/>
+          <ac:spMkLst>
+            <pc:docMk/>
+            <pc:sldMk cId="3030372584" sldId="316"/>
+            <ac:spMk id="2" creationId="{35FDD906-23FE-8838-8223-6E96DE400896}"/>
+          </ac:spMkLst>
+        </pc:spChg>
+        <pc:spChg chg="del">
+          <ac:chgData name="Shreena Solia" userId="ce99177b26c586f9" providerId="LiveId" clId="{1F1047B7-353E-4D5F-BD1C-2AC2A6DBBBA4}" dt="2026-09-19T16:43:12.443" v="434" actId="1957"/>
+          <ac:spMkLst>
+            <pc:docMk/>
+            <pc:sldMk cId="3030372584" sldId="316"/>
+            <ac:spMk id="3" creationId="{EA27BC6A-143A-4A1F-5143-10F572850F86}"/>
+          </ac:spMkLst>
+        </pc:spChg>
+        <pc:graphicFrameChg chg="add mod">
+          <ac:chgData name="Shreena Solia" userId="ce99177b26c586f9" providerId="LiveId" clId="{1F1047B7-353E-4D5F-BD1C-2AC2A6DBBBA4}" dt="2026-09-19T16:44:19.141" v="444" actId="14100"/>
+          <ac:graphicFrameMkLst>
+            <pc:docMk/>
+            <pc:sldMk cId="3030372584" sldId="316"/>
+            <ac:graphicFrameMk id="7" creationId="{0B26DBFF-A3B6-61EA-FF63-C4D2A9AC3B4D}"/>
+          </ac:graphicFrameMkLst>
+        </pc:graphicFrameChg>
+      </pc:sldChg>
+      <pc:sldChg chg="modSp new mod modTransition">
+        <pc:chgData name="Shreena Solia" userId="ce99177b26c586f9" providerId="LiveId" clId="{1F1047B7-353E-4D5F-BD1C-2AC2A6DBBBA4}" dt="2026-09-19T16:44:53.119" v="471"/>
+        <pc:sldMkLst>
+          <pc:docMk/>
+          <pc:sldMk cId="691204220" sldId="317"/>
+        </pc:sldMkLst>
+        <pc:spChg chg="mod">
+          <ac:chgData name="Shreena Solia" userId="ce99177b26c586f9" providerId="LiveId" clId="{1F1047B7-353E-4D5F-BD1C-2AC2A6DBBBA4}" dt="2026-09-19T16:44:35" v="469" actId="5793"/>
+          <ac:spMkLst>
+            <pc:docMk/>
+            <pc:sldMk cId="691204220" sldId="317"/>
+            <ac:spMk id="2" creationId="{4B3BF93E-E003-8281-ABF5-B12A64541BFB}"/>
+          </ac:spMkLst>
+        </pc:spChg>
+      </pc:sldChg>
+      <pc:sldMasterChg chg="modTransition modSldLayout">
+        <pc:chgData name="Shreena Solia" userId="ce99177b26c586f9" providerId="LiveId" clId="{1F1047B7-353E-4D5F-BD1C-2AC2A6DBBBA4}" dt="2026-09-19T16:44:53.119" v="471"/>
+        <pc:sldMasterMkLst>
+          <pc:docMk/>
+          <pc:sldMasterMk cId="154833434" sldId="2147483650"/>
+        </pc:sldMasterMkLst>
+        <pc:sldLayoutChg chg="modTransition">
+          <pc:chgData name="Shreena Solia" userId="ce99177b26c586f9" providerId="LiveId" clId="{1F1047B7-353E-4D5F-BD1C-2AC2A6DBBBA4}" dt="2026-09-19T16:44:53.119" v="471"/>
+          <pc:sldLayoutMkLst>
+            <pc:docMk/>
+            <pc:sldMasterMk cId="154833434" sldId="2147483650"/>
+            <pc:sldLayoutMk cId="2631799807" sldId="2147483651"/>
+          </pc:sldLayoutMkLst>
+        </pc:sldLayoutChg>
+        <pc:sldLayoutChg chg="modTransition">
+          <pc:chgData name="Shreena Solia" userId="ce99177b26c586f9" providerId="LiveId" clId="{1F1047B7-353E-4D5F-BD1C-2AC2A6DBBBA4}" dt="2026-09-19T16:44:53.119" v="471"/>
+          <pc:sldLayoutMkLst>
+            <pc:docMk/>
+            <pc:sldMasterMk cId="154833434" sldId="2147483650"/>
+            <pc:sldLayoutMk cId="1681789449" sldId="2147483653"/>
+          </pc:sldLayoutMkLst>
+        </pc:sldLayoutChg>
+        <pc:sldLayoutChg chg="modTransition">
+          <pc:chgData name="Shreena Solia" userId="ce99177b26c586f9" providerId="LiveId" clId="{1F1047B7-353E-4D5F-BD1C-2AC2A6DBBBA4}" dt="2026-09-19T16:44:53.119" v="471"/>
+          <pc:sldLayoutMkLst>
+            <pc:docMk/>
+            <pc:sldMasterMk cId="154833434" sldId="2147483650"/>
+            <pc:sldLayoutMk cId="2071868441" sldId="2147483656"/>
+          </pc:sldLayoutMkLst>
+        </pc:sldLayoutChg>
+        <pc:sldLayoutChg chg="modTransition">
+          <pc:chgData name="Shreena Solia" userId="ce99177b26c586f9" providerId="LiveId" clId="{1F1047B7-353E-4D5F-BD1C-2AC2A6DBBBA4}" dt="2026-09-19T16:44:53.119" v="471"/>
+          <pc:sldLayoutMkLst>
+            <pc:docMk/>
+            <pc:sldMasterMk cId="154833434" sldId="2147483650"/>
+            <pc:sldLayoutMk cId="1581182869" sldId="2147483657"/>
+          </pc:sldLayoutMkLst>
+        </pc:sldLayoutChg>
+        <pc:sldLayoutChg chg="modTransition">
+          <pc:chgData name="Shreena Solia" userId="ce99177b26c586f9" providerId="LiveId" clId="{1F1047B7-353E-4D5F-BD1C-2AC2A6DBBBA4}" dt="2026-09-19T16:44:53.119" v="471"/>
+          <pc:sldLayoutMkLst>
+            <pc:docMk/>
+            <pc:sldMasterMk cId="154833434" sldId="2147483650"/>
+            <pc:sldLayoutMk cId="2745005521" sldId="2147483658"/>
+          </pc:sldLayoutMkLst>
+        </pc:sldLayoutChg>
+        <pc:sldLayoutChg chg="modTransition">
+          <pc:chgData name="Shreena Solia" userId="ce99177b26c586f9" providerId="LiveId" clId="{1F1047B7-353E-4D5F-BD1C-2AC2A6DBBBA4}" dt="2026-09-19T16:44:53.119" v="471"/>
+          <pc:sldLayoutMkLst>
+            <pc:docMk/>
+            <pc:sldMasterMk cId="154833434" sldId="2147483650"/>
+            <pc:sldLayoutMk cId="2234670087" sldId="2147483659"/>
+          </pc:sldLayoutMkLst>
+        </pc:sldLayoutChg>
+        <pc:sldLayoutChg chg="modTransition">
+          <pc:chgData name="Shreena Solia" userId="ce99177b26c586f9" providerId="LiveId" clId="{1F1047B7-353E-4D5F-BD1C-2AC2A6DBBBA4}" dt="2026-09-19T16:44:53.119" v="471"/>
+          <pc:sldLayoutMkLst>
+            <pc:docMk/>
+            <pc:sldMasterMk cId="154833434" sldId="2147483650"/>
+            <pc:sldLayoutMk cId="2333964501" sldId="2147483663"/>
+          </pc:sldLayoutMkLst>
+        </pc:sldLayoutChg>
+        <pc:sldLayoutChg chg="modTransition">
+          <pc:chgData name="Shreena Solia" userId="ce99177b26c586f9" providerId="LiveId" clId="{1F1047B7-353E-4D5F-BD1C-2AC2A6DBBBA4}" dt="2026-09-19T16:44:53.119" v="471"/>
+          <pc:sldLayoutMkLst>
+            <pc:docMk/>
+            <pc:sldMasterMk cId="154833434" sldId="2147483650"/>
+            <pc:sldLayoutMk cId="552850918" sldId="2147483668"/>
+          </pc:sldLayoutMkLst>
+        </pc:sldLayoutChg>
+        <pc:sldLayoutChg chg="modTransition">
+          <pc:chgData name="Shreena Solia" userId="ce99177b26c586f9" providerId="LiveId" clId="{1F1047B7-353E-4D5F-BD1C-2AC2A6DBBBA4}" dt="2026-09-19T16:44:53.119" v="471"/>
+          <pc:sldLayoutMkLst>
+            <pc:docMk/>
+            <pc:sldMasterMk cId="154833434" sldId="2147483650"/>
+            <pc:sldLayoutMk cId="2372898826" sldId="2147483676"/>
+          </pc:sldLayoutMkLst>
+        </pc:sldLayoutChg>
+        <pc:sldLayoutChg chg="modTransition">
+          <pc:chgData name="Shreena Solia" userId="ce99177b26c586f9" providerId="LiveId" clId="{1F1047B7-353E-4D5F-BD1C-2AC2A6DBBBA4}" dt="2026-09-19T16:44:53.119" v="471"/>
+          <pc:sldLayoutMkLst>
+            <pc:docMk/>
+            <pc:sldMasterMk cId="154833434" sldId="2147483650"/>
+            <pc:sldLayoutMk cId="433189165" sldId="2147483680"/>
+          </pc:sldLayoutMkLst>
+        </pc:sldLayoutChg>
+        <pc:sldLayoutChg chg="modTransition">
+          <pc:chgData name="Shreena Solia" userId="ce99177b26c586f9" providerId="LiveId" clId="{1F1047B7-353E-4D5F-BD1C-2AC2A6DBBBA4}" dt="2026-09-19T16:44:53.119" v="471"/>
+          <pc:sldLayoutMkLst>
+            <pc:docMk/>
+            <pc:sldMasterMk cId="154833434" sldId="2147483650"/>
+            <pc:sldLayoutMk cId="3116296531" sldId="2147483685"/>
+          </pc:sldLayoutMkLst>
+        </pc:sldLayoutChg>
+        <pc:sldLayoutChg chg="modTransition">
+          <pc:chgData name="Shreena Solia" userId="ce99177b26c586f9" providerId="LiveId" clId="{1F1047B7-353E-4D5F-BD1C-2AC2A6DBBBA4}" dt="2026-09-19T16:44:53.119" v="471"/>
+          <pc:sldLayoutMkLst>
+            <pc:docMk/>
+            <pc:sldMasterMk cId="154833434" sldId="2147483650"/>
+            <pc:sldLayoutMk cId="1686733275" sldId="2147483686"/>
+          </pc:sldLayoutMkLst>
+        </pc:sldLayoutChg>
+        <pc:sldLayoutChg chg="modTransition">
+          <pc:chgData name="Shreena Solia" userId="ce99177b26c586f9" providerId="LiveId" clId="{1F1047B7-353E-4D5F-BD1C-2AC2A6DBBBA4}" dt="2026-09-19T16:44:53.119" v="471"/>
+          <pc:sldLayoutMkLst>
+            <pc:docMk/>
+            <pc:sldMasterMk cId="154833434" sldId="2147483650"/>
+            <pc:sldLayoutMk cId="3183620452" sldId="2147483687"/>
+          </pc:sldLayoutMkLst>
+        </pc:sldLayoutChg>
+        <pc:sldLayoutChg chg="modTransition">
+          <pc:chgData name="Shreena Solia" userId="ce99177b26c586f9" providerId="LiveId" clId="{1F1047B7-353E-4D5F-BD1C-2AC2A6DBBBA4}" dt="2026-09-19T16:44:53.119" v="471"/>
+          <pc:sldLayoutMkLst>
+            <pc:docMk/>
+            <pc:sldMasterMk cId="154833434" sldId="2147483650"/>
+            <pc:sldLayoutMk cId="2207104535" sldId="2147483688"/>
+          </pc:sldLayoutMkLst>
+        </pc:sldLayoutChg>
+        <pc:sldLayoutChg chg="modTransition">
+          <pc:chgData name="Shreena Solia" userId="ce99177b26c586f9" providerId="LiveId" clId="{1F1047B7-353E-4D5F-BD1C-2AC2A6DBBBA4}" dt="2026-09-19T16:44:53.119" v="471"/>
+          <pc:sldLayoutMkLst>
+            <pc:docMk/>
+            <pc:sldMasterMk cId="154833434" sldId="2147483650"/>
+            <pc:sldLayoutMk cId="2203958812" sldId="2147483689"/>
+          </pc:sldLayoutMkLst>
+        </pc:sldLayoutChg>
+        <pc:sldLayoutChg chg="modTransition">
+          <pc:chgData name="Shreena Solia" userId="ce99177b26c586f9" providerId="LiveId" clId="{1F1047B7-353E-4D5F-BD1C-2AC2A6DBBBA4}" dt="2026-09-19T16:44:53.119" v="471"/>
+          <pc:sldLayoutMkLst>
+            <pc:docMk/>
+            <pc:sldMasterMk cId="154833434" sldId="2147483650"/>
+            <pc:sldLayoutMk cId="2586650709" sldId="2147483691"/>
+          </pc:sldLayoutMkLst>
+        </pc:sldLayoutChg>
+        <pc:sldLayoutChg chg="modTransition">
+          <pc:chgData name="Shreena Solia" userId="ce99177b26c586f9" providerId="LiveId" clId="{1F1047B7-353E-4D5F-BD1C-2AC2A6DBBBA4}" dt="2026-09-19T16:44:53.119" v="471"/>
+          <pc:sldLayoutMkLst>
+            <pc:docMk/>
+            <pc:sldMasterMk cId="154833434" sldId="2147483650"/>
+            <pc:sldLayoutMk cId="2767508154" sldId="2147483692"/>
+          </pc:sldLayoutMkLst>
+        </pc:sldLayoutChg>
+      </pc:sldMasterChg>
+    </pc:docChg>
+  </pc:docChgLst>
+</pc:chgInfo>
+</file>
+
+<file path=ppt/charts/chart1.xml><?xml version="1.0" encoding="utf-8"?>
+<c:chartSpace xmlns:c="http://schemas.openxmlformats.org/drawingml/2006/chart" xmlns:a="http://schemas.openxmlformats.org/drawingml/2006/main" xmlns:r="http://schemas.openxmlformats.org/officeDocument/2006/relationships" xmlns:c16r2="http://schemas.microsoft.com/office/drawing/2015/06/chart">
+  <c:date1904 val="0"/>
+  <c:lang val="en-US"/>
+  <c:roundedCorners val="0"/>
+  <mc:AlternateContent xmlns:mc="http://schemas.openxmlformats.org/markup-compatibility/2006">
+    <mc:Choice xmlns:c14="http://schemas.microsoft.com/office/drawing/2007/8/2/chart" Requires="c14">
+      <c14:style val="102"/>
+    </mc:Choice>
+    <mc:Fallback>
+      <c:style val="2"/>
+    </mc:Fallback>
+  </mc:AlternateContent>
+  <c:chart>
+    <c:title>
+      <c:overlay val="0"/>
+      <c:spPr>
+        <a:noFill/>
+        <a:ln>
+          <a:noFill/>
+        </a:ln>
+        <a:effectLst/>
+      </c:spPr>
+      <c:txPr>
+        <a:bodyPr rot="0" spcFirstLastPara="1" vertOverflow="ellipsis" vert="horz" wrap="square" anchor="ctr" anchorCtr="1"/>
+        <a:lstStyle/>
+        <a:p>
+          <a:pPr>
+            <a:defRPr sz="1862" b="0" i="0" u="none" strike="noStrike" kern="1200" spc="0" baseline="0">
+              <a:solidFill>
+                <a:schemeClr val="tx1">
+                  <a:lumMod val="65000"/>
+                  <a:lumOff val="35000"/>
+                </a:schemeClr>
+              </a:solidFill>
+              <a:latin typeface="+mn-lt"/>
+              <a:ea typeface="+mn-ea"/>
+              <a:cs typeface="+mn-cs"/>
+            </a:defRPr>
+          </a:pPr>
+          <a:endParaRPr lang="en-US"/>
+        </a:p>
+      </c:txPr>
+    </c:title>
+    <c:autoTitleDeleted val="0"/>
+    <c:plotArea>
+      <c:layout/>
+      <c:barChart>
+        <c:barDir val="col"/>
+        <c:grouping val="clustered"/>
+        <c:varyColors val="0"/>
+        <c:ser>
+          <c:idx val="0"/>
+          <c:order val="0"/>
+          <c:tx>
+            <c:strRef>
+              <c:f>Sheet1!$B$1</c:f>
+              <c:strCache>
+                <c:ptCount val="1"/>
+                <c:pt idx="0">
+                  <c:v>Shreena Solia</c:v>
+                </c:pt>
+              </c:strCache>
+            </c:strRef>
+          </c:tx>
+          <c:spPr>
+            <a:solidFill>
+              <a:schemeClr val="accent1"/>
+            </a:solidFill>
+            <a:ln>
+              <a:noFill/>
+            </a:ln>
+            <a:effectLst/>
+          </c:spPr>
+          <c:invertIfNegative val="0"/>
+          <c:cat>
+            <c:strRef>
+              <c:f>Sheet1!$A$2:$A$5</c:f>
+              <c:strCache>
+                <c:ptCount val="4"/>
+                <c:pt idx="0">
+                  <c:v>OOPJ</c:v>
+                </c:pt>
+                <c:pt idx="1">
+                  <c:v>MATHS-2</c:v>
+                </c:pt>
+                <c:pt idx="2">
+                  <c:v>WD</c:v>
+                </c:pt>
+                <c:pt idx="3">
+                  <c:v>EG</c:v>
+                </c:pt>
+              </c:strCache>
+            </c:strRef>
+          </c:cat>
+          <c:val>
+            <c:numRef>
+              <c:f>Sheet1!$B$2:$B$5</c:f>
+              <c:numCache>
+                <c:formatCode>General</c:formatCode>
+                <c:ptCount val="4"/>
+                <c:pt idx="0">
+                  <c:v>98</c:v>
+                </c:pt>
+                <c:pt idx="1">
+                  <c:v>95</c:v>
+                </c:pt>
+                <c:pt idx="2">
+                  <c:v>96</c:v>
+                </c:pt>
+                <c:pt idx="3">
+                  <c:v>97</c:v>
+                </c:pt>
+              </c:numCache>
+            </c:numRef>
+          </c:val>
+          <c:extLst>
+            <c:ext xmlns:c16="http://schemas.microsoft.com/office/drawing/2014/chart" uri="{C3380CC4-5D6E-409C-BE32-E72D297353CC}">
+              <c16:uniqueId val="{00000000-81D6-4F0B-93CE-C0D00EA50F3C}"/>
+            </c:ext>
+          </c:extLst>
+        </c:ser>
+        <c:ser>
+          <c:idx val="1"/>
+          <c:order val="1"/>
+          <c:tx>
+            <c:strRef>
+              <c:f>Sheet1!$C$1</c:f>
+              <c:strCache>
+                <c:ptCount val="1"/>
+                <c:pt idx="0">
+                  <c:v>Priyal Chapla</c:v>
+                </c:pt>
+              </c:strCache>
+            </c:strRef>
+          </c:tx>
+          <c:spPr>
+            <a:solidFill>
+              <a:schemeClr val="accent2"/>
+            </a:solidFill>
+            <a:ln>
+              <a:noFill/>
+            </a:ln>
+            <a:effectLst/>
+          </c:spPr>
+          <c:invertIfNegative val="0"/>
+          <c:cat>
+            <c:strRef>
+              <c:f>Sheet1!$A$2:$A$5</c:f>
+              <c:strCache>
+                <c:ptCount val="4"/>
+                <c:pt idx="0">
+                  <c:v>OOPJ</c:v>
+                </c:pt>
+                <c:pt idx="1">
+                  <c:v>MATHS-2</c:v>
+                </c:pt>
+                <c:pt idx="2">
+                  <c:v>WD</c:v>
+                </c:pt>
+                <c:pt idx="3">
+                  <c:v>EG</c:v>
+                </c:pt>
+              </c:strCache>
+            </c:strRef>
+          </c:cat>
+          <c:val>
+            <c:numRef>
+              <c:f>Sheet1!$C$2:$C$5</c:f>
+              <c:numCache>
+                <c:formatCode>General</c:formatCode>
+                <c:ptCount val="4"/>
+                <c:pt idx="0">
+                  <c:v>97</c:v>
+                </c:pt>
+                <c:pt idx="1">
+                  <c:v>98</c:v>
+                </c:pt>
+                <c:pt idx="2">
+                  <c:v>96</c:v>
+                </c:pt>
+                <c:pt idx="3">
+                  <c:v>92</c:v>
+                </c:pt>
+              </c:numCache>
+            </c:numRef>
+          </c:val>
+          <c:extLst>
+            <c:ext xmlns:c16="http://schemas.microsoft.com/office/drawing/2014/chart" uri="{C3380CC4-5D6E-409C-BE32-E72D297353CC}">
+              <c16:uniqueId val="{00000001-81D6-4F0B-93CE-C0D00EA50F3C}"/>
+            </c:ext>
+          </c:extLst>
+        </c:ser>
+        <c:ser>
+          <c:idx val="2"/>
+          <c:order val="2"/>
+          <c:tx>
+            <c:strRef>
+              <c:f>Sheet1!$D$1</c:f>
+              <c:strCache>
+                <c:ptCount val="1"/>
+                <c:pt idx="0">
+                  <c:v>Swasti Raiyani</c:v>
+                </c:pt>
+              </c:strCache>
+            </c:strRef>
+          </c:tx>
+          <c:spPr>
+            <a:solidFill>
+              <a:schemeClr val="accent3"/>
+            </a:solidFill>
+            <a:ln>
+              <a:noFill/>
+            </a:ln>
+            <a:effectLst/>
+          </c:spPr>
+          <c:invertIfNegative val="0"/>
+          <c:cat>
+            <c:strRef>
+              <c:f>Sheet1!$A$2:$A$5</c:f>
+              <c:strCache>
+                <c:ptCount val="4"/>
+                <c:pt idx="0">
+                  <c:v>OOPJ</c:v>
+                </c:pt>
+                <c:pt idx="1">
+                  <c:v>MATHS-2</c:v>
+                </c:pt>
+                <c:pt idx="2">
+                  <c:v>WD</c:v>
+                </c:pt>
+                <c:pt idx="3">
+                  <c:v>EG</c:v>
+                </c:pt>
+              </c:strCache>
+            </c:strRef>
+          </c:cat>
+          <c:val>
+            <c:numRef>
+              <c:f>Sheet1!$D$2:$D$5</c:f>
+              <c:numCache>
+                <c:formatCode>General</c:formatCode>
+                <c:ptCount val="4"/>
+                <c:pt idx="0">
+                  <c:v>99</c:v>
+                </c:pt>
+                <c:pt idx="1">
+                  <c:v>92</c:v>
+                </c:pt>
+                <c:pt idx="2">
+                  <c:v>92</c:v>
+                </c:pt>
+                <c:pt idx="3">
+                  <c:v>97</c:v>
+                </c:pt>
+              </c:numCache>
+            </c:numRef>
+          </c:val>
+          <c:extLst>
+            <c:ext xmlns:c16="http://schemas.microsoft.com/office/drawing/2014/chart" uri="{C3380CC4-5D6E-409C-BE32-E72D297353CC}">
+              <c16:uniqueId val="{00000002-81D6-4F0B-93CE-C0D00EA50F3C}"/>
+            </c:ext>
+          </c:extLst>
+        </c:ser>
+        <c:dLbls>
+          <c:showLegendKey val="0"/>
+          <c:showVal val="0"/>
+          <c:showCatName val="0"/>
+          <c:showSerName val="0"/>
+          <c:showPercent val="0"/>
+          <c:showBubbleSize val="0"/>
+        </c:dLbls>
+        <c:gapWidth val="219"/>
+        <c:overlap val="-27"/>
+        <c:axId val="1093033280"/>
+        <c:axId val="656799376"/>
+      </c:barChart>
+      <c:catAx>
+        <c:axId val="1093033280"/>
+        <c:scaling>
+          <c:orientation val="minMax"/>
+        </c:scaling>
+        <c:delete val="0"/>
+        <c:axPos val="b"/>
+        <c:numFmt formatCode="General" sourceLinked="1"/>
+        <c:majorTickMark val="none"/>
+        <c:minorTickMark val="none"/>
+        <c:tickLblPos val="nextTo"/>
+        <c:spPr>
+          <a:noFill/>
+          <a:ln w="9525" cap="flat" cmpd="sng" algn="ctr">
+            <a:solidFill>
+              <a:schemeClr val="tx1">
+                <a:lumMod val="15000"/>
+                <a:lumOff val="85000"/>
+              </a:schemeClr>
+            </a:solidFill>
+            <a:round/>
+          </a:ln>
+          <a:effectLst/>
+        </c:spPr>
+        <c:txPr>
+          <a:bodyPr rot="-60000000" spcFirstLastPara="1" vertOverflow="ellipsis" vert="horz" wrap="square" anchor="ctr" anchorCtr="1"/>
+          <a:lstStyle/>
+          <a:p>
+            <a:pPr>
+              <a:defRPr sz="1197" b="0" i="0" u="none" strike="noStrike" kern="1200" baseline="0">
+                <a:solidFill>
+                  <a:schemeClr val="tx1">
+                    <a:lumMod val="65000"/>
+                    <a:lumOff val="35000"/>
+                  </a:schemeClr>
+                </a:solidFill>
+                <a:latin typeface="+mn-lt"/>
+                <a:ea typeface="+mn-ea"/>
+                <a:cs typeface="+mn-cs"/>
+              </a:defRPr>
+            </a:pPr>
+            <a:endParaRPr lang="en-US"/>
+          </a:p>
+        </c:txPr>
+        <c:crossAx val="656799376"/>
+        <c:crosses val="autoZero"/>
+        <c:auto val="1"/>
+        <c:lblAlgn val="ctr"/>
+        <c:lblOffset val="100"/>
+        <c:noMultiLvlLbl val="0"/>
+      </c:catAx>
+      <c:valAx>
+        <c:axId val="656799376"/>
+        <c:scaling>
+          <c:orientation val="minMax"/>
+        </c:scaling>
+        <c:delete val="0"/>
+        <c:axPos val="l"/>
+        <c:majorGridlines>
+          <c:spPr>
+            <a:ln w="9525" cap="flat" cmpd="sng" algn="ctr">
+              <a:solidFill>
+                <a:schemeClr val="tx1">
+                  <a:lumMod val="15000"/>
+                  <a:lumOff val="85000"/>
+                </a:schemeClr>
+              </a:solidFill>
+              <a:round/>
+            </a:ln>
+            <a:effectLst/>
+          </c:spPr>
+        </c:majorGridlines>
+        <c:numFmt formatCode="General" sourceLinked="1"/>
+        <c:majorTickMark val="none"/>
+        <c:minorTickMark val="none"/>
+        <c:tickLblPos val="nextTo"/>
+        <c:spPr>
+          <a:noFill/>
+          <a:ln>
+            <a:noFill/>
+          </a:ln>
+          <a:effectLst/>
+        </c:spPr>
+        <c:txPr>
+          <a:bodyPr rot="-60000000" spcFirstLastPara="1" vertOverflow="ellipsis" vert="horz" wrap="square" anchor="ctr" anchorCtr="1"/>
+          <a:lstStyle/>
+          <a:p>
+            <a:pPr>
+              <a:defRPr sz="1197" b="0" i="0" u="none" strike="noStrike" kern="1200" baseline="0">
+                <a:solidFill>
+                  <a:schemeClr val="tx1">
+                    <a:lumMod val="65000"/>
+                    <a:lumOff val="35000"/>
+                  </a:schemeClr>
+                </a:solidFill>
+                <a:latin typeface="+mn-lt"/>
+                <a:ea typeface="+mn-ea"/>
+                <a:cs typeface="+mn-cs"/>
+              </a:defRPr>
+            </a:pPr>
+            <a:endParaRPr lang="en-US"/>
+          </a:p>
+        </c:txPr>
+        <c:crossAx val="1093033280"/>
+        <c:crosses val="autoZero"/>
+        <c:crossBetween val="between"/>
+      </c:valAx>
+      <c:spPr>
+        <a:noFill/>
+        <a:ln>
+          <a:noFill/>
+        </a:ln>
+        <a:effectLst/>
+      </c:spPr>
+    </c:plotArea>
+    <c:legend>
+      <c:legendPos val="b"/>
+      <c:overlay val="0"/>
+      <c:spPr>
+        <a:noFill/>
+        <a:ln>
+          <a:noFill/>
+        </a:ln>
+        <a:effectLst/>
+      </c:spPr>
+      <c:txPr>
+        <a:bodyPr rot="0" spcFirstLastPara="1" vertOverflow="ellipsis" vert="horz" wrap="square" anchor="ctr" anchorCtr="1"/>
+        <a:lstStyle/>
+        <a:p>
+          <a:pPr>
+            <a:defRPr sz="1197" b="0" i="0" u="none" strike="noStrike" kern="1200" baseline="0">
+              <a:solidFill>
+                <a:schemeClr val="tx1">
+                  <a:lumMod val="65000"/>
+                  <a:lumOff val="35000"/>
+                </a:schemeClr>
+              </a:solidFill>
+              <a:latin typeface="+mn-lt"/>
+              <a:ea typeface="+mn-ea"/>
+              <a:cs typeface="+mn-cs"/>
+            </a:defRPr>
+          </a:pPr>
+          <a:endParaRPr lang="en-US"/>
+        </a:p>
+      </c:txPr>
+    </c:legend>
+    <c:plotVisOnly val="1"/>
+    <c:dispBlanksAs val="gap"/>
+    <c:showDLblsOverMax val="0"/>
+    <c:extLst>
+      <c:ext xmlns:c16r3="http://schemas.microsoft.com/office/drawing/2017/03/chart" uri="{56B9EC1D-385E-4148-901F-78D8002777C0}">
+        <c16r3:dataDisplayOptions16>
+          <c16r3:dispNaAsBlank val="1"/>
+        </c16r3:dataDisplayOptions16>
+      </c:ext>
+    </c:extLst>
+  </c:chart>
+  <c:spPr>
+    <a:noFill/>
+    <a:ln>
+      <a:noFill/>
+    </a:ln>
+    <a:effectLst/>
+  </c:spPr>
+  <c:txPr>
+    <a:bodyPr/>
+    <a:lstStyle/>
+    <a:p>
+      <a:pPr>
+        <a:defRPr/>
+      </a:pPr>
+      <a:endParaRPr lang="en-US"/>
+    </a:p>
+  </c:txPr>
+  <c:externalData r:id="rId3">
+    <c:autoUpdate val="0"/>
+  </c:externalData>
+</c:chartSpace>
+</file>
+
+<file path=ppt/charts/chart2.xml><?xml version="1.0" encoding="utf-8"?>
+<c:chartSpace xmlns:c="http://schemas.openxmlformats.org/drawingml/2006/chart" xmlns:a="http://schemas.openxmlformats.org/drawingml/2006/main" xmlns:r="http://schemas.openxmlformats.org/officeDocument/2006/relationships" xmlns:c16r2="http://schemas.microsoft.com/office/drawing/2015/06/chart">
+  <c:date1904 val="0"/>
+  <c:lang val="en-US"/>
+  <c:roundedCorners val="0"/>
+  <mc:AlternateContent xmlns:mc="http://schemas.openxmlformats.org/markup-compatibility/2006">
+    <mc:Choice xmlns:c14="http://schemas.microsoft.com/office/drawing/2007/8/2/chart" Requires="c14">
+      <c14:style val="102"/>
+    </mc:Choice>
+    <mc:Fallback>
+      <c:style val="2"/>
+    </mc:Fallback>
+  </mc:AlternateContent>
+  <c:chart>
+    <c:title>
+      <c:overlay val="0"/>
+      <c:spPr>
+        <a:noFill/>
+        <a:ln>
+          <a:noFill/>
+        </a:ln>
+        <a:effectLst/>
+      </c:spPr>
+      <c:txPr>
+        <a:bodyPr rot="0" spcFirstLastPara="1" vertOverflow="ellipsis" vert="horz" wrap="square" anchor="ctr" anchorCtr="1"/>
+        <a:lstStyle/>
+        <a:p>
+          <a:pPr>
+            <a:defRPr sz="1862" b="0" i="0" u="none" strike="noStrike" kern="1200" spc="0" baseline="0">
+              <a:solidFill>
+                <a:schemeClr val="tx1">
+                  <a:lumMod val="65000"/>
+                  <a:lumOff val="35000"/>
+                </a:schemeClr>
+              </a:solidFill>
+              <a:latin typeface="+mn-lt"/>
+              <a:ea typeface="+mn-ea"/>
+              <a:cs typeface="+mn-cs"/>
+            </a:defRPr>
+          </a:pPr>
+          <a:endParaRPr lang="en-US"/>
+        </a:p>
+      </c:txPr>
+    </c:title>
+    <c:autoTitleDeleted val="0"/>
+    <c:plotArea>
+      <c:layout/>
+      <c:pieChart>
+        <c:varyColors val="1"/>
+        <c:ser>
+          <c:idx val="0"/>
+          <c:order val="0"/>
+          <c:tx>
+            <c:strRef>
+              <c:f>Sheet1!$B$1</c:f>
+              <c:strCache>
+                <c:ptCount val="1"/>
+                <c:pt idx="0">
+                  <c:v>Subject</c:v>
+                </c:pt>
+              </c:strCache>
+            </c:strRef>
+          </c:tx>
+          <c:dPt>
+            <c:idx val="0"/>
+            <c:bubble3D val="0"/>
+            <c:spPr>
+              <a:solidFill>
+                <a:schemeClr val="accent1"/>
+              </a:solidFill>
+              <a:ln w="19050">
+                <a:solidFill>
+                  <a:schemeClr val="lt1"/>
+                </a:solidFill>
+              </a:ln>
+              <a:effectLst/>
+            </c:spPr>
+          </c:dPt>
+          <c:dPt>
+            <c:idx val="1"/>
+            <c:bubble3D val="0"/>
+            <c:spPr>
+              <a:solidFill>
+                <a:schemeClr val="accent2"/>
+              </a:solidFill>
+              <a:ln w="19050">
+                <a:solidFill>
+                  <a:schemeClr val="lt1"/>
+                </a:solidFill>
+              </a:ln>
+              <a:effectLst/>
+            </c:spPr>
+          </c:dPt>
+          <c:dPt>
+            <c:idx val="2"/>
+            <c:bubble3D val="0"/>
+            <c:spPr>
+              <a:solidFill>
+                <a:schemeClr val="accent3"/>
+              </a:solidFill>
+              <a:ln w="19050">
+                <a:solidFill>
+                  <a:schemeClr val="lt1"/>
+                </a:solidFill>
+              </a:ln>
+              <a:effectLst/>
+            </c:spPr>
+          </c:dPt>
+          <c:dPt>
+            <c:idx val="3"/>
+            <c:bubble3D val="0"/>
+            <c:spPr>
+              <a:solidFill>
+                <a:schemeClr val="accent4"/>
+              </a:solidFill>
+              <a:ln w="19050">
+                <a:solidFill>
+                  <a:schemeClr val="lt1"/>
+                </a:solidFill>
+              </a:ln>
+              <a:effectLst/>
+            </c:spPr>
+          </c:dPt>
+          <c:cat>
+            <c:strRef>
+              <c:f>Sheet1!$A$2:$A$5</c:f>
+              <c:strCache>
+                <c:ptCount val="4"/>
+                <c:pt idx="0">
+                  <c:v>OOPJ</c:v>
+                </c:pt>
+                <c:pt idx="1">
+                  <c:v>MATHS-2</c:v>
+                </c:pt>
+                <c:pt idx="2">
+                  <c:v>WD</c:v>
+                </c:pt>
+                <c:pt idx="3">
+                  <c:v>EG</c:v>
+                </c:pt>
+              </c:strCache>
+            </c:strRef>
+          </c:cat>
+          <c:val>
+            <c:numRef>
+              <c:f>Sheet1!$B$2:$B$5</c:f>
+              <c:numCache>
+                <c:formatCode>General</c:formatCode>
+                <c:ptCount val="4"/>
+                <c:pt idx="0">
+                  <c:v>8.1999999999999993</c:v>
+                </c:pt>
+                <c:pt idx="1">
+                  <c:v>3.2</c:v>
+                </c:pt>
+                <c:pt idx="2">
+                  <c:v>1.4</c:v>
+                </c:pt>
+                <c:pt idx="3">
+                  <c:v>1.2</c:v>
+                </c:pt>
+              </c:numCache>
+            </c:numRef>
+          </c:val>
+          <c:extLst>
+            <c:ext xmlns:c16="http://schemas.microsoft.com/office/drawing/2014/chart" uri="{C3380CC4-5D6E-409C-BE32-E72D297353CC}">
+              <c16:uniqueId val="{00000000-F7D9-43A2-B7B8-69B6B85AD7D6}"/>
+            </c:ext>
+          </c:extLst>
+        </c:ser>
+        <c:dLbls>
+          <c:showLegendKey val="0"/>
+          <c:showVal val="0"/>
+          <c:showCatName val="0"/>
+          <c:showSerName val="0"/>
+          <c:showPercent val="0"/>
+          <c:showBubbleSize val="0"/>
+          <c:showLeaderLines val="1"/>
+        </c:dLbls>
+        <c:firstSliceAng val="0"/>
+      </c:pieChart>
+      <c:spPr>
+        <a:noFill/>
+        <a:ln>
+          <a:noFill/>
+        </a:ln>
+        <a:effectLst/>
+      </c:spPr>
+    </c:plotArea>
+    <c:legend>
+      <c:legendPos val="b"/>
+      <c:overlay val="0"/>
+      <c:spPr>
+        <a:noFill/>
+        <a:ln>
+          <a:noFill/>
+        </a:ln>
+        <a:effectLst/>
+      </c:spPr>
+      <c:txPr>
+        <a:bodyPr rot="0" spcFirstLastPara="1" vertOverflow="ellipsis" vert="horz" wrap="square" anchor="ctr" anchorCtr="1"/>
+        <a:lstStyle/>
+        <a:p>
+          <a:pPr>
+            <a:defRPr sz="1197" b="0" i="0" u="none" strike="noStrike" kern="1200" baseline="0">
+              <a:solidFill>
+                <a:schemeClr val="tx1">
+                  <a:lumMod val="65000"/>
+                  <a:lumOff val="35000"/>
+                </a:schemeClr>
+              </a:solidFill>
+              <a:latin typeface="+mn-lt"/>
+              <a:ea typeface="+mn-ea"/>
+              <a:cs typeface="+mn-cs"/>
+            </a:defRPr>
+          </a:pPr>
+          <a:endParaRPr lang="en-US"/>
+        </a:p>
+      </c:txPr>
+    </c:legend>
+    <c:plotVisOnly val="1"/>
+    <c:dispBlanksAs val="gap"/>
+    <c:showDLblsOverMax val="0"/>
+    <c:extLst>
+      <c:ext xmlns:c16r3="http://schemas.microsoft.com/office/drawing/2017/03/chart" uri="{56B9EC1D-385E-4148-901F-78D8002777C0}">
+        <c16r3:dataDisplayOptions16>
+          <c16r3:dispNaAsBlank val="1"/>
+        </c16r3:dataDisplayOptions16>
+      </c:ext>
+    </c:extLst>
+  </c:chart>
+  <c:spPr>
+    <a:noFill/>
+    <a:ln>
+      <a:noFill/>
+    </a:ln>
+    <a:effectLst/>
+  </c:spPr>
+  <c:txPr>
+    <a:bodyPr/>
+    <a:lstStyle/>
+    <a:p>
+      <a:pPr>
+        <a:defRPr/>
+      </a:pPr>
+      <a:endParaRPr lang="en-US"/>
+    </a:p>
+  </c:txPr>
+  <c:externalData r:id="rId3">
+    <c:autoUpdate val="0"/>
+  </c:externalData>
+</c:chartSpace>
+</file>
+
+<file path=ppt/charts/colors1.xml><?xml version="1.0" encoding="utf-8"?>
+<cs:colorStyle xmlns:cs="http://schemas.microsoft.com/office/drawing/2012/chartStyle" xmlns:a="http://schemas.openxmlformats.org/drawingml/2006/main" meth="cycle" id="10">
+  <a:schemeClr val="accent1"/>
+  <a:schemeClr val="accent2"/>
+  <a:schemeClr val="accent3"/>
+  <a:schemeClr val="accent4"/>
+  <a:schemeClr val="accent5"/>
+  <a:schemeClr val="accent6"/>
+  <cs:variation/>
+  <cs:variation>
+    <a:lumMod val="60000"/>
+  </cs:variation>
+  <cs:variation>
+    <a:lumMod val="80000"/>
+    <a:lumOff val="20000"/>
+  </cs:variation>
+  <cs:variation>
+    <a:lumMod val="80000"/>
+  </cs:variation>
+  <cs:variation>
+    <a:lumMod val="60000"/>
+    <a:lumOff val="40000"/>
+  </cs:variation>
+  <cs:variation>
+    <a:lumMod val="50000"/>
+  </cs:variation>
+  <cs:variation>
+    <a:lumMod val="70000"/>
+    <a:lumOff val="30000"/>
+  </cs:variation>
+  <cs:variation>
+    <a:lumMod val="70000"/>
+  </cs:variation>
+  <cs:variation>
+    <a:lumMod val="50000"/>
+    <a:lumOff val="50000"/>
+  </cs:variation>
+</cs:colorStyle>
+</file>
+
+<file path=ppt/charts/colors2.xml><?xml version="1.0" encoding="utf-8"?>
+<cs:colorStyle xmlns:cs="http://schemas.microsoft.com/office/drawing/2012/chartStyle" xmlns:a="http://schemas.openxmlformats.org/drawingml/2006/main" meth="cycle" id="10">
+  <a:schemeClr val="accent1"/>
+  <a:schemeClr val="accent2"/>
+  <a:schemeClr val="accent3"/>
+  <a:schemeClr val="accent4"/>
+  <a:schemeClr val="accent5"/>
+  <a:schemeClr val="accent6"/>
+  <cs:variation/>
+  <cs:variation>
+    <a:lumMod val="60000"/>
+  </cs:variation>
+  <cs:variation>
+    <a:lumMod val="80000"/>
+    <a:lumOff val="20000"/>
+  </cs:variation>
+  <cs:variation>
+    <a:lumMod val="80000"/>
+  </cs:variation>
+  <cs:variation>
+    <a:lumMod val="60000"/>
+    <a:lumOff val="40000"/>
+  </cs:variation>
+  <cs:variation>
+    <a:lumMod val="50000"/>
+  </cs:variation>
+  <cs:variation>
+    <a:lumMod val="70000"/>
+    <a:lumOff val="30000"/>
+  </cs:variation>
+  <cs:variation>
+    <a:lumMod val="70000"/>
+  </cs:variation>
+  <cs:variation>
+    <a:lumMod val="50000"/>
+    <a:lumOff val="50000"/>
+  </cs:variation>
+</cs:colorStyle>
+</file>
+
+<file path=ppt/charts/style1.xml><?xml version="1.0" encoding="utf-8"?>
+<cs:chartStyle xmlns:cs="http://schemas.microsoft.com/office/drawing/2012/chartStyle" xmlns:a="http://schemas.openxmlformats.org/drawingml/2006/main" id="201">
+  <cs:axisTitle>
+    <cs:lnRef idx="0"/>
+    <cs:fillRef idx="0"/>
+    <cs:effectRef idx="0"/>
+    <cs:fontRef idx="minor">
+      <a:schemeClr val="tx1">
+        <a:lumMod val="65000"/>
+        <a:lumOff val="35000"/>
+      </a:schemeClr>
+    </cs:fontRef>
+    <cs:defRPr sz="1330" kern="1200"/>
+  </cs:axisTitle>
+  <cs:categoryAxis>
+    <cs:lnRef idx="0"/>
+    <cs:fillRef idx="0"/>
+    <cs:effectRef idx="0"/>
+    <cs:fontRef idx="minor">
+      <a:schemeClr val="tx1">
+        <a:lumMod val="65000"/>
+        <a:lumOff val="35000"/>
+      </a:schemeClr>
+    </cs:fontRef>
+    <cs:spPr>
+      <a:ln w="9525" cap="flat" cmpd="sng" algn="ctr">
+        <a:solidFill>
+          <a:schemeClr val="tx1">
+            <a:lumMod val="15000"/>
+            <a:lumOff val="85000"/>
+          </a:schemeClr>
+        </a:solidFill>
+        <a:round/>
+      </a:ln>
+    </cs:spPr>
+    <cs:defRPr sz="1197" kern="1200"/>
+  </cs:categoryAxis>
+  <cs:chartArea mods="allowNoFillOverride allowNoLineOverride">
+    <cs:lnRef idx="0"/>
+    <cs:fillRef idx="0"/>
+    <cs:effectRef idx="0"/>
+    <cs:fontRef idx="minor">
+      <a:schemeClr val="tx1"/>
+    </cs:fontRef>
+    <cs:spPr>
+      <a:solidFill>
+        <a:schemeClr val="bg1"/>
+      </a:solidFill>
+      <a:ln w="9525" cap="flat" cmpd="sng" algn="ctr">
+        <a:solidFill>
+          <a:schemeClr val="tx1">
+            <a:lumMod val="15000"/>
+            <a:lumOff val="85000"/>
+          </a:schemeClr>
+        </a:solidFill>
+        <a:round/>
+      </a:ln>
+    </cs:spPr>
+    <cs:defRPr sz="1330" kern="1200"/>
+  </cs:chartArea>
+  <cs:dataLabel>
+    <cs:lnRef idx="0"/>
+    <cs:fillRef idx="0"/>
+    <cs:effectRef idx="0"/>
+    <cs:fontRef idx="minor">
+      <a:schemeClr val="tx1">
+        <a:lumMod val="75000"/>
+        <a:lumOff val="25000"/>
+      </a:schemeClr>
+    </cs:fontRef>
+    <cs:defRPr sz="1197" kern="1200"/>
+  </cs:dataLabel>
+  <cs:dataLabelCallout>
+    <cs:lnRef idx="0"/>
+    <cs:fillRef idx="0"/>
+    <cs:effectRef idx="0"/>
+    <cs:fontRef idx="minor">
+      <a:schemeClr val="dk1">
+        <a:lumMod val="65000"/>
+        <a:lumOff val="35000"/>
+      </a:schemeClr>
+    </cs:fontRef>
+    <cs:spPr>
+      <a:solidFill>
+        <a:schemeClr val="lt1"/>
+      </a:solidFill>
+      <a:ln>
+        <a:solidFill>
+          <a:schemeClr val="dk1">
+            <a:lumMod val="25000"/>
+            <a:lumOff val="75000"/>
+          </a:schemeClr>
+        </a:solidFill>
+      </a:ln>
+    </cs:spPr>
+    <cs:defRPr sz="1197" kern="1200"/>
+    <cs:bodyPr rot="0" spcFirstLastPara="1" vertOverflow="clip" horzOverflow="clip" vert="horz" wrap="square" lIns="36576" tIns="18288" rIns="36576" bIns="18288" anchor="ctr" anchorCtr="1">
+      <a:spAutoFit/>
+    </cs:bodyPr>
+  </cs:dataLabelCallout>
+  <cs:dataPoint>
+    <cs:lnRef idx="0"/>
+    <cs:fillRef idx="1">
+      <cs:styleClr val="auto"/>
+    </cs:fillRef>
+    <cs:effectRef idx="0"/>
+    <cs:fontRef idx="minor">
+      <a:schemeClr val="tx1"/>
+    </cs:fontRef>
+  </cs:dataPoint>
+  <cs:dataPoint3D>
+    <cs:lnRef idx="0"/>
+    <cs:fillRef idx="1">
+      <cs:styleClr val="auto"/>
+    </cs:fillRef>
+    <cs:effectRef idx="0"/>
+    <cs:fontRef idx="minor">
+      <a:schemeClr val="tx1"/>
+    </cs:fontRef>
+  </cs:dataPoint3D>
+  <cs:dataPointLine>
+    <cs:lnRef idx="0">
+      <cs:styleClr val="auto"/>
+    </cs:lnRef>
+    <cs:fillRef idx="1"/>
+    <cs:effectRef idx="0"/>
+    <cs:fontRef idx="minor">
+      <a:schemeClr val="tx1"/>
+    </cs:fontRef>
+    <cs:spPr>
+      <a:ln w="28575" cap="rnd">
+        <a:solidFill>
+          <a:schemeClr val="phClr"/>
+        </a:solidFill>
+        <a:round/>
+      </a:ln>
+    </cs:spPr>
+  </cs:dataPointLine>
+  <cs:dataPointMarker>
+    <cs:lnRef idx="0">
+      <cs:styleClr val="auto"/>
+    </cs:lnRef>
+    <cs:fillRef idx="1">
+      <cs:styleClr val="auto"/>
+    </cs:fillRef>
+    <cs:effectRef idx="0"/>
+    <cs:fontRef idx="minor">
+      <a:schemeClr val="tx1"/>
+    </cs:fontRef>
+    <cs:spPr>
+      <a:ln w="9525">
+        <a:solidFill>
+          <a:schemeClr val="phClr"/>
+        </a:solidFill>
+      </a:ln>
+    </cs:spPr>
+  </cs:dataPointMarker>
+  <cs:dataPointMarkerLayout symbol="circle" size="5"/>
+  <cs:dataPointWireframe>
+    <cs:lnRef idx="0">
+      <cs:styleClr val="auto"/>
+    </cs:lnRef>
+    <cs:fillRef idx="1"/>
+    <cs:effectRef idx="0"/>
+    <cs:fontRef idx="minor">
+      <a:schemeClr val="tx1"/>
+    </cs:fontRef>
+    <cs:spPr>
+      <a:ln w="9525" cap="rnd">
+        <a:solidFill>
+          <a:schemeClr val="phClr"/>
+        </a:solidFill>
+        <a:round/>
+      </a:ln>
+    </cs:spPr>
+  </cs:dataPointWireframe>
+  <cs:dataTable>
+    <cs:lnRef idx="0"/>
+    <cs:fillRef idx="0"/>
+    <cs:effectRef idx="0"/>
+    <cs:fontRef idx="minor">
+      <a:schemeClr val="tx1">
+        <a:lumMod val="65000"/>
+        <a:lumOff val="35000"/>
+      </a:schemeClr>
+    </cs:fontRef>
+    <cs:spPr>
+      <a:noFill/>
+      <a:ln w="9525" cap="flat" cmpd="sng" algn="ctr">
+        <a:solidFill>
+          <a:schemeClr val="tx1">
+            <a:lumMod val="15000"/>
+            <a:lumOff val="85000"/>
+          </a:schemeClr>
+        </a:solidFill>
+        <a:round/>
+      </a:ln>
+    </cs:spPr>
+    <cs:defRPr sz="1197" kern="1200"/>
+  </cs:dataTable>
+  <cs:downBar>
+    <cs:lnRef idx="0"/>
+    <cs:fillRef idx="0"/>
+    <cs:effectRef idx="0"/>
+    <cs:fontRef idx="minor">
+      <a:schemeClr val="dk1"/>
+    </cs:fontRef>
+    <cs:spPr>
+      <a:solidFill>
+        <a:schemeClr val="dk1">
+          <a:lumMod val="65000"/>
+          <a:lumOff val="35000"/>
+        </a:schemeClr>
+      </a:solidFill>
+      <a:ln w="9525">
+        <a:solidFill>
+          <a:schemeClr val="tx1">
+            <a:lumMod val="65000"/>
+            <a:lumOff val="35000"/>
+          </a:schemeClr>
+        </a:solidFill>
+      </a:ln>
+    </cs:spPr>
+  </cs:downBar>
+  <cs:dropLine>
+    <cs:lnRef idx="0"/>
+    <cs:fillRef idx="0"/>
+    <cs:effectRef idx="0"/>
+    <cs:fontRef idx="minor">
+      <a:schemeClr val="tx1"/>
+    </cs:fontRef>
+    <cs:spPr>
+      <a:ln w="9525" cap="flat" cmpd="sng" algn="ctr">
+        <a:solidFill>
+          <a:schemeClr val="tx1">
+            <a:lumMod val="35000"/>
+            <a:lumOff val="65000"/>
+          </a:schemeClr>
+        </a:solidFill>
+        <a:round/>
+      </a:ln>
+    </cs:spPr>
+  </cs:dropLine>
+  <cs:errorBar>
+    <cs:lnRef idx="0"/>
+    <cs:fillRef idx="0"/>
+    <cs:effectRef idx="0"/>
+    <cs:fontRef idx="minor">
+      <a:schemeClr val="tx1"/>
+    </cs:fontRef>
+    <cs:spPr>
+      <a:ln w="9525" cap="flat" cmpd="sng" algn="ctr">
+        <a:solidFill>
+          <a:schemeClr val="tx1">
+            <a:lumMod val="65000"/>
+            <a:lumOff val="35000"/>
+          </a:schemeClr>
+        </a:solidFill>
+        <a:round/>
+      </a:ln>
+    </cs:spPr>
+  </cs:errorBar>
+  <cs:floor>
+    <cs:lnRef idx="0"/>
+    <cs:fillRef idx="0"/>
+    <cs:effectRef idx="0"/>
+    <cs:fontRef idx="minor">
+      <a:schemeClr val="tx1"/>
+    </cs:fontRef>
+    <cs:spPr>
+      <a:noFill/>
+      <a:ln>
+        <a:noFill/>
+      </a:ln>
+    </cs:spPr>
+  </cs:floor>
+  <cs:gridlineMajor>
+    <cs:lnRef idx="0"/>
+    <cs:fillRef idx="0"/>
+    <cs:effectRef idx="0"/>
+    <cs:fontRef idx="minor">
+      <a:schemeClr val="tx1"/>
+    </cs:fontRef>
+    <cs:spPr>
+      <a:ln w="9525" cap="flat" cmpd="sng" algn="ctr">
+        <a:solidFill>
+          <a:schemeClr val="tx1">
+            <a:lumMod val="15000"/>
+            <a:lumOff val="85000"/>
+          </a:schemeClr>
+        </a:solidFill>
+        <a:round/>
+      </a:ln>
+    </cs:spPr>
+  </cs:gridlineMajor>
+  <cs:gridlineMinor>
+    <cs:lnRef idx="0"/>
+    <cs:fillRef idx="0"/>
+    <cs:effectRef idx="0"/>
+    <cs:fontRef idx="minor">
+      <a:schemeClr val="tx1"/>
+    </cs:fontRef>
+    <cs:spPr>
+      <a:ln w="9525" cap="flat" cmpd="sng" algn="ctr">
+        <a:solidFill>
+          <a:schemeClr val="tx1">
+            <a:lumMod val="5000"/>
+            <a:lumOff val="95000"/>
+          </a:schemeClr>
+        </a:solidFill>
+        <a:round/>
+      </a:ln>
+    </cs:spPr>
+  </cs:gridlineMinor>
+  <cs:hiLoLine>
+    <cs:lnRef idx="0"/>
+    <cs:fillRef idx="0"/>
+    <cs:effectRef idx="0"/>
+    <cs:fontRef idx="minor">
+      <a:schemeClr val="tx1"/>
+    </cs:fontRef>
+    <cs:spPr>
+      <a:ln w="9525" cap="flat" cmpd="sng" algn="ctr">
+        <a:solidFill>
+          <a:schemeClr val="tx1">
+            <a:lumMod val="75000"/>
+            <a:lumOff val="25000"/>
+          </a:schemeClr>
+        </a:solidFill>
+        <a:round/>
+      </a:ln>
+    </cs:spPr>
+  </cs:hiLoLine>
+  <cs:leaderLine>
+    <cs:lnRef idx="0"/>
+    <cs:fillRef idx="0"/>
+    <cs:effectRef idx="0"/>
+    <cs:fontRef idx="minor">
+      <a:schemeClr val="tx1"/>
+    </cs:fontRef>
+    <cs:spPr>
+      <a:ln w="9525" cap="flat" cmpd="sng" algn="ctr">
+        <a:solidFill>
+          <a:schemeClr val="tx1">
+            <a:lumMod val="35000"/>
+            <a:lumOff val="65000"/>
+          </a:schemeClr>
+        </a:solidFill>
+        <a:round/>
+      </a:ln>
+    </cs:spPr>
+  </cs:leaderLine>
+  <cs:legend>
+    <cs:lnRef idx="0"/>
+    <cs:fillRef idx="0"/>
+    <cs:effectRef idx="0"/>
+    <cs:fontRef idx="minor">
+      <a:schemeClr val="tx1">
+        <a:lumMod val="65000"/>
+        <a:lumOff val="35000"/>
+      </a:schemeClr>
+    </cs:fontRef>
+    <cs:defRPr sz="1197" kern="1200"/>
+  </cs:legend>
+  <cs:plotArea mods="allowNoFillOverride allowNoLineOverride">
+    <cs:lnRef idx="0"/>
+    <cs:fillRef idx="0"/>
+    <cs:effectRef idx="0"/>
+    <cs:fontRef idx="minor">
+      <a:schemeClr val="tx1"/>
+    </cs:fontRef>
+  </cs:plotArea>
+  <cs:plotArea3D mods="allowNoFillOverride allowNoLineOverride">
+    <cs:lnRef idx="0"/>
+    <cs:fillRef idx="0"/>
+    <cs:effectRef idx="0"/>
+    <cs:fontRef idx="minor">
+      <a:schemeClr val="tx1"/>
+    </cs:fontRef>
+  </cs:plotArea3D>
+  <cs:seriesAxis>
+    <cs:lnRef idx="0"/>
+    <cs:fillRef idx="0"/>
+    <cs:effectRef idx="0"/>
+    <cs:fontRef idx="minor">
+      <a:schemeClr val="tx1">
+        <a:lumMod val="65000"/>
+        <a:lumOff val="35000"/>
+      </a:schemeClr>
+    </cs:fontRef>
+    <cs:defRPr sz="1197" kern="1200"/>
+  </cs:seriesAxis>
+  <cs:seriesLine>
+    <cs:lnRef idx="0"/>
+    <cs:fillRef idx="0"/>
+    <cs:effectRef idx="0"/>
+    <cs:fontRef idx="minor">
+      <a:schemeClr val="tx1"/>
+    </cs:fontRef>
+    <cs:spPr>
+      <a:ln w="9525" cap="flat" cmpd="sng" algn="ctr">
+        <a:solidFill>
+          <a:schemeClr val="tx1">
+            <a:lumMod val="35000"/>
+            <a:lumOff val="65000"/>
+          </a:schemeClr>
+        </a:solidFill>
+        <a:round/>
+      </a:ln>
+    </cs:spPr>
+  </cs:seriesLine>
+  <cs:title>
+    <cs:lnRef idx="0"/>
+    <cs:fillRef idx="0"/>
+    <cs:effectRef idx="0"/>
+    <cs:fontRef idx="minor">
+      <a:schemeClr val="tx1">
+        <a:lumMod val="65000"/>
+        <a:lumOff val="35000"/>
+      </a:schemeClr>
+    </cs:fontRef>
+    <cs:defRPr sz="1862" b="0" kern="1200" spc="0" baseline="0"/>
+  </cs:title>
+  <cs:trendline>
+    <cs:lnRef idx="0">
+      <cs:styleClr val="auto"/>
+    </cs:lnRef>
+    <cs:fillRef idx="0"/>
+    <cs:effectRef idx="0"/>
+    <cs:fontRef idx="minor">
+      <a:schemeClr val="tx1"/>
+    </cs:fontRef>
+    <cs:spPr>
+      <a:ln w="19050" cap="rnd">
+        <a:solidFill>
+          <a:schemeClr val="phClr"/>
+        </a:solidFill>
+        <a:prstDash val="sysDot"/>
+      </a:ln>
+    </cs:spPr>
+  </cs:trendline>
+  <cs:trendlineLabel>
+    <cs:lnRef idx="0"/>
+    <cs:fillRef idx="0"/>
+    <cs:effectRef idx="0"/>
+    <cs:fontRef idx="minor">
+      <a:schemeClr val="tx1">
+        <a:lumMod val="65000"/>
+        <a:lumOff val="35000"/>
+      </a:schemeClr>
+    </cs:fontRef>
+    <cs:defRPr sz="1197" kern="1200"/>
+  </cs:trendlineLabel>
+  <cs:upBar>
+    <cs:lnRef idx="0"/>
+    <cs:fillRef idx="0"/>
+    <cs:effectRef idx="0"/>
+    <cs:fontRef idx="minor">
+      <a:schemeClr val="dk1"/>
+    </cs:fontRef>
+    <cs:spPr>
+      <a:solidFill>
+        <a:schemeClr val="lt1"/>
+      </a:solidFill>
+      <a:ln w="9525">
+        <a:solidFill>
+          <a:schemeClr val="tx1">
+            <a:lumMod val="15000"/>
+            <a:lumOff val="85000"/>
+          </a:schemeClr>
+        </a:solidFill>
+      </a:ln>
+    </cs:spPr>
+  </cs:upBar>
+  <cs:valueAxis>
+    <cs:lnRef idx="0"/>
+    <cs:fillRef idx="0"/>
+    <cs:effectRef idx="0"/>
+    <cs:fontRef idx="minor">
+      <a:schemeClr val="tx1">
+        <a:lumMod val="65000"/>
+        <a:lumOff val="35000"/>
+      </a:schemeClr>
+    </cs:fontRef>
+    <cs:defRPr sz="1197" kern="1200"/>
+  </cs:valueAxis>
+  <cs:wall>
+    <cs:lnRef idx="0"/>
+    <cs:fillRef idx="0"/>
+    <cs:effectRef idx="0"/>
+    <cs:fontRef idx="minor">
+      <a:schemeClr val="tx1"/>
+    </cs:fontRef>
+    <cs:spPr>
+      <a:noFill/>
+      <a:ln>
+        <a:noFill/>
+      </a:ln>
+    </cs:spPr>
+  </cs:wall>
+</cs:chartStyle>
+</file>
+
+<file path=ppt/charts/style2.xml><?xml version="1.0" encoding="utf-8"?>
+<cs:chartStyle xmlns:cs="http://schemas.microsoft.com/office/drawing/2012/chartStyle" xmlns:a="http://schemas.openxmlformats.org/drawingml/2006/main" id="251">
+  <cs:axisTitle>
+    <cs:lnRef idx="0"/>
+    <cs:fillRef idx="0"/>
+    <cs:effectRef idx="0"/>
+    <cs:fontRef idx="minor">
+      <a:schemeClr val="tx1">
+        <a:lumMod val="65000"/>
+        <a:lumOff val="35000"/>
+      </a:schemeClr>
+    </cs:fontRef>
+    <cs:defRPr sz="1330" kern="1200"/>
+  </cs:axisTitle>
+  <cs:categoryAxis>
+    <cs:lnRef idx="0"/>
+    <cs:fillRef idx="0"/>
+    <cs:effectRef idx="0"/>
+    <cs:fontRef idx="minor">
+      <a:schemeClr val="tx1">
+        <a:lumMod val="65000"/>
+        <a:lumOff val="35000"/>
+      </a:schemeClr>
+    </cs:fontRef>
+    <cs:spPr>
+      <a:ln w="9525" cap="flat" cmpd="sng" algn="ctr">
+        <a:solidFill>
+          <a:schemeClr val="tx1">
+            <a:lumMod val="15000"/>
+            <a:lumOff val="85000"/>
+          </a:schemeClr>
+        </a:solidFill>
+        <a:round/>
+      </a:ln>
+    </cs:spPr>
+    <cs:defRPr sz="1197" kern="1200"/>
+  </cs:categoryAxis>
+  <cs:chartArea mods="allowNoFillOverride allowNoLineOverride">
+    <cs:lnRef idx="0"/>
+    <cs:fillRef idx="0"/>
+    <cs:effectRef idx="0"/>
+    <cs:fontRef idx="minor">
+      <a:schemeClr val="tx1"/>
+    </cs:fontRef>
+    <cs:spPr>
+      <a:solidFill>
+        <a:schemeClr val="bg1"/>
+      </a:solidFill>
+      <a:ln w="9525" cap="flat" cmpd="sng" algn="ctr">
+        <a:solidFill>
+          <a:schemeClr val="tx1">
+            <a:lumMod val="15000"/>
+            <a:lumOff val="85000"/>
+          </a:schemeClr>
+        </a:solidFill>
+        <a:round/>
+      </a:ln>
+    </cs:spPr>
+    <cs:defRPr sz="1197" kern="1200"/>
+  </cs:chartArea>
+  <cs:dataLabel>
+    <cs:lnRef idx="0"/>
+    <cs:fillRef idx="0"/>
+    <cs:effectRef idx="0"/>
+    <cs:fontRef idx="minor">
+      <a:schemeClr val="tx1">
+        <a:lumMod val="75000"/>
+        <a:lumOff val="25000"/>
+      </a:schemeClr>
+    </cs:fontRef>
+    <cs:defRPr sz="1197" kern="1200"/>
+  </cs:dataLabel>
+  <cs:dataLabelCallout>
+    <cs:lnRef idx="0"/>
+    <cs:fillRef idx="0"/>
+    <cs:effectRef idx="0"/>
+    <cs:fontRef idx="minor">
+      <a:schemeClr val="dk1">
+        <a:lumMod val="65000"/>
+        <a:lumOff val="35000"/>
+      </a:schemeClr>
+    </cs:fontRef>
+    <cs:spPr>
+      <a:solidFill>
+        <a:schemeClr val="lt1"/>
+      </a:solidFill>
+      <a:ln>
+        <a:solidFill>
+          <a:schemeClr val="dk1">
+            <a:lumMod val="25000"/>
+            <a:lumOff val="75000"/>
+          </a:schemeClr>
+        </a:solidFill>
+      </a:ln>
+    </cs:spPr>
+    <cs:defRPr sz="1197" kern="1200"/>
+    <cs:bodyPr rot="0" spcFirstLastPara="1" vertOverflow="clip" horzOverflow="clip" vert="horz" wrap="square" lIns="36576" tIns="18288" rIns="36576" bIns="18288" anchor="ctr" anchorCtr="1">
+      <a:spAutoFit/>
+    </cs:bodyPr>
+  </cs:dataLabelCallout>
+  <cs:dataPoint>
+    <cs:lnRef idx="0"/>
+    <cs:fillRef idx="1">
+      <cs:styleClr val="auto"/>
+    </cs:fillRef>
+    <cs:effectRef idx="0"/>
+    <cs:fontRef idx="minor">
+      <a:schemeClr val="tx1"/>
+    </cs:fontRef>
+    <cs:spPr>
+      <a:ln w="19050">
+        <a:solidFill>
+          <a:schemeClr val="lt1"/>
+        </a:solidFill>
+      </a:ln>
+    </cs:spPr>
+  </cs:dataPoint>
+  <cs:dataPoint3D>
+    <cs:lnRef idx="0"/>
+    <cs:fillRef idx="1">
+      <cs:styleClr val="auto"/>
+    </cs:fillRef>
+    <cs:effectRef idx="0"/>
+    <cs:fontRef idx="minor">
+      <a:schemeClr val="tx1"/>
+    </cs:fontRef>
+    <cs:spPr>
+      <a:ln w="25400">
+        <a:solidFill>
+          <a:schemeClr val="lt1"/>
+        </a:solidFill>
+      </a:ln>
+    </cs:spPr>
+  </cs:dataPoint3D>
+  <cs:dataPointLine>
+    <cs:lnRef idx="0">
+      <cs:styleClr val="auto"/>
+    </cs:lnRef>
+    <cs:fillRef idx="0"/>
+    <cs:effectRef idx="0"/>
+    <cs:fontRef idx="minor">
+      <a:schemeClr val="tx1"/>
+    </cs:fontRef>
+    <cs:spPr>
+      <a:ln w="28575" cap="rnd">
+        <a:solidFill>
+          <a:schemeClr val="phClr"/>
+        </a:solidFill>
+        <a:round/>
+      </a:ln>
+    </cs:spPr>
+  </cs:dataPointLine>
+  <cs:dataPointMarker>
+    <cs:lnRef idx="0">
+      <cs:styleClr val="auto"/>
+    </cs:lnRef>
+    <cs:fillRef idx="1">
+      <cs:styleClr val="auto"/>
+    </cs:fillRef>
+    <cs:effectRef idx="0"/>
+    <cs:fontRef idx="minor">
+      <a:schemeClr val="tx1"/>
+    </cs:fontRef>
+    <cs:spPr>
+      <a:ln w="9525">
+        <a:solidFill>
+          <a:schemeClr val="phClr"/>
+        </a:solidFill>
+      </a:ln>
+    </cs:spPr>
+  </cs:dataPointMarker>
+  <cs:dataPointMarkerLayout symbol="circle" size="5"/>
+  <cs:dataPointWireframe>
+    <cs:lnRef idx="0">
+      <cs:styleClr val="auto"/>
+    </cs:lnRef>
+    <cs:fillRef idx="0"/>
+    <cs:effectRef idx="0"/>
+    <cs:fontRef idx="minor">
+      <a:schemeClr val="tx1"/>
+    </cs:fontRef>
+    <cs:spPr>
+      <a:ln w="9525" cap="rnd">
+        <a:solidFill>
+          <a:schemeClr val="phClr"/>
+        </a:solidFill>
+        <a:round/>
+      </a:ln>
+    </cs:spPr>
+  </cs:dataPointWireframe>
+  <cs:dataTable>
+    <cs:lnRef idx="0"/>
+    <cs:fillRef idx="0"/>
+    <cs:effectRef idx="0"/>
+    <cs:fontRef idx="minor">
+      <a:schemeClr val="tx1">
+        <a:lumMod val="65000"/>
+        <a:lumOff val="35000"/>
+      </a:schemeClr>
+    </cs:fontRef>
+    <cs:spPr>
+      <a:noFill/>
+      <a:ln w="9525" cap="flat" cmpd="sng" algn="ctr">
+        <a:solidFill>
+          <a:schemeClr val="tx1">
+            <a:lumMod val="15000"/>
+            <a:lumOff val="85000"/>
+          </a:schemeClr>
+        </a:solidFill>
+        <a:round/>
+      </a:ln>
+    </cs:spPr>
+    <cs:defRPr sz="1197" kern="1200"/>
+  </cs:dataTable>
+  <cs:downBar>
+    <cs:lnRef idx="0"/>
+    <cs:fillRef idx="0"/>
+    <cs:effectRef idx="0"/>
+    <cs:fontRef idx="minor">
+      <a:schemeClr val="tx1"/>
+    </cs:fontRef>
+    <cs:spPr>
+      <a:solidFill>
+        <a:schemeClr val="dk1">
+          <a:lumMod val="75000"/>
+          <a:lumOff val="25000"/>
+        </a:schemeClr>
+      </a:solidFill>
+      <a:ln w="9525" cap="flat" cmpd="sng" algn="ctr">
+        <a:solidFill>
+          <a:schemeClr val="tx1">
+            <a:lumMod val="65000"/>
+            <a:lumOff val="35000"/>
+          </a:schemeClr>
+        </a:solidFill>
+        <a:round/>
+      </a:ln>
+    </cs:spPr>
+  </cs:downBar>
+  <cs:dropLine>
+    <cs:lnRef idx="0"/>
+    <cs:fillRef idx="0"/>
+    <cs:effectRef idx="0"/>
+    <cs:fontRef idx="minor">
+      <a:schemeClr val="tx1"/>
+    </cs:fontRef>
+    <cs:spPr>
+      <a:ln w="9525" cap="flat" cmpd="sng" algn="ctr">
+        <a:solidFill>
+          <a:schemeClr val="tx1">
+            <a:lumMod val="35000"/>
+            <a:lumOff val="65000"/>
+          </a:schemeClr>
+        </a:solidFill>
+        <a:round/>
+      </a:ln>
+    </cs:spPr>
+  </cs:dropLine>
+  <cs:errorBar>
+    <cs:lnRef idx="0"/>
+    <cs:fillRef idx="0"/>
+    <cs:effectRef idx="0"/>
+    <cs:fontRef idx="minor">
+      <a:schemeClr val="tx1"/>
+    </cs:fontRef>
+    <cs:spPr>
+      <a:ln w="9525" cap="flat" cmpd="sng" algn="ctr">
+        <a:solidFill>
+          <a:schemeClr val="tx1">
+            <a:lumMod val="65000"/>
+            <a:lumOff val="35000"/>
+          </a:schemeClr>
+        </a:solidFill>
+        <a:round/>
+      </a:ln>
+    </cs:spPr>
+  </cs:errorBar>
+  <cs:floor>
+    <cs:lnRef idx="0"/>
+    <cs:fillRef idx="0"/>
+    <cs:effectRef idx="0"/>
+    <cs:fontRef idx="minor">
+      <a:schemeClr val="tx1"/>
+    </cs:fontRef>
+    <cs:spPr>
+      <a:noFill/>
+      <a:ln>
+        <a:noFill/>
+      </a:ln>
+    </cs:spPr>
+  </cs:floor>
+  <cs:gridlineMajor>
+    <cs:lnRef idx="0"/>
+    <cs:fillRef idx="0"/>
+    <cs:effectRef idx="0"/>
+    <cs:fontRef idx="minor">
+      <a:schemeClr val="tx1"/>
+    </cs:fontRef>
+    <cs:spPr>
+      <a:ln w="9525" cap="flat" cmpd="sng" algn="ctr">
+        <a:solidFill>
+          <a:schemeClr val="tx1">
+            <a:lumMod val="15000"/>
+            <a:lumOff val="85000"/>
+          </a:schemeClr>
+        </a:solidFill>
+        <a:round/>
+      </a:ln>
+    </cs:spPr>
+  </cs:gridlineMajor>
+  <cs:gridlineMinor>
+    <cs:lnRef idx="0"/>
+    <cs:fillRef idx="0"/>
+    <cs:effectRef idx="0"/>
+    <cs:fontRef idx="minor">
+      <a:schemeClr val="tx1"/>
+    </cs:fontRef>
+    <cs:spPr>
+      <a:ln w="9525" cap="flat" cmpd="sng" algn="ctr">
+        <a:solidFill>
+          <a:schemeClr val="tx1">
+            <a:lumMod val="5000"/>
+            <a:lumOff val="95000"/>
+          </a:schemeClr>
+        </a:solidFill>
+        <a:round/>
+      </a:ln>
+    </cs:spPr>
+  </cs:gridlineMinor>
+  <cs:hiLoLine>
+    <cs:lnRef idx="0"/>
+    <cs:fillRef idx="0"/>
+    <cs:effectRef idx="0"/>
+    <cs:fontRef idx="minor">
+      <a:schemeClr val="tx1"/>
+    </cs:fontRef>
+    <cs:spPr>
+      <a:ln w="9525" cap="flat" cmpd="sng" algn="ctr">
+        <a:solidFill>
+          <a:schemeClr val="tx1">
+            <a:lumMod val="50000"/>
+            <a:lumOff val="50000"/>
+          </a:schemeClr>
+        </a:solidFill>
+        <a:round/>
+      </a:ln>
+    </cs:spPr>
+  </cs:hiLoLine>
+  <cs:leaderLine>
+    <cs:lnRef idx="0"/>
+    <cs:fillRef idx="0"/>
+    <cs:effectRef idx="0"/>
+    <cs:fontRef idx="minor">
+      <a:schemeClr val="tx1"/>
+    </cs:fontRef>
+    <cs:spPr>
+      <a:ln w="9525" cap="flat" cmpd="sng" algn="ctr">
+        <a:solidFill>
+          <a:schemeClr val="tx1">
+            <a:lumMod val="35000"/>
+            <a:lumOff val="65000"/>
+          </a:schemeClr>
+        </a:solidFill>
+        <a:round/>
+      </a:ln>
+    </cs:spPr>
+  </cs:leaderLine>
+  <cs:legend>
+    <cs:lnRef idx="0"/>
+    <cs:fillRef idx="0"/>
+    <cs:effectRef idx="0"/>
+    <cs:fontRef idx="minor">
+      <a:schemeClr val="tx1">
+        <a:lumMod val="65000"/>
+        <a:lumOff val="35000"/>
+      </a:schemeClr>
+    </cs:fontRef>
+    <cs:defRPr sz="1197" kern="1200"/>
+  </cs:legend>
+  <cs:plotArea mods="allowNoFillOverride allowNoLineOverride">
+    <cs:lnRef idx="0"/>
+    <cs:fillRef idx="0"/>
+    <cs:effectRef idx="0"/>
+    <cs:fontRef idx="minor">
+      <a:schemeClr val="tx1"/>
+    </cs:fontRef>
+  </cs:plotArea>
+  <cs:plotArea3D mods="allowNoFillOverride allowNoLineOverride">
+    <cs:lnRef idx="0"/>
+    <cs:fillRef idx="0"/>
+    <cs:effectRef idx="0"/>
+    <cs:fontRef idx="minor">
+      <a:schemeClr val="tx1"/>
+    </cs:fontRef>
+  </cs:plotArea3D>
+  <cs:seriesAxis>
+    <cs:lnRef idx="0"/>
+    <cs:fillRef idx="0"/>
+    <cs:effectRef idx="0"/>
+    <cs:fontRef idx="minor">
+      <a:schemeClr val="tx1">
+        <a:lumMod val="65000"/>
+        <a:lumOff val="35000"/>
+      </a:schemeClr>
+    </cs:fontRef>
+    <cs:defRPr sz="1197" kern="1200"/>
+  </cs:seriesAxis>
+  <cs:seriesLine>
+    <cs:lnRef idx="0"/>
+    <cs:fillRef idx="0"/>
+    <cs:effectRef idx="0"/>
+    <cs:fontRef idx="minor">
+      <a:schemeClr val="tx1"/>
+    </cs:fontRef>
+    <cs:spPr>
+      <a:ln w="9525" cap="flat" cmpd="sng" algn="ctr">
+        <a:solidFill>
+          <a:schemeClr val="tx1">
+            <a:lumMod val="35000"/>
+            <a:lumOff val="65000"/>
+          </a:schemeClr>
+        </a:solidFill>
+        <a:round/>
+      </a:ln>
+    </cs:spPr>
+  </cs:seriesLine>
+  <cs:title>
+    <cs:lnRef idx="0"/>
+    <cs:fillRef idx="0"/>
+    <cs:effectRef idx="0"/>
+    <cs:fontRef idx="minor">
+      <a:schemeClr val="tx1">
+        <a:lumMod val="65000"/>
+        <a:lumOff val="35000"/>
+      </a:schemeClr>
+    </cs:fontRef>
+    <cs:defRPr sz="1862" b="0" kern="1200" spc="0" baseline="0"/>
+  </cs:title>
+  <cs:trendline>
+    <cs:lnRef idx="0">
+      <cs:styleClr val="auto"/>
+    </cs:lnRef>
+    <cs:fillRef idx="0"/>
+    <cs:effectRef idx="0"/>
+    <cs:fontRef idx="minor">
+      <a:schemeClr val="tx1"/>
+    </cs:fontRef>
+    <cs:spPr>
+      <a:ln w="19050" cap="rnd">
+        <a:solidFill>
+          <a:schemeClr val="phClr"/>
+        </a:solidFill>
+        <a:prstDash val="sysDot"/>
+      </a:ln>
+    </cs:spPr>
+  </cs:trendline>
+  <cs:trendlineLabel>
+    <cs:lnRef idx="0"/>
+    <cs:fillRef idx="0"/>
+    <cs:effectRef idx="0"/>
+    <cs:fontRef idx="minor">
+      <a:schemeClr val="tx1">
+        <a:lumMod val="65000"/>
+        <a:lumOff val="35000"/>
+      </a:schemeClr>
+    </cs:fontRef>
+    <cs:defRPr sz="1197" kern="1200"/>
+  </cs:trendlineLabel>
+  <cs:upBar>
+    <cs:lnRef idx="0"/>
+    <cs:fillRef idx="0"/>
+    <cs:effectRef idx="0"/>
+    <cs:fontRef idx="minor">
+      <a:schemeClr val="tx1"/>
+    </cs:fontRef>
+    <cs:spPr>
+      <a:solidFill>
+        <a:schemeClr val="lt1"/>
+      </a:solidFill>
+      <a:ln w="9525" cap="flat" cmpd="sng" algn="ctr">
+        <a:solidFill>
+          <a:schemeClr val="tx1">
+            <a:lumMod val="65000"/>
+            <a:lumOff val="35000"/>
+          </a:schemeClr>
+        </a:solidFill>
+        <a:round/>
+      </a:ln>
+    </cs:spPr>
+  </cs:upBar>
+  <cs:valueAxis>
+    <cs:lnRef idx="0"/>
+    <cs:fillRef idx="0"/>
+    <cs:effectRef idx="0"/>
+    <cs:fontRef idx="minor">
+      <a:schemeClr val="tx1">
+        <a:lumMod val="65000"/>
+        <a:lumOff val="35000"/>
+      </a:schemeClr>
+    </cs:fontRef>
+    <cs:defRPr sz="1197" kern="1200"/>
+  </cs:valueAxis>
+  <cs:wall>
+    <cs:lnRef idx="0"/>
+    <cs:fillRef idx="0"/>
+    <cs:effectRef idx="0"/>
+    <cs:fontRef idx="minor">
+      <a:schemeClr val="tx1"/>
+    </cs:fontRef>
+    <cs:spPr>
+      <a:noFill/>
+      <a:ln>
+        <a:noFill/>
+      </a:ln>
+    </cs:spPr>
+  </cs:wall>
+</cs:chartStyle>
+</file>
+
+<file path=ppt/diagrams/colors1.xml><?xml version="1.0" encoding="utf-8"?>
+<dgm:colorsDef xmlns:dgm="http://schemas.openxmlformats.org/drawingml/2006/diagram" xmlns:a="http://schemas.openxmlformats.org/drawingml/2006/main" uniqueId="urn:microsoft.com/office/officeart/2005/8/colors/accent1_2">
+  <dgm:title val=""/>
+  <dgm:desc val=""/>
+  <dgm:catLst>
+    <dgm:cat type="accent1" pri="11200"/>
+  </dgm:catLst>
+  <dgm:styleLbl name="node0">
+    <dgm:fillClrLst meth="repeat">
+      <a:schemeClr val="accent1"/>
+    </dgm:fillClrLst>
+    <dgm:linClrLst meth="repeat">
+      <a:schemeClr val="lt1"/>
+    </dgm:linClrLst>
+    <dgm:effectClrLst/>
+    <dgm:txLinClrLst/>
+    <dgm:txFillClrLst/>
+    <dgm:txEffectClrLst/>
+  </dgm:styleLbl>
+  <dgm:styleLbl name="node0NoLn">
+    <dgm:fillClrLst meth="repeat">
+      <a:schemeClr val="accent1"/>
+    </dgm:fillClrLst>
+    <dgm:linClrLst meth="repeat">
+      <a:schemeClr val="lt1">
+        <a:alpha val="0"/>
+      </a:schemeClr>
+    </dgm:linClrLst>
+    <dgm:effectClrLst/>
+    <dgm:txLinClrLst/>
+    <dgm:txFillClrLst/>
+    <dgm:txEffectClrLst/>
+  </dgm:styleLbl>
+  <dgm:styleLbl name="alignNode1">
+    <dgm:fillClrLst meth="repeat">
+      <a:schemeClr val="accent1"/>
+    </dgm:fillClrLst>
+    <dgm:linClrLst meth="repeat">
+      <a:schemeClr val="accent1"/>
+    </dgm:linClrLst>
+    <dgm:effectClrLst/>
+    <dgm:txLinClrLst/>
+    <dgm:txFillClrLst/>
+    <dgm:txEffectClrLst/>
+  </dgm:styleLbl>
+  <dgm:styleLbl name="node1">
+    <dgm:fillClrLst meth="repeat">
+      <a:schemeClr val="accent1"/>
+    </dgm:fillClrLst>
+    <dgm:linClrLst meth="repeat">
+      <a:schemeClr val="lt1"/>
+    </dgm:linClrLst>
+    <dgm:effectClrLst/>
+    <dgm:txLinClrLst/>
+    <dgm:txFillClrLst/>
+    <dgm:txEffectClrLst/>
+  </dgm:styleLbl>
+  <dgm:styleLbl name="node1NoLn">
+    <dgm:fillClrLst meth="repeat">
+      <a:schemeClr val="accent1"/>
+    </dgm:fillClrLst>
+    <dgm:linClrLst meth="repeat">
+      <a:schemeClr val="lt1">
+        <a:alpha val="0"/>
+      </a:schemeClr>
+    </dgm:linClrLst>
+    <dgm:effectClrLst/>
+    <dgm:txLinClrLst/>
+    <dgm:txFillClrLst/>
+    <dgm:txEffectClrLst/>
+  </dgm:styleLbl>
+  <dgm:styleLbl name="ltNode1NoLn">
+    <dgm:fillClrLst meth="repeat">
+      <a:schemeClr val="accent1">
+        <a:tint val="75000"/>
+      </a:schemeClr>
+    </dgm:fillClrLst>
+    <dgm:linClrLst meth="repeat">
+      <a:schemeClr val="lt1">
+        <a:alpha val="0"/>
+      </a:schemeClr>
+    </dgm:linClrLst>
+    <dgm:effectClrLst/>
+    <dgm:txLinClrLst/>
+    <dgm:txFillClrLst meth="repeat">
+      <a:schemeClr val="dk1"/>
+    </dgm:txFillClrLst>
+    <dgm:txEffectClrLst/>
+  </dgm:styleLbl>
+  <dgm:styleLbl name="lnNode1">
+    <dgm:fillClrLst meth="repeat">
+      <a:schemeClr val="accent1"/>
+    </dgm:fillClrLst>
+    <dgm:linClrLst meth="repeat">
+      <a:schemeClr val="lt1"/>
+    </dgm:linClrLst>
+    <dgm:effectClrLst/>
+    <dgm:txLinClrLst/>
+    <dgm:txFillClrLst/>
+    <dgm:txEffectClrLst/>
+  </dgm:styleLbl>
+  <dgm:styleLbl name="vennNode1">
+    <dgm:fillClrLst meth="repeat">
+      <a:schemeClr val="accent1">
+        <a:alpha val="50000"/>
+      </a:schemeClr>
+    </dgm:fillClrLst>
+    <dgm:linClrLst meth="repeat">
+      <a:schemeClr val="lt1"/>
+    </dgm:linClrLst>
+    <dgm:effectClrLst/>
+    <dgm:txLinClrLst/>
+    <dgm:txFillClrLst/>
+    <dgm:txEffectClrLst/>
+  </dgm:styleLbl>
+  <dgm:styleLbl name="node2">
+    <dgm:fillClrLst meth="repeat">
+      <a:schemeClr val="accent1"/>
+    </dgm:fillClrLst>
+    <dgm:linClrLst meth="repeat">
+      <a:schemeClr val="lt1"/>
+    </dgm:linClrLst>
+    <dgm:effectClrLst/>
+    <dgm:txLinClrLst/>
+    <dgm:txFillClrLst/>
+    <dgm:txEffectClrLst/>
+  </dgm:styleLbl>
+  <dgm:styleLbl name="node2NoLn">
+    <dgm:fillClrLst meth="repeat">
+      <a:schemeClr val="accent1"/>
+    </dgm:fillClrLst>
+    <dgm:linClrLst meth="repeat">
+      <a:schemeClr val="lt1">
+        <a:alpha val="0"/>
+      </a:schemeClr>
+    </dgm:linClrLst>
+    <dgm:effectClrLst/>
+    <dgm:txLinClrLst/>
+    <dgm:txFillClrLst/>
+    <dgm:txEffectClrLst/>
+  </dgm:styleLbl>
+  <dgm:styleLbl name="node3">
+    <dgm:fillClrLst meth="repeat">
+      <a:schemeClr val="accent1"/>
+    </dgm:fillClrLst>
+    <dgm:linClrLst meth="repeat">
+      <a:schemeClr val="lt1"/>
+    </dgm:linClrLst>
+    <dgm:effectClrLst/>
+    <dgm:txLinClrLst/>
+    <dgm:txFillClrLst/>
+    <dgm:txEffectClrLst/>
+  </dgm:styleLbl>
+  <dgm:styleLbl name="node3NoLn">
+    <dgm:fillClrLst meth="repeat">
+      <a:schemeClr val="accent1"/>
+    </dgm:fillClrLst>
+    <dgm:linClrLst meth="repeat">
+      <a:schemeClr val="lt1">
+        <a:alpha val="0"/>
+      </a:schemeClr>
+    </dgm:linClrLst>
+    <dgm:effectClrLst/>
+    <dgm:txLinClrLst/>
+    <dgm:txFillClrLst/>
+    <dgm:txEffectClrLst/>
+  </dgm:styleLbl>
+  <dgm:styleLbl name="node4">
+    <dgm:fillClrLst meth="repeat">
+      <a:schemeClr val="accent1"/>
+    </dgm:fillClrLst>
+    <dgm:linClrLst meth="repeat">
+      <a:schemeClr val="lt1"/>
+    </dgm:linClrLst>
+    <dgm:effectClrLst/>
+    <dgm:txLinClrLst/>
+    <dgm:txFillClrLst/>
+    <dgm:txEffectClrLst/>
+  </dgm:styleLbl>
+  <dgm:styleLbl name="node4NoLn">
+    <dgm:fillClrLst meth="repeat">
+      <a:schemeClr val="accent1"/>
+    </dgm:fillClrLst>
+    <dgm:linClrLst meth="repeat">
+      <a:schemeClr val="lt1">
+        <a:alpha val="0"/>
+      </a:schemeClr>
+    </dgm:linClrLst>
+    <dgm:effectClrLst/>
+    <dgm:txLinClrLst/>
+    <dgm:txFillClrLst/>
+    <dgm:txEffectClrLst/>
+  </dgm:styleLbl>
+  <dgm:styleLbl name="fgImgPlace1">
+    <dgm:fillClrLst meth="repeat">
+      <a:schemeClr val="accent1">
+        <a:tint val="50000"/>
+      </a:schemeClr>
+    </dgm:fillClrLst>
+    <dgm:linClrLst meth="repeat">
+      <a:schemeClr val="lt1"/>
+    </dgm:linClrLst>
+    <dgm:effectClrLst/>
+    <dgm:txLinClrLst/>
+    <dgm:txFillClrLst meth="repeat">
+      <a:schemeClr val="lt1"/>
+    </dgm:txFillClrLst>
+    <dgm:txEffectClrLst/>
+  </dgm:styleLbl>
+  <dgm:styleLbl name="alignImgPlace1">
+    <dgm:fillClrLst meth="repeat">
+      <a:schemeClr val="accent1">
+        <a:tint val="50000"/>
+      </a:schemeClr>
+    </dgm:fillClrLst>
+    <dgm:linClrLst meth="repeat">
+      <a:schemeClr val="lt1"/>
+    </dgm:linClrLst>
+    <dgm:effectClrLst/>
+    <dgm:txLinClrLst/>
+    <dgm:txFillClrLst meth="repeat">
+      <a:schemeClr val="lt1"/>
+    </dgm:txFillClrLst>
+    <dgm:txEffectClrLst/>
+  </dgm:styleLbl>
+  <dgm:styleLbl name="bgImgPlace1">
+    <dgm:fillClrLst meth="repeat">
+      <a:schemeClr val="accent1">
+        <a:tint val="50000"/>
+      </a:schemeClr>
+    </dgm:fillClrLst>
+    <dgm:linClrLst meth="repeat">
+      <a:schemeClr val="lt1"/>
+    </dgm:linClrLst>
+    <dgm:effectClrLst/>
+    <dgm:txLinClrLst/>
+    <dgm:txFillClrLst meth="repeat">
+      <a:schemeClr val="lt1"/>
+    </dgm:txFillClrLst>
+    <dgm:txEffectClrLst/>
+  </dgm:styleLbl>
+  <dgm:styleLbl name="sibTrans2D1">
+    <dgm:fillClrLst meth="repeat">
+      <a:schemeClr val="accent1">
+        <a:tint val="60000"/>
+      </a:schemeClr>
+    </dgm:fillClrLst>
+    <dgm:linClrLst meth="repeat">
+      <a:schemeClr val="accent1">
+        <a:tint val="60000"/>
+      </a:schemeClr>
+    </dgm:linClrLst>
+    <dgm:effectClrLst/>
+    <dgm:txLinClrLst/>
+    <dgm:txFillClrLst/>
+    <dgm:txEffectClrLst/>
+  </dgm:styleLbl>
+  <dgm:styleLbl name="fgSibTrans2D1">
+    <dgm:fillClrLst meth="repeat">
+      <a:schemeClr val="accent1">
+        <a:tint val="60000"/>
+      </a:schemeClr>
+    </dgm:fillClrLst>
+    <dgm:linClrLst meth="repeat">
+      <a:schemeClr val="accent1">
+        <a:tint val="60000"/>
+      </a:schemeClr>
+    </dgm:linClrLst>
+    <dgm:effectClrLst/>
+    <dgm:txLinClrLst/>
+    <dgm:txFillClrLst/>
+    <dgm:txEffectClrLst/>
+  </dgm:styleLbl>
+  <dgm:styleLbl name="bgSibTrans2D1">
+    <dgm:fillClrLst meth="repeat">
+      <a:schemeClr val="accent1">
+        <a:tint val="60000"/>
+      </a:schemeClr>
+    </dgm:fillClrLst>
+    <dgm:linClrLst meth="repeat">
+      <a:schemeClr val="accent1">
+        <a:tint val="60000"/>
+      </a:schemeClr>
+    </dgm:linClrLst>
+    <dgm:effectClrLst/>
+    <dgm:txLinClrLst/>
+    <dgm:txFillClrLst/>
+    <dgm:txEffectClrLst/>
+  </dgm:styleLbl>
+  <dgm:styleLbl name="sibTrans1D1">
+    <dgm:fillClrLst meth="repeat">
+      <a:schemeClr val="accent1"/>
+    </dgm:fillClrLst>
+    <dgm:linClrLst meth="repeat">
+      <a:schemeClr val="accent1"/>
+    </dgm:linClrLst>
+    <dgm:effectClrLst/>
+    <dgm:txLinClrLst/>
+    <dgm:txFillClrLst meth="repeat">
+      <a:schemeClr val="tx1"/>
+    </dgm:txFillClrLst>
+    <dgm:txEffectClrLst/>
+  </dgm:styleLbl>
+  <dgm:styleLbl name="callout">
+    <dgm:fillClrLst meth="repeat">
+      <a:schemeClr val="accent1"/>
+    </dgm:fillClrLst>
+    <dgm:linClrLst meth="repeat">
+      <a:schemeClr val="accent1">
+        <a:tint val="50000"/>
+      </a:schemeClr>
+    </dgm:linClrLst>
+    <dgm:effectClrLst/>
+    <dgm:txLinClrLst/>
+    <dgm:txFillClrLst meth="repeat">
+      <a:schemeClr val="tx1"/>
+    </dgm:txFillClrLst>
+    <dgm:txEffectClrLst/>
+  </dgm:styleLbl>
+  <dgm:styleLbl name="asst0">
+    <dgm:fillClrLst meth="repeat">
+      <a:schemeClr val="accent1"/>
+    </dgm:fillClrLst>
+    <dgm:linClrLst meth="repeat">
+      <a:schemeClr val="lt1"/>
+    </dgm:linClrLst>
+    <dgm:effectClrLst/>
+    <dgm:txLinClrLst/>
+    <dgm:txFillClrLst/>
+    <dgm:txEffectClrLst/>
+  </dgm:styleLbl>
+  <dgm:styleLbl name="asst1">
+    <dgm:fillClrLst meth="repeat">
+      <a:schemeClr val="accent1"/>
+    </dgm:fillClrLst>
+    <dgm:linClrLst meth="repeat">
+      <a:schemeClr val="lt1"/>
+    </dgm:linClrLst>
+    <dgm:effectClrLst/>
+    <dgm:txLinClrLst/>
+    <dgm:txFillClrLst/>
+    <dgm:txEffectClrLst/>
+  </dgm:styleLbl>
+  <dgm:styleLbl name="asst2">
+    <dgm:fillClrLst meth="repeat">
+      <a:schemeClr val="accent1"/>
+    </dgm:fillClrLst>
+    <dgm:linClrLst meth="repeat">
+      <a:schemeClr val="lt1"/>
+    </dgm:linClrLst>
+    <dgm:effectClrLst/>
+    <dgm:txLinClrLst/>
+    <dgm:txFillClrLst/>
+    <dgm:txEffectClrLst/>
+  </dgm:styleLbl>
+  <dgm:styleLbl name="asst3">
+    <dgm:fillClrLst meth="repeat">
+      <a:schemeClr val="accent1"/>
+    </dgm:fillClrLst>
+    <dgm:linClrLst meth="repeat">
+      <a:schemeClr val="lt1"/>
+    </dgm:linClrLst>
+    <dgm:effectClrLst/>
+    <dgm:txLinClrLst/>
+    <dgm:txFillClrLst/>
+    <dgm:txEffectClrLst/>
+  </dgm:styleLbl>
+  <dgm:styleLbl name="asst4">
+    <dgm:fillClrLst meth="repeat">
+      <a:schemeClr val="accent1"/>
+    </dgm:fillClrLst>
+    <dgm:linClrLst meth="repeat">
+      <a:schemeClr val="lt1"/>
+    </dgm:linClrLst>
+    <dgm:effectClrLst/>
+    <dgm:txLinClrLst/>
+    <dgm:txFillClrLst/>
+    <dgm:txEffectClrLst/>
+  </dgm:styleLbl>
+  <dgm:styleLbl name="parChTrans2D1">
+    <dgm:fillClrLst meth="repeat">
+      <a:schemeClr val="accent1">
+        <a:tint val="60000"/>
+      </a:schemeClr>
+    </dgm:fillClrLst>
+    <dgm:linClrLst meth="repeat">
+      <a:schemeClr val="accent1">
+        <a:tint val="60000"/>
+      </a:schemeClr>
+    </dgm:linClrLst>
+    <dgm:effectClrLst/>
+    <dgm:txLinClrLst/>
+    <dgm:txFillClrLst meth="repeat">
+      <a:schemeClr val="lt1"/>
+    </dgm:txFillClrLst>
+    <dgm:txEffectClrLst/>
+  </dgm:styleLbl>
+  <dgm:styleLbl name="parChTrans2D2">
+    <dgm:fillClrLst meth="repeat">
+      <a:schemeClr val="accent1"/>
+    </dgm:fillClrLst>
+    <dgm:linClrLst meth="repeat">
+      <a:schemeClr val="accent1"/>
+    </dgm:linClrLst>
+    <dgm:effectClrLst/>
+    <dgm:txLinClrLst/>
+    <dgm:txFillClrLst meth="repeat">
+      <a:schemeClr val="lt1"/>
+    </dgm:txFillClrLst>
+    <dgm:txEffectClrLst/>
+  </dgm:styleLbl>
+  <dgm:styleLbl name="parChTrans2D3">
+    <dgm:fillClrLst meth="repeat">
+      <a:schemeClr val="accent1"/>
+    </dgm:fillClrLst>
+    <dgm:linClrLst meth="repeat">
+      <a:schemeClr val="accent1"/>
+    </dgm:linClrLst>
+    <dgm:effectClrLst/>
+    <dgm:txLinClrLst/>
+    <dgm:txFillClrLst meth="repeat">
+      <a:schemeClr val="lt1"/>
+    </dgm:txFillClrLst>
+    <dgm:txEffectClrLst/>
+  </dgm:styleLbl>
+  <dgm:styleLbl name="parChTrans2D4">
+    <dgm:fillClrLst meth="repeat">
+      <a:schemeClr val="accent1"/>
+    </dgm:fillClrLst>
+    <dgm:linClrLst meth="repeat">
+      <a:schemeClr val="accent1"/>
+    </dgm:linClrLst>
+    <dgm:effectClrLst/>
+    <dgm:txLinClrLst/>
+    <dgm:txFillClrLst meth="repeat">
+      <a:schemeClr val="lt1"/>
+    </dgm:txFillClrLst>
+    <dgm:txEffectClrLst/>
+  </dgm:styleLbl>
+  <dgm:styleLbl name="parChTrans1D1">
+    <dgm:fillClrLst meth="repeat">
+      <a:schemeClr val="accent1"/>
+    </dgm:fillClrLst>
+    <dgm:linClrLst meth="repeat">
+      <a:schemeClr val="accent1">
+        <a:shade val="60000"/>
+      </a:schemeClr>
+    </dgm:linClrLst>
+    <dgm:effectClrLst/>
+    <dgm:txLinClrLst/>
+    <dgm:txFillClrLst meth="repeat">
+      <a:schemeClr val="tx1"/>
+    </dgm:txFillClrLst>
+    <dgm:txEffectClrLst/>
+  </dgm:styleLbl>
+  <dgm:styleLbl name="parChTrans1D2">
+    <dgm:fillClrLst meth="repeat">
+      <a:schemeClr val="accent1"/>
+    </dgm:fillClrLst>
+    <dgm:linClrLst meth="repeat">
+      <a:schemeClr val="accent1">
+        <a:shade val="60000"/>
+      </a:schemeClr>
+    </dgm:linClrLst>
+    <dgm:effectClrLst/>
+    <dgm:txLinClrLst/>
+    <dgm:txFillClrLst meth="repeat">
+      <a:schemeClr val="tx1"/>
+    </dgm:txFillClrLst>
+    <dgm:txEffectClrLst/>
+  </dgm:styleLbl>
+  <dgm:styleLbl name="parChTrans1D3">
+    <dgm:fillClrLst meth="repeat">
+      <a:schemeClr val="accent1"/>
+    </dgm:fillClrLst>
+    <dgm:linClrLst meth="repeat">
+      <a:schemeClr val="accent1">
+        <a:shade val="80000"/>
+      </a:schemeClr>
+    </dgm:linClrLst>
+    <dgm:effectClrLst/>
+    <dgm:txLinClrLst/>
+    <dgm:txFillClrLst meth="repeat">
+      <a:schemeClr val="tx1"/>
+    </dgm:txFillClrLst>
+    <dgm:txEffectClrLst/>
+  </dgm:styleLbl>
+  <dgm:styleLbl name="parChTrans1D4">
+    <dgm:fillClrLst meth="repeat">
+      <a:schemeClr val="accent1"/>
+    </dgm:fillClrLst>
+    <dgm:linClrLst meth="repeat">
+      <a:schemeClr val="accent1">
+        <a:shade val="80000"/>
+      </a:schemeClr>
+    </dgm:linClrLst>
+    <dgm:effectClrLst/>
+    <dgm:txLinClrLst/>
+    <dgm:txFillClrLst meth="repeat">
+      <a:schemeClr val="tx1"/>
+    </dgm:txFillClrLst>
+    <dgm:txEffectClrLst/>
+  </dgm:styleLbl>
+  <dgm:styleLbl name="fgAcc1">
+    <dgm:fillClrLst meth="repeat">
+      <a:schemeClr val="lt1">
+        <a:alpha val="90000"/>
+      </a:schemeClr>
+    </dgm:fillClrLst>
+    <dgm:linClrLst meth="repeat">
+      <a:schemeClr val="accent1"/>
+    </dgm:linClrLst>
+    <dgm:effectClrLst/>
+    <dgm:txLinClrLst/>
+    <dgm:txFillClrLst meth="repeat">
+      <a:schemeClr val="dk1"/>
+    </dgm:txFillClrLst>
+    <dgm:txEffectClrLst/>
+  </dgm:styleLbl>
+  <dgm:styleLbl name="conFgAcc1">
+    <dgm:fillClrLst meth="repeat">
+      <a:schemeClr val="lt1">
+        <a:alpha val="90000"/>
+      </a:schemeClr>
+    </dgm:fillClrLst>
+    <dgm:linClrLst meth="repeat">
+      <a:schemeClr val="accent1"/>
+    </dgm:linClrLst>
+    <dgm:effectClrLst/>
+    <dgm:txLinClrLst/>
+    <dgm:txFillClrLst meth="repeat">
+      <a:schemeClr val="dk1"/>
+    </dgm:txFillClrLst>
+    <dgm:txEffectClrLst/>
+  </dgm:styleLbl>
+  <dgm:styleLbl name="alignAcc1">
+    <dgm:fillClrLst meth="repeat">
+      <a:schemeClr val="lt1">
+        <a:alpha val="90000"/>
+      </a:schemeClr>
+    </dgm:fillClrLst>
+    <dgm:linClrLst meth="repeat">
+      <a:schemeClr val="accent1"/>
+    </dgm:linClrLst>
+    <dgm:effectClrLst/>
+    <dgm:txLinClrLst/>
+    <dgm:txFillClrLst meth="repeat">
+      <a:schemeClr val="dk1"/>
+    </dgm:txFillClrLst>
+    <dgm:txEffectClrLst/>
+  </dgm:styleLbl>
+  <dgm:styleLbl name="trAlignAcc1">
+    <dgm:fillClrLst meth="repeat">
+      <a:schemeClr val="lt1">
+        <a:alpha val="40000"/>
+      </a:schemeClr>
+    </dgm:fillClrLst>
+    <dgm:linClrLst meth="repeat">
+      <a:schemeClr val="accent1"/>
+    </dgm:linClrLst>
+    <dgm:effectClrLst/>
+    <dgm:txLinClrLst/>
+    <dgm:txFillClrLst meth="repeat">
+      <a:schemeClr val="dk1"/>
+    </dgm:txFillClrLst>
+    <dgm:txEffectClrLst/>
+  </dgm:styleLbl>
+  <dgm:styleLbl name="bgAcc1">
+    <dgm:fillClrLst meth="repeat">
+      <a:schemeClr val="lt1">
+        <a:alpha val="90000"/>
+      </a:schemeClr>
+    </dgm:fillClrLst>
+    <dgm:linClrLst meth="repeat">
+      <a:schemeClr val="accent1"/>
+    </dgm:linClrLst>
+    <dgm:effectClrLst/>
+    <dgm:txLinClrLst/>
+    <dgm:txFillClrLst meth="repeat">
+      <a:schemeClr val="dk1"/>
+    </dgm:txFillClrLst>
+    <dgm:txEffectClrLst/>
+  </dgm:styleLbl>
+  <dgm:styleLbl name="solidFgAcc1">
+    <dgm:fillClrLst meth="repeat">
+      <a:schemeClr val="lt1"/>
+    </dgm:fillClrLst>
+    <dgm:linClrLst meth="repeat">
+      <a:schemeClr val="accent1"/>
+    </dgm:linClrLst>
+    <dgm:effectClrLst/>
+    <dgm:txLinClrLst/>
+    <dgm:txFillClrLst meth="repeat">
+      <a:schemeClr val="dk1"/>
+    </dgm:txFillClrLst>
+    <dgm:txEffectClrLst/>
+  </dgm:styleLbl>
+  <dgm:styleLbl name="solidAlignAcc1">
+    <dgm:fillClrLst meth="repeat">
+      <a:schemeClr val="lt1"/>
+    </dgm:fillClrLst>
+    <dgm:linClrLst meth="repeat">
+      <a:schemeClr val="accent1"/>
+    </dgm:linClrLst>
+    <dgm:effectClrLst/>
+    <dgm:txLinClrLst/>
+    <dgm:txFillClrLst meth="repeat">
+      <a:schemeClr val="dk1"/>
+    </dgm:txFillClrLst>
+    <dgm:txEffectClrLst/>
+  </dgm:styleLbl>
+  <dgm:styleLbl name="solidBgAcc1">
+    <dgm:fillClrLst meth="repeat">
+      <a:schemeClr val="lt1"/>
+    </dgm:fillClrLst>
+    <dgm:linClrLst meth="repeat">
+      <a:schemeClr val="accent1"/>
+    </dgm:linClrLst>
+    <dgm:effectClrLst/>
+    <dgm:txLinClrLst/>
+    <dgm:txFillClrLst meth="repeat">
+      <a:schemeClr val="dk1"/>
+    </dgm:txFillClrLst>
+    <dgm:txEffectClrLst/>
+  </dgm:styleLbl>
+  <dgm:styleLbl name="fgAccFollowNode1">
+    <dgm:fillClrLst meth="repeat">
+      <a:schemeClr val="accent1">
+        <a:alpha val="90000"/>
+        <a:tint val="40000"/>
+      </a:schemeClr>
+    </dgm:fillClrLst>
+    <dgm:linClrLst meth="repeat">
+      <a:schemeClr val="accent1">
+        <a:alpha val="90000"/>
+        <a:tint val="40000"/>
+      </a:schemeClr>
+    </dgm:linClrLst>
+    <dgm:effectClrLst/>
+    <dgm:txLinClrLst/>
+    <dgm:txFillClrLst meth="repeat">
+      <a:schemeClr val="dk1"/>
+    </dgm:txFillClrLst>
+    <dgm:txEffectClrLst/>
+  </dgm:styleLbl>
+  <dgm:styleLbl name="alignAccFollowNode1">
+    <dgm:fillClrLst meth="repeat">
+      <a:schemeClr val="accent1">
+        <a:alpha val="90000"/>
+        <a:tint val="40000"/>
+      </a:schemeClr>
+    </dgm:fillClrLst>
+    <dgm:linClrLst meth="repeat">
+      <a:schemeClr val="accent1">
+        <a:alpha val="90000"/>
+        <a:tint val="40000"/>
+      </a:schemeClr>
+    </dgm:linClrLst>
+    <dgm:effectClrLst/>
+    <dgm:txLinClrLst/>
+    <dgm:txFillClrLst meth="repeat">
+      <a:schemeClr val="dk1"/>
+    </dgm:txFillClrLst>
+    <dgm:txEffectClrLst/>
+  </dgm:styleLbl>
+  <dgm:styleLbl name="bgAccFollowNode1">
+    <dgm:fillClrLst meth="repeat">
+      <a:schemeClr val="accent1">
+        <a:alpha val="90000"/>
+        <a:tint val="40000"/>
+      </a:schemeClr>
+    </dgm:fillClrLst>
+    <dgm:linClrLst meth="repeat">
+      <a:schemeClr val="accent1">
+        <a:alpha val="90000"/>
+        <a:tint val="40000"/>
+      </a:schemeClr>
+    </dgm:linClrLst>
+    <dgm:effectClrLst/>
+    <dgm:txLinClrLst/>
+    <dgm:txFillClrLst meth="repeat">
+      <a:schemeClr val="dk1"/>
+    </dgm:txFillClrLst>
+    <dgm:txEffectClrLst/>
+  </dgm:styleLbl>
+  <dgm:styleLbl name="fgAcc0">
+    <dgm:fillClrLst meth="repeat">
+      <a:schemeClr val="lt1">
+        <a:alpha val="90000"/>
+      </a:schemeClr>
+    </dgm:fillClrLst>
+    <dgm:linClrLst meth="repeat">
+      <a:schemeClr val="accent1"/>
+    </dgm:linClrLst>
+    <dgm:effectClrLst/>
+    <dgm:txLinClrLst/>
+    <dgm:txFillClrLst meth="repeat">
+      <a:schemeClr val="dk1"/>
+    </dgm:txFillClrLst>
+    <dgm:txEffectClrLst/>
+  </dgm:styleLbl>
+  <dgm:styleLbl name="fgAcc2">
+    <dgm:fillClrLst meth="repeat">
+      <a:schemeClr val="lt1">
+        <a:alpha val="90000"/>
+      </a:schemeClr>
+    </dgm:fillClrLst>
+    <dgm:linClrLst meth="repeat">
+      <a:schemeClr val="accent1"/>
+    </dgm:linClrLst>
+    <dgm:effectClrLst/>
+    <dgm:txLinClrLst/>
+    <dgm:txFillClrLst meth="repeat">
+      <a:schemeClr val="dk1"/>
+    </dgm:txFillClrLst>
+    <dgm:txEffectClrLst/>
+  </dgm:styleLbl>
+  <dgm:styleLbl name="fgAcc3">
+    <dgm:fillClrLst meth="repeat">
+      <a:schemeClr val="lt1">
+        <a:alpha val="90000"/>
+      </a:schemeClr>
+    </dgm:fillClrLst>
+    <dgm:linClrLst meth="repeat">
+      <a:schemeClr val="accent1"/>
+    </dgm:linClrLst>
+    <dgm:effectClrLst/>
+    <dgm:txLinClrLst/>
+    <dgm:txFillClrLst meth="repeat">
+      <a:schemeClr val="dk1"/>
+    </dgm:txFillClrLst>
+    <dgm:txEffectClrLst/>
+  </dgm:styleLbl>
+  <dgm:styleLbl name="fgAcc4">
+    <dgm:fillClrLst meth="repeat">
+      <a:schemeClr val="lt1">
+        <a:alpha val="90000"/>
+      </a:schemeClr>
+    </dgm:fillClrLst>
+    <dgm:linClrLst meth="repeat">
+      <a:schemeClr val="accent1"/>
+    </dgm:linClrLst>
+    <dgm:effectClrLst/>
+    <dgm:txLinClrLst/>
+    <dgm:txFillClrLst meth="repeat">
+      <a:schemeClr val="dk1"/>
+    </dgm:txFillClrLst>
+    <dgm:txEffectClrLst/>
+  </dgm:styleLbl>
+  <dgm:styleLbl name="bgShp">
+    <dgm:fillClrLst meth="repeat">
+      <a:schemeClr val="accent1">
+        <a:tint val="40000"/>
+      </a:schemeClr>
+    </dgm:fillClrLst>
+    <dgm:linClrLst meth="repeat">
+      <a:schemeClr val="accent1"/>
+    </dgm:linClrLst>
+    <dgm:effectClrLst/>
+    <dgm:txLinClrLst/>
+    <dgm:txFillClrLst meth="repeat">
+      <a:schemeClr val="dk1"/>
+    </dgm:txFillClrLst>
+    <dgm:txEffectClrLst/>
+  </dgm:styleLbl>
+  <dgm:styleLbl name="dkBgShp">
+    <dgm:fillClrLst meth="repeat">
+      <a:schemeClr val="accent1">
+        <a:shade val="80000"/>
+      </a:schemeClr>
+    </dgm:fillClrLst>
+    <dgm:linClrLst meth="repeat">
+      <a:schemeClr val="accent1"/>
+    </dgm:linClrLst>
+    <dgm:effectClrLst/>
+    <dgm:txLinClrLst/>
+    <dgm:txFillClrLst meth="repeat">
+      <a:schemeClr val="lt1"/>
+    </dgm:txFillClrLst>
+    <dgm:txEffectClrLst/>
+  </dgm:styleLbl>
+  <dgm:styleLbl name="trBgShp">
+    <dgm:fillClrLst meth="repeat">
+      <a:schemeClr val="accent1">
+        <a:tint val="50000"/>
+        <a:alpha val="40000"/>
+      </a:schemeClr>
+    </dgm:fillClrLst>
+    <dgm:linClrLst meth="repeat">
+      <a:schemeClr val="accent1"/>
+    </dgm:linClrLst>
+    <dgm:effectClrLst/>
+    <dgm:txLinClrLst/>
+    <dgm:txFillClrLst meth="repeat">
+      <a:schemeClr val="lt1"/>
+    </dgm:txFillClrLst>
+    <dgm:txEffectClrLst/>
+  </dgm:styleLbl>
+  <dgm:styleLbl name="fgShp">
+    <dgm:fillClrLst meth="repeat">
+      <a:schemeClr val="accent1">
+        <a:tint val="60000"/>
+      </a:schemeClr>
+    </dgm:fillClrLst>
+    <dgm:linClrLst meth="repeat">
+      <a:schemeClr val="lt1"/>
+    </dgm:linClrLst>
+    <dgm:effectClrLst/>
+    <dgm:txLinClrLst/>
+    <dgm:txFillClrLst meth="repeat">
+      <a:schemeClr val="dk1"/>
+    </dgm:txFillClrLst>
+    <dgm:txEffectClrLst/>
+  </dgm:styleLbl>
+  <dgm:styleLbl name="revTx">
+    <dgm:fillClrLst meth="repeat">
+      <a:schemeClr val="lt1">
+        <a:alpha val="0"/>
+      </a:schemeClr>
+    </dgm:fillClrLst>
+    <dgm:linClrLst meth="repeat">
+      <a:schemeClr val="dk1">
+        <a:alpha val="0"/>
+      </a:schemeClr>
+    </dgm:linClrLst>
+    <dgm:effectClrLst/>
+    <dgm:txLinClrLst/>
+    <dgm:txFillClrLst meth="repeat">
+      <a:schemeClr val="tx1"/>
+    </dgm:txFillClrLst>
+    <dgm:txEffectClrLst/>
+  </dgm:styleLbl>
+  <dgm:styleLbl name="revTxLt">
+    <dgm:fillClrLst meth="repeat">
+      <a:schemeClr val="lt1">
+        <a:alpha val="0"/>
+      </a:schemeClr>
+    </dgm:fillClrLst>
+    <dgm:linClrLst meth="repeat">
+      <a:schemeClr val="dk1">
+        <a:alpha val="0"/>
+      </a:schemeClr>
+    </dgm:linClrLst>
+    <dgm:effectClrLst/>
+    <dgm:txLinClrLst/>
+    <dgm:txFillClrLst/>
+    <dgm:txEffectClrLst/>
+  </dgm:styleLbl>
+</dgm:colorsDef>
+</file>
+
+<file path=ppt/diagrams/data1.xml><?xml version="1.0" encoding="utf-8"?>
+<dgm:dataModel xmlns:dgm="http://schemas.openxmlformats.org/drawingml/2006/diagram" xmlns:a="http://schemas.openxmlformats.org/drawingml/2006/main">
+  <dgm:ptLst>
+    <dgm:pt modelId="{0716DE74-B873-4034-BF34-80F255B762C0}" type="doc">
+      <dgm:prSet loTypeId="urn:microsoft.com/office/officeart/2005/8/layout/hierarchy1" loCatId="hierarchy" qsTypeId="urn:microsoft.com/office/officeart/2005/8/quickstyle/simple1" qsCatId="simple" csTypeId="urn:microsoft.com/office/officeart/2005/8/colors/accent1_2" csCatId="accent1" phldr="1"/>
+      <dgm:spPr/>
+      <dgm:t>
+        <a:bodyPr/>
+        <a:lstStyle/>
+        <a:p>
+          <a:endParaRPr lang="en-IN"/>
+        </a:p>
+      </dgm:t>
+    </dgm:pt>
+    <dgm:pt modelId="{F7ADD33A-07B1-4708-AF13-48367DDF374F}">
+      <dgm:prSet phldrT="[Text]" phldr="0"/>
+      <dgm:spPr/>
+      <dgm:t>
+        <a:bodyPr/>
+        <a:lstStyle/>
+        <a:p>
+          <a:r>
+            <a:rPr lang="en-US" dirty="0"/>
+            <a:t>Semester 2</a:t>
+          </a:r>
+          <a:endParaRPr lang="en-IN" dirty="0"/>
+        </a:p>
+      </dgm:t>
+    </dgm:pt>
+    <dgm:pt modelId="{DAA7C577-684E-46D2-88FB-E3EEDE8CAFF1}" type="parTrans" cxnId="{1D3D29C6-B24E-453D-8F4E-B410D1BB14E3}">
+      <dgm:prSet/>
+      <dgm:spPr/>
+      <dgm:t>
+        <a:bodyPr/>
+        <a:lstStyle/>
+        <a:p>
+          <a:endParaRPr lang="en-IN"/>
+        </a:p>
+      </dgm:t>
+    </dgm:pt>
+    <dgm:pt modelId="{15C850A4-04C0-47FF-A537-AB638B7E86FB}" type="sibTrans" cxnId="{1D3D29C6-B24E-453D-8F4E-B410D1BB14E3}">
+      <dgm:prSet/>
+      <dgm:spPr/>
+      <dgm:t>
+        <a:bodyPr/>
+        <a:lstStyle/>
+        <a:p>
+          <a:endParaRPr lang="en-IN"/>
+        </a:p>
+      </dgm:t>
+    </dgm:pt>
+    <dgm:pt modelId="{15F4E7D4-10EB-47F1-BD1D-8D4869B1E5FA}">
+      <dgm:prSet phldrT="[Text]" phldr="0"/>
+      <dgm:spPr/>
+      <dgm:t>
+        <a:bodyPr/>
+        <a:lstStyle/>
+        <a:p>
+          <a:r>
+            <a:rPr lang="en-US" dirty="0"/>
+            <a:t>OOPJ</a:t>
+          </a:r>
+          <a:endParaRPr lang="en-IN" dirty="0"/>
+        </a:p>
+      </dgm:t>
+    </dgm:pt>
+    <dgm:pt modelId="{76E86F2C-7FF2-4687-8197-F971B19A765F}" type="parTrans" cxnId="{F0343A93-BFC0-4DEF-AC01-D458B5D2F8C7}">
+      <dgm:prSet/>
+      <dgm:spPr/>
+      <dgm:t>
+        <a:bodyPr/>
+        <a:lstStyle/>
+        <a:p>
+          <a:endParaRPr lang="en-IN"/>
+        </a:p>
+      </dgm:t>
+    </dgm:pt>
+    <dgm:pt modelId="{90DB2104-563D-40B0-A35D-F4B94F24C379}" type="sibTrans" cxnId="{F0343A93-BFC0-4DEF-AC01-D458B5D2F8C7}">
+      <dgm:prSet/>
+      <dgm:spPr/>
+      <dgm:t>
+        <a:bodyPr/>
+        <a:lstStyle/>
+        <a:p>
+          <a:endParaRPr lang="en-IN"/>
+        </a:p>
+      </dgm:t>
+    </dgm:pt>
+    <dgm:pt modelId="{778D7872-628A-43B0-A791-8D12D8F28E52}">
+      <dgm:prSet phldrT="[Text]" phldr="0"/>
+      <dgm:spPr/>
+      <dgm:t>
+        <a:bodyPr/>
+        <a:lstStyle/>
+        <a:p>
+          <a:r>
+            <a:rPr lang="en-US" dirty="0"/>
+            <a:t>WD</a:t>
+          </a:r>
+          <a:endParaRPr lang="en-IN" dirty="0"/>
+        </a:p>
+      </dgm:t>
+    </dgm:pt>
+    <dgm:pt modelId="{7753DB3B-DB46-4E54-AE88-E8BAFCEFFD29}" type="parTrans" cxnId="{A07290C5-1F00-464A-AB48-1AC631E2FD8B}">
+      <dgm:prSet/>
+      <dgm:spPr/>
+      <dgm:t>
+        <a:bodyPr/>
+        <a:lstStyle/>
+        <a:p>
+          <a:endParaRPr lang="en-IN"/>
+        </a:p>
+      </dgm:t>
+    </dgm:pt>
+    <dgm:pt modelId="{2771DCEB-415D-4B18-8E98-B548B0A9E4CB}" type="sibTrans" cxnId="{A07290C5-1F00-464A-AB48-1AC631E2FD8B}">
+      <dgm:prSet/>
+      <dgm:spPr/>
+      <dgm:t>
+        <a:bodyPr/>
+        <a:lstStyle/>
+        <a:p>
+          <a:endParaRPr lang="en-IN"/>
+        </a:p>
+      </dgm:t>
+    </dgm:pt>
+    <dgm:pt modelId="{B9DE051B-9766-49FF-AEE6-7008CA0E4F69}">
+      <dgm:prSet phldrT="[Text]" phldr="0"/>
+      <dgm:spPr/>
+      <dgm:t>
+        <a:bodyPr/>
+        <a:lstStyle/>
+        <a:p>
+          <a:r>
+            <a:rPr lang="en-US" dirty="0"/>
+            <a:t>MATHS-2</a:t>
+          </a:r>
+          <a:endParaRPr lang="en-IN" dirty="0"/>
+        </a:p>
+      </dgm:t>
+    </dgm:pt>
+    <dgm:pt modelId="{71984731-2172-40FF-AED6-514A03037C5D}" type="parTrans" cxnId="{6EE4CBFE-89AB-482D-9397-FDF88300289A}">
+      <dgm:prSet/>
+      <dgm:spPr/>
+      <dgm:t>
+        <a:bodyPr/>
+        <a:lstStyle/>
+        <a:p>
+          <a:endParaRPr lang="en-IN"/>
+        </a:p>
+      </dgm:t>
+    </dgm:pt>
+    <dgm:pt modelId="{445620EF-D5DD-4888-97F8-97AABA22FA31}" type="sibTrans" cxnId="{6EE4CBFE-89AB-482D-9397-FDF88300289A}">
+      <dgm:prSet/>
+      <dgm:spPr/>
+      <dgm:t>
+        <a:bodyPr/>
+        <a:lstStyle/>
+        <a:p>
+          <a:endParaRPr lang="en-IN"/>
+        </a:p>
+      </dgm:t>
+    </dgm:pt>
+    <dgm:pt modelId="{AC6633C2-4560-43AF-96F4-33A7CFC4854E}">
+      <dgm:prSet phldrT="[Text]" phldr="0"/>
+      <dgm:spPr/>
+      <dgm:t>
+        <a:bodyPr/>
+        <a:lstStyle/>
+        <a:p>
+          <a:r>
+            <a:rPr lang="en-US" dirty="0"/>
+            <a:t>EG</a:t>
+          </a:r>
+          <a:endParaRPr lang="en-IN" dirty="0"/>
+        </a:p>
+      </dgm:t>
+    </dgm:pt>
+    <dgm:pt modelId="{DA6B2D9F-FD95-4FF0-92EF-23250AD81D3A}" type="parTrans" cxnId="{0EA06F22-7095-4372-8394-A5E0610C6CE9}">
+      <dgm:prSet/>
+      <dgm:spPr/>
+      <dgm:t>
+        <a:bodyPr/>
+        <a:lstStyle/>
+        <a:p>
+          <a:endParaRPr lang="en-IN"/>
+        </a:p>
+      </dgm:t>
+    </dgm:pt>
+    <dgm:pt modelId="{DD146454-8177-474E-985D-181C98F5F24D}" type="sibTrans" cxnId="{0EA06F22-7095-4372-8394-A5E0610C6CE9}">
+      <dgm:prSet/>
+      <dgm:spPr/>
+      <dgm:t>
+        <a:bodyPr/>
+        <a:lstStyle/>
+        <a:p>
+          <a:endParaRPr lang="en-IN"/>
+        </a:p>
+      </dgm:t>
+    </dgm:pt>
+    <dgm:pt modelId="{4A0AC9FF-6817-4F5D-86DA-22F936BDB210}" type="pres">
+      <dgm:prSet presAssocID="{0716DE74-B873-4034-BF34-80F255B762C0}" presName="hierChild1" presStyleCnt="0">
+        <dgm:presLayoutVars>
+          <dgm:chPref val="1"/>
+          <dgm:dir/>
+          <dgm:animOne val="branch"/>
+          <dgm:animLvl val="lvl"/>
+          <dgm:resizeHandles/>
+        </dgm:presLayoutVars>
+      </dgm:prSet>
+      <dgm:spPr/>
+    </dgm:pt>
+    <dgm:pt modelId="{A5CB4DB7-88D8-43D3-A478-D343144718D3}" type="pres">
+      <dgm:prSet presAssocID="{F7ADD33A-07B1-4708-AF13-48367DDF374F}" presName="hierRoot1" presStyleCnt="0"/>
+      <dgm:spPr/>
+    </dgm:pt>
+    <dgm:pt modelId="{135DE57B-9068-4826-8B72-28D5B84CA530}" type="pres">
+      <dgm:prSet presAssocID="{F7ADD33A-07B1-4708-AF13-48367DDF374F}" presName="composite" presStyleCnt="0"/>
+      <dgm:spPr/>
+    </dgm:pt>
+    <dgm:pt modelId="{D54B0968-1653-44ED-8ED3-BE422063C553}" type="pres">
+      <dgm:prSet presAssocID="{F7ADD33A-07B1-4708-AF13-48367DDF374F}" presName="background" presStyleLbl="node0" presStyleIdx="0" presStyleCnt="1"/>
+      <dgm:spPr/>
+    </dgm:pt>
+    <dgm:pt modelId="{2C042F47-8123-44B6-82D1-2A50380BFE45}" type="pres">
+      <dgm:prSet presAssocID="{F7ADD33A-07B1-4708-AF13-48367DDF374F}" presName="text" presStyleLbl="fgAcc0" presStyleIdx="0" presStyleCnt="1">
+        <dgm:presLayoutVars>
+          <dgm:chPref val="3"/>
+        </dgm:presLayoutVars>
+      </dgm:prSet>
+      <dgm:spPr/>
+    </dgm:pt>
+    <dgm:pt modelId="{B940CEDB-0111-41F9-A835-E235071B6DB9}" type="pres">
+      <dgm:prSet presAssocID="{F7ADD33A-07B1-4708-AF13-48367DDF374F}" presName="hierChild2" presStyleCnt="0"/>
+      <dgm:spPr/>
+    </dgm:pt>
+    <dgm:pt modelId="{211B0341-713E-496E-B8A5-CE1D2571685A}" type="pres">
+      <dgm:prSet presAssocID="{76E86F2C-7FF2-4687-8197-F971B19A765F}" presName="Name10" presStyleLbl="parChTrans1D2" presStyleIdx="0" presStyleCnt="4"/>
+      <dgm:spPr/>
+    </dgm:pt>
+    <dgm:pt modelId="{D910CEDE-4F04-4D8B-BCC4-4B02E8FE24C6}" type="pres">
+      <dgm:prSet presAssocID="{15F4E7D4-10EB-47F1-BD1D-8D4869B1E5FA}" presName="hierRoot2" presStyleCnt="0"/>
+      <dgm:spPr/>
+    </dgm:pt>
+    <dgm:pt modelId="{7890242A-FEE3-416C-867C-93062AFC5049}" type="pres">
+      <dgm:prSet presAssocID="{15F4E7D4-10EB-47F1-BD1D-8D4869B1E5FA}" presName="composite2" presStyleCnt="0"/>
+      <dgm:spPr/>
+    </dgm:pt>
+    <dgm:pt modelId="{44D15D10-1B8E-4E57-A54C-A332D0A0B5DF}" type="pres">
+      <dgm:prSet presAssocID="{15F4E7D4-10EB-47F1-BD1D-8D4869B1E5FA}" presName="background2" presStyleLbl="node2" presStyleIdx="0" presStyleCnt="4"/>
+      <dgm:spPr/>
+    </dgm:pt>
+    <dgm:pt modelId="{AB3C8179-3C81-483A-B603-BFF049176008}" type="pres">
+      <dgm:prSet presAssocID="{15F4E7D4-10EB-47F1-BD1D-8D4869B1E5FA}" presName="text2" presStyleLbl="fgAcc2" presStyleIdx="0" presStyleCnt="4">
+        <dgm:presLayoutVars>
+          <dgm:chPref val="3"/>
+        </dgm:presLayoutVars>
+      </dgm:prSet>
+      <dgm:spPr/>
+    </dgm:pt>
+    <dgm:pt modelId="{74EFB6DE-960B-43BF-BC41-2CE056004D81}" type="pres">
+      <dgm:prSet presAssocID="{15F4E7D4-10EB-47F1-BD1D-8D4869B1E5FA}" presName="hierChild3" presStyleCnt="0"/>
+      <dgm:spPr/>
+    </dgm:pt>
+    <dgm:pt modelId="{22883215-3F5F-4FDE-BCAD-72372CF7AAC9}" type="pres">
+      <dgm:prSet presAssocID="{7753DB3B-DB46-4E54-AE88-E8BAFCEFFD29}" presName="Name10" presStyleLbl="parChTrans1D2" presStyleIdx="1" presStyleCnt="4"/>
+      <dgm:spPr/>
+    </dgm:pt>
+    <dgm:pt modelId="{A36CE1AC-EB2F-4B44-A9CF-CC347DAD5765}" type="pres">
+      <dgm:prSet presAssocID="{778D7872-628A-43B0-A791-8D12D8F28E52}" presName="hierRoot2" presStyleCnt="0"/>
+      <dgm:spPr/>
+    </dgm:pt>
+    <dgm:pt modelId="{43E9A531-A900-4090-BE70-AAAC6950AE4B}" type="pres">
+      <dgm:prSet presAssocID="{778D7872-628A-43B0-A791-8D12D8F28E52}" presName="composite2" presStyleCnt="0"/>
+      <dgm:spPr/>
+    </dgm:pt>
+    <dgm:pt modelId="{790C4331-0984-4677-8034-71508EFF1562}" type="pres">
+      <dgm:prSet presAssocID="{778D7872-628A-43B0-A791-8D12D8F28E52}" presName="background2" presStyleLbl="node2" presStyleIdx="1" presStyleCnt="4"/>
+      <dgm:spPr/>
+    </dgm:pt>
+    <dgm:pt modelId="{0A6FAFBC-C178-4C35-9D06-88069C7EFF63}" type="pres">
+      <dgm:prSet presAssocID="{778D7872-628A-43B0-A791-8D12D8F28E52}" presName="text2" presStyleLbl="fgAcc2" presStyleIdx="1" presStyleCnt="4">
+        <dgm:presLayoutVars>
+          <dgm:chPref val="3"/>
+        </dgm:presLayoutVars>
+      </dgm:prSet>
+      <dgm:spPr/>
+    </dgm:pt>
+    <dgm:pt modelId="{03904F4F-B29C-4708-AA0C-F80154CEAFA1}" type="pres">
+      <dgm:prSet presAssocID="{778D7872-628A-43B0-A791-8D12D8F28E52}" presName="hierChild3" presStyleCnt="0"/>
+      <dgm:spPr/>
+    </dgm:pt>
+    <dgm:pt modelId="{C505C4D1-B3A1-48FB-BDF4-4D9EC55854D8}" type="pres">
+      <dgm:prSet presAssocID="{71984731-2172-40FF-AED6-514A03037C5D}" presName="Name10" presStyleLbl="parChTrans1D2" presStyleIdx="2" presStyleCnt="4"/>
+      <dgm:spPr/>
+    </dgm:pt>
+    <dgm:pt modelId="{88358FCB-36A1-4970-AF9E-8C7349DE1A53}" type="pres">
+      <dgm:prSet presAssocID="{B9DE051B-9766-49FF-AEE6-7008CA0E4F69}" presName="hierRoot2" presStyleCnt="0"/>
+      <dgm:spPr/>
+    </dgm:pt>
+    <dgm:pt modelId="{64A3D258-889E-4781-A7DE-B3EAEF57F772}" type="pres">
+      <dgm:prSet presAssocID="{B9DE051B-9766-49FF-AEE6-7008CA0E4F69}" presName="composite2" presStyleCnt="0"/>
+      <dgm:spPr/>
+    </dgm:pt>
+    <dgm:pt modelId="{BC8D022A-B9CB-45DA-944A-4148F2DD27BD}" type="pres">
+      <dgm:prSet presAssocID="{B9DE051B-9766-49FF-AEE6-7008CA0E4F69}" presName="background2" presStyleLbl="node2" presStyleIdx="2" presStyleCnt="4"/>
+      <dgm:spPr/>
+    </dgm:pt>
+    <dgm:pt modelId="{78A6DF7A-B372-4CB3-AC8B-01027A3C7710}" type="pres">
+      <dgm:prSet presAssocID="{B9DE051B-9766-49FF-AEE6-7008CA0E4F69}" presName="text2" presStyleLbl="fgAcc2" presStyleIdx="2" presStyleCnt="4">
+        <dgm:presLayoutVars>
+          <dgm:chPref val="3"/>
+        </dgm:presLayoutVars>
+      </dgm:prSet>
+      <dgm:spPr/>
+    </dgm:pt>
+    <dgm:pt modelId="{5A645D48-2358-4B56-8053-609D53988C95}" type="pres">
+      <dgm:prSet presAssocID="{B9DE051B-9766-49FF-AEE6-7008CA0E4F69}" presName="hierChild3" presStyleCnt="0"/>
+      <dgm:spPr/>
+    </dgm:pt>
+    <dgm:pt modelId="{9034AEE8-9A53-4225-B4D7-6DF0018916BF}" type="pres">
+      <dgm:prSet presAssocID="{DA6B2D9F-FD95-4FF0-92EF-23250AD81D3A}" presName="Name10" presStyleLbl="parChTrans1D2" presStyleIdx="3" presStyleCnt="4"/>
+      <dgm:spPr/>
+    </dgm:pt>
+    <dgm:pt modelId="{D1DE5BDB-A103-4605-8186-030A8B19034A}" type="pres">
+      <dgm:prSet presAssocID="{AC6633C2-4560-43AF-96F4-33A7CFC4854E}" presName="hierRoot2" presStyleCnt="0"/>
+      <dgm:spPr/>
+    </dgm:pt>
+    <dgm:pt modelId="{2D9918A3-816F-4A73-9A37-92E8ED1DB18C}" type="pres">
+      <dgm:prSet presAssocID="{AC6633C2-4560-43AF-96F4-33A7CFC4854E}" presName="composite2" presStyleCnt="0"/>
+      <dgm:spPr/>
+    </dgm:pt>
+    <dgm:pt modelId="{8D56630C-761B-4B79-8F99-C5197DA30E6A}" type="pres">
+      <dgm:prSet presAssocID="{AC6633C2-4560-43AF-96F4-33A7CFC4854E}" presName="background2" presStyleLbl="node2" presStyleIdx="3" presStyleCnt="4"/>
+      <dgm:spPr/>
+    </dgm:pt>
+    <dgm:pt modelId="{5B3CF940-6223-4896-9D29-481C3D5EAAD0}" type="pres">
+      <dgm:prSet presAssocID="{AC6633C2-4560-43AF-96F4-33A7CFC4854E}" presName="text2" presStyleLbl="fgAcc2" presStyleIdx="3" presStyleCnt="4">
+        <dgm:presLayoutVars>
+          <dgm:chPref val="3"/>
+        </dgm:presLayoutVars>
+      </dgm:prSet>
+      <dgm:spPr/>
+    </dgm:pt>
+    <dgm:pt modelId="{24C518B4-354F-468B-A948-250AA4DAE76A}" type="pres">
+      <dgm:prSet presAssocID="{AC6633C2-4560-43AF-96F4-33A7CFC4854E}" presName="hierChild3" presStyleCnt="0"/>
+      <dgm:spPr/>
+    </dgm:pt>
+  </dgm:ptLst>
+  <dgm:cxnLst>
+    <dgm:cxn modelId="{F130691A-B63F-4ABD-888F-070E6D7597D0}" type="presOf" srcId="{DA6B2D9F-FD95-4FF0-92EF-23250AD81D3A}" destId="{9034AEE8-9A53-4225-B4D7-6DF0018916BF}" srcOrd="0" destOrd="0" presId="urn:microsoft.com/office/officeart/2005/8/layout/hierarchy1"/>
+    <dgm:cxn modelId="{0EA06F22-7095-4372-8394-A5E0610C6CE9}" srcId="{F7ADD33A-07B1-4708-AF13-48367DDF374F}" destId="{AC6633C2-4560-43AF-96F4-33A7CFC4854E}" srcOrd="3" destOrd="0" parTransId="{DA6B2D9F-FD95-4FF0-92EF-23250AD81D3A}" sibTransId="{DD146454-8177-474E-985D-181C98F5F24D}"/>
+    <dgm:cxn modelId="{A5EE3832-7316-42BF-BA10-7CE2021D8AC3}" type="presOf" srcId="{B9DE051B-9766-49FF-AEE6-7008CA0E4F69}" destId="{78A6DF7A-B372-4CB3-AC8B-01027A3C7710}" srcOrd="0" destOrd="0" presId="urn:microsoft.com/office/officeart/2005/8/layout/hierarchy1"/>
+    <dgm:cxn modelId="{84BD7C62-FA42-42A4-88E1-F55ABEE6CC8D}" type="presOf" srcId="{778D7872-628A-43B0-A791-8D12D8F28E52}" destId="{0A6FAFBC-C178-4C35-9D06-88069C7EFF63}" srcOrd="0" destOrd="0" presId="urn:microsoft.com/office/officeart/2005/8/layout/hierarchy1"/>
+    <dgm:cxn modelId="{F617136B-7006-400B-8EB5-51A37617AE0F}" type="presOf" srcId="{7753DB3B-DB46-4E54-AE88-E8BAFCEFFD29}" destId="{22883215-3F5F-4FDE-BCAD-72372CF7AAC9}" srcOrd="0" destOrd="0" presId="urn:microsoft.com/office/officeart/2005/8/layout/hierarchy1"/>
+    <dgm:cxn modelId="{975FB550-AB62-46D3-9A3B-53E6C7843759}" type="presOf" srcId="{AC6633C2-4560-43AF-96F4-33A7CFC4854E}" destId="{5B3CF940-6223-4896-9D29-481C3D5EAAD0}" srcOrd="0" destOrd="0" presId="urn:microsoft.com/office/officeart/2005/8/layout/hierarchy1"/>
+    <dgm:cxn modelId="{E487E070-F4A9-4AB5-B1AA-37547B9371B0}" type="presOf" srcId="{15F4E7D4-10EB-47F1-BD1D-8D4869B1E5FA}" destId="{AB3C8179-3C81-483A-B603-BFF049176008}" srcOrd="0" destOrd="0" presId="urn:microsoft.com/office/officeart/2005/8/layout/hierarchy1"/>
+    <dgm:cxn modelId="{F0343A93-BFC0-4DEF-AC01-D458B5D2F8C7}" srcId="{F7ADD33A-07B1-4708-AF13-48367DDF374F}" destId="{15F4E7D4-10EB-47F1-BD1D-8D4869B1E5FA}" srcOrd="0" destOrd="0" parTransId="{76E86F2C-7FF2-4687-8197-F971B19A765F}" sibTransId="{90DB2104-563D-40B0-A35D-F4B94F24C379}"/>
+    <dgm:cxn modelId="{23428C97-BA21-4D4A-87BB-7F753A1FBD6D}" type="presOf" srcId="{F7ADD33A-07B1-4708-AF13-48367DDF374F}" destId="{2C042F47-8123-44B6-82D1-2A50380BFE45}" srcOrd="0" destOrd="0" presId="urn:microsoft.com/office/officeart/2005/8/layout/hierarchy1"/>
+    <dgm:cxn modelId="{7CD2C3A0-98EA-451F-9F82-0F1A7D7B184E}" type="presOf" srcId="{0716DE74-B873-4034-BF34-80F255B762C0}" destId="{4A0AC9FF-6817-4F5D-86DA-22F936BDB210}" srcOrd="0" destOrd="0" presId="urn:microsoft.com/office/officeart/2005/8/layout/hierarchy1"/>
+    <dgm:cxn modelId="{A07290C5-1F00-464A-AB48-1AC631E2FD8B}" srcId="{F7ADD33A-07B1-4708-AF13-48367DDF374F}" destId="{778D7872-628A-43B0-A791-8D12D8F28E52}" srcOrd="1" destOrd="0" parTransId="{7753DB3B-DB46-4E54-AE88-E8BAFCEFFD29}" sibTransId="{2771DCEB-415D-4B18-8E98-B548B0A9E4CB}"/>
+    <dgm:cxn modelId="{F2E2BFC5-60EF-4AEA-8F84-F85001B03B31}" type="presOf" srcId="{71984731-2172-40FF-AED6-514A03037C5D}" destId="{C505C4D1-B3A1-48FB-BDF4-4D9EC55854D8}" srcOrd="0" destOrd="0" presId="urn:microsoft.com/office/officeart/2005/8/layout/hierarchy1"/>
+    <dgm:cxn modelId="{1D3D29C6-B24E-453D-8F4E-B410D1BB14E3}" srcId="{0716DE74-B873-4034-BF34-80F255B762C0}" destId="{F7ADD33A-07B1-4708-AF13-48367DDF374F}" srcOrd="0" destOrd="0" parTransId="{DAA7C577-684E-46D2-88FB-E3EEDE8CAFF1}" sibTransId="{15C850A4-04C0-47FF-A537-AB638B7E86FB}"/>
+    <dgm:cxn modelId="{EBF276F1-81AC-4DD3-BBD3-ABD317BF66CA}" type="presOf" srcId="{76E86F2C-7FF2-4687-8197-F971B19A765F}" destId="{211B0341-713E-496E-B8A5-CE1D2571685A}" srcOrd="0" destOrd="0" presId="urn:microsoft.com/office/officeart/2005/8/layout/hierarchy1"/>
+    <dgm:cxn modelId="{6EE4CBFE-89AB-482D-9397-FDF88300289A}" srcId="{F7ADD33A-07B1-4708-AF13-48367DDF374F}" destId="{B9DE051B-9766-49FF-AEE6-7008CA0E4F69}" srcOrd="2" destOrd="0" parTransId="{71984731-2172-40FF-AED6-514A03037C5D}" sibTransId="{445620EF-D5DD-4888-97F8-97AABA22FA31}"/>
+    <dgm:cxn modelId="{FD71A467-4DA2-432B-8B05-D38856676E7C}" type="presParOf" srcId="{4A0AC9FF-6817-4F5D-86DA-22F936BDB210}" destId="{A5CB4DB7-88D8-43D3-A478-D343144718D3}" srcOrd="0" destOrd="0" presId="urn:microsoft.com/office/officeart/2005/8/layout/hierarchy1"/>
+    <dgm:cxn modelId="{64A49B6A-CBE6-4171-A953-465AD1FDBEC7}" type="presParOf" srcId="{A5CB4DB7-88D8-43D3-A478-D343144718D3}" destId="{135DE57B-9068-4826-8B72-28D5B84CA530}" srcOrd="0" destOrd="0" presId="urn:microsoft.com/office/officeart/2005/8/layout/hierarchy1"/>
+    <dgm:cxn modelId="{1386E5E7-4AC8-4BEB-AAF3-5F3416C4A5FE}" type="presParOf" srcId="{135DE57B-9068-4826-8B72-28D5B84CA530}" destId="{D54B0968-1653-44ED-8ED3-BE422063C553}" srcOrd="0" destOrd="0" presId="urn:microsoft.com/office/officeart/2005/8/layout/hierarchy1"/>
+    <dgm:cxn modelId="{D87AEBEE-1495-4D14-8746-93CA6E05A0E4}" type="presParOf" srcId="{135DE57B-9068-4826-8B72-28D5B84CA530}" destId="{2C042F47-8123-44B6-82D1-2A50380BFE45}" srcOrd="1" destOrd="0" presId="urn:microsoft.com/office/officeart/2005/8/layout/hierarchy1"/>
+    <dgm:cxn modelId="{05CF9A40-BE38-4B4A-BC12-3A2A5FA8BF37}" type="presParOf" srcId="{A5CB4DB7-88D8-43D3-A478-D343144718D3}" destId="{B940CEDB-0111-41F9-A835-E235071B6DB9}" srcOrd="1" destOrd="0" presId="urn:microsoft.com/office/officeart/2005/8/layout/hierarchy1"/>
+    <dgm:cxn modelId="{84ED11B7-88B2-47D8-BFAF-2A045AA761F4}" type="presParOf" srcId="{B940CEDB-0111-41F9-A835-E235071B6DB9}" destId="{211B0341-713E-496E-B8A5-CE1D2571685A}" srcOrd="0" destOrd="0" presId="urn:microsoft.com/office/officeart/2005/8/layout/hierarchy1"/>
+    <dgm:cxn modelId="{B005500A-DA92-47BC-99A0-A4379D9808FC}" type="presParOf" srcId="{B940CEDB-0111-41F9-A835-E235071B6DB9}" destId="{D910CEDE-4F04-4D8B-BCC4-4B02E8FE24C6}" srcOrd="1" destOrd="0" presId="urn:microsoft.com/office/officeart/2005/8/layout/hierarchy1"/>
+    <dgm:cxn modelId="{2585556C-CBA1-4942-8832-B5201B9E11FE}" type="presParOf" srcId="{D910CEDE-4F04-4D8B-BCC4-4B02E8FE24C6}" destId="{7890242A-FEE3-416C-867C-93062AFC5049}" srcOrd="0" destOrd="0" presId="urn:microsoft.com/office/officeart/2005/8/layout/hierarchy1"/>
+    <dgm:cxn modelId="{2A6D1CCE-AA22-458C-B4D5-6818F3F33C0E}" type="presParOf" srcId="{7890242A-FEE3-416C-867C-93062AFC5049}" destId="{44D15D10-1B8E-4E57-A54C-A332D0A0B5DF}" srcOrd="0" destOrd="0" presId="urn:microsoft.com/office/officeart/2005/8/layout/hierarchy1"/>
+    <dgm:cxn modelId="{81E92660-6FC0-4698-966D-D8A36B55A278}" type="presParOf" srcId="{7890242A-FEE3-416C-867C-93062AFC5049}" destId="{AB3C8179-3C81-483A-B603-BFF049176008}" srcOrd="1" destOrd="0" presId="urn:microsoft.com/office/officeart/2005/8/layout/hierarchy1"/>
+    <dgm:cxn modelId="{CAC4ECDF-7198-4AFC-B5A2-FEC19D7F411F}" type="presParOf" srcId="{D910CEDE-4F04-4D8B-BCC4-4B02E8FE24C6}" destId="{74EFB6DE-960B-43BF-BC41-2CE056004D81}" srcOrd="1" destOrd="0" presId="urn:microsoft.com/office/officeart/2005/8/layout/hierarchy1"/>
+    <dgm:cxn modelId="{C0FABF92-5312-41DD-AD79-65176C3E9D0C}" type="presParOf" srcId="{B940CEDB-0111-41F9-A835-E235071B6DB9}" destId="{22883215-3F5F-4FDE-BCAD-72372CF7AAC9}" srcOrd="2" destOrd="0" presId="urn:microsoft.com/office/officeart/2005/8/layout/hierarchy1"/>
+    <dgm:cxn modelId="{575E439B-8510-476D-8EE9-0DCCB27CF610}" type="presParOf" srcId="{B940CEDB-0111-41F9-A835-E235071B6DB9}" destId="{A36CE1AC-EB2F-4B44-A9CF-CC347DAD5765}" srcOrd="3" destOrd="0" presId="urn:microsoft.com/office/officeart/2005/8/layout/hierarchy1"/>
+    <dgm:cxn modelId="{F9CE6235-3D1C-445F-BF15-9992494B6ACD}" type="presParOf" srcId="{A36CE1AC-EB2F-4B44-A9CF-CC347DAD5765}" destId="{43E9A531-A900-4090-BE70-AAAC6950AE4B}" srcOrd="0" destOrd="0" presId="urn:microsoft.com/office/officeart/2005/8/layout/hierarchy1"/>
+    <dgm:cxn modelId="{0647DDEE-4778-422B-BE20-35309F5D67A3}" type="presParOf" srcId="{43E9A531-A900-4090-BE70-AAAC6950AE4B}" destId="{790C4331-0984-4677-8034-71508EFF1562}" srcOrd="0" destOrd="0" presId="urn:microsoft.com/office/officeart/2005/8/layout/hierarchy1"/>
+    <dgm:cxn modelId="{69FA00B7-5C65-4474-B11E-A052FD389F69}" type="presParOf" srcId="{43E9A531-A900-4090-BE70-AAAC6950AE4B}" destId="{0A6FAFBC-C178-4C35-9D06-88069C7EFF63}" srcOrd="1" destOrd="0" presId="urn:microsoft.com/office/officeart/2005/8/layout/hierarchy1"/>
+    <dgm:cxn modelId="{1B5EF791-CBE7-46B3-AB59-DB1EA33C45F3}" type="presParOf" srcId="{A36CE1AC-EB2F-4B44-A9CF-CC347DAD5765}" destId="{03904F4F-B29C-4708-AA0C-F80154CEAFA1}" srcOrd="1" destOrd="0" presId="urn:microsoft.com/office/officeart/2005/8/layout/hierarchy1"/>
+    <dgm:cxn modelId="{CC98CDC9-2193-48A4-9516-BF0A3B975032}" type="presParOf" srcId="{B940CEDB-0111-41F9-A835-E235071B6DB9}" destId="{C505C4D1-B3A1-48FB-BDF4-4D9EC55854D8}" srcOrd="4" destOrd="0" presId="urn:microsoft.com/office/officeart/2005/8/layout/hierarchy1"/>
+    <dgm:cxn modelId="{CDFA4C55-30B7-4967-9D8C-C0DA18CEAB17}" type="presParOf" srcId="{B940CEDB-0111-41F9-A835-E235071B6DB9}" destId="{88358FCB-36A1-4970-AF9E-8C7349DE1A53}" srcOrd="5" destOrd="0" presId="urn:microsoft.com/office/officeart/2005/8/layout/hierarchy1"/>
+    <dgm:cxn modelId="{86D33AEE-FBF6-4030-8EAF-989493975E7D}" type="presParOf" srcId="{88358FCB-36A1-4970-AF9E-8C7349DE1A53}" destId="{64A3D258-889E-4781-A7DE-B3EAEF57F772}" srcOrd="0" destOrd="0" presId="urn:microsoft.com/office/officeart/2005/8/layout/hierarchy1"/>
+    <dgm:cxn modelId="{C55BD680-CD58-40E5-9796-B7ADC9E2788A}" type="presParOf" srcId="{64A3D258-889E-4781-A7DE-B3EAEF57F772}" destId="{BC8D022A-B9CB-45DA-944A-4148F2DD27BD}" srcOrd="0" destOrd="0" presId="urn:microsoft.com/office/officeart/2005/8/layout/hierarchy1"/>
+    <dgm:cxn modelId="{F9292990-0F33-4D17-BB94-F72AFB3769B3}" type="presParOf" srcId="{64A3D258-889E-4781-A7DE-B3EAEF57F772}" destId="{78A6DF7A-B372-4CB3-AC8B-01027A3C7710}" srcOrd="1" destOrd="0" presId="urn:microsoft.com/office/officeart/2005/8/layout/hierarchy1"/>
+    <dgm:cxn modelId="{189290D4-3A85-405A-8EBA-2DE93B00E53E}" type="presParOf" srcId="{88358FCB-36A1-4970-AF9E-8C7349DE1A53}" destId="{5A645D48-2358-4B56-8053-609D53988C95}" srcOrd="1" destOrd="0" presId="urn:microsoft.com/office/officeart/2005/8/layout/hierarchy1"/>
+    <dgm:cxn modelId="{359C441B-ADC7-423A-B011-3764EEF49163}" type="presParOf" srcId="{B940CEDB-0111-41F9-A835-E235071B6DB9}" destId="{9034AEE8-9A53-4225-B4D7-6DF0018916BF}" srcOrd="6" destOrd="0" presId="urn:microsoft.com/office/officeart/2005/8/layout/hierarchy1"/>
+    <dgm:cxn modelId="{C291F1D4-6C50-4A3B-AD53-7933C091672E}" type="presParOf" srcId="{B940CEDB-0111-41F9-A835-E235071B6DB9}" destId="{D1DE5BDB-A103-4605-8186-030A8B19034A}" srcOrd="7" destOrd="0" presId="urn:microsoft.com/office/officeart/2005/8/layout/hierarchy1"/>
+    <dgm:cxn modelId="{20F0F06D-3F70-4192-8BAF-B3C33B64A271}" type="presParOf" srcId="{D1DE5BDB-A103-4605-8186-030A8B19034A}" destId="{2D9918A3-816F-4A73-9A37-92E8ED1DB18C}" srcOrd="0" destOrd="0" presId="urn:microsoft.com/office/officeart/2005/8/layout/hierarchy1"/>
+    <dgm:cxn modelId="{9AA72418-0C63-47BB-B38D-D07AE587E5EA}" type="presParOf" srcId="{2D9918A3-816F-4A73-9A37-92E8ED1DB18C}" destId="{8D56630C-761B-4B79-8F99-C5197DA30E6A}" srcOrd="0" destOrd="0" presId="urn:microsoft.com/office/officeart/2005/8/layout/hierarchy1"/>
+    <dgm:cxn modelId="{8F05FE7C-2D06-4341-9598-4715CC9C48E8}" type="presParOf" srcId="{2D9918A3-816F-4A73-9A37-92E8ED1DB18C}" destId="{5B3CF940-6223-4896-9D29-481C3D5EAAD0}" srcOrd="1" destOrd="0" presId="urn:microsoft.com/office/officeart/2005/8/layout/hierarchy1"/>
+    <dgm:cxn modelId="{0C21D07D-BB8A-47F8-8378-BB2B00059B25}" type="presParOf" srcId="{D1DE5BDB-A103-4605-8186-030A8B19034A}" destId="{24C518B4-354F-468B-A948-250AA4DAE76A}" srcOrd="1" destOrd="0" presId="urn:microsoft.com/office/officeart/2005/8/layout/hierarchy1"/>
+  </dgm:cxnLst>
+  <dgm:bg/>
+  <dgm:whole/>
+  <dgm:extLst>
+    <a:ext uri="http://schemas.microsoft.com/office/drawing/2008/diagram">
+      <dsp:dataModelExt xmlns:dsp="http://schemas.microsoft.com/office/drawing/2008/diagram" relId="rId6" minVer="http://schemas.openxmlformats.org/drawingml/2006/diagram"/>
+    </a:ext>
+  </dgm:extLst>
+</dgm:dataModel>
+</file>
+
+<file path=ppt/diagrams/drawing1.xml><?xml version="1.0" encoding="utf-8"?>
+<dsp:drawing xmlns:dgm="http://schemas.openxmlformats.org/drawingml/2006/diagram" xmlns:dsp="http://schemas.microsoft.com/office/drawing/2008/diagram" xmlns:a="http://schemas.openxmlformats.org/drawingml/2006/main">
+  <dsp:spTree>
+    <dsp:nvGrpSpPr>
+      <dsp:cNvPr id="0" name=""/>
+      <dsp:cNvGrpSpPr/>
+    </dsp:nvGrpSpPr>
+    <dsp:grpSpPr/>
+    <dsp:sp modelId="{9034AEE8-9A53-4225-B4D7-6DF0018916BF}">
+      <dsp:nvSpPr>
+        <dsp:cNvPr id="0" name=""/>
+        <dsp:cNvSpPr/>
+      </dsp:nvSpPr>
+      <dsp:spPr>
+        <a:xfrm>
+          <a:off x="3474343" y="1564820"/>
+          <a:ext cx="2728203" cy="432792"/>
+        </a:xfrm>
+        <a:custGeom>
+          <a:avLst/>
+          <a:gdLst/>
+          <a:ahLst/>
+          <a:cxnLst/>
+          <a:rect l="0" t="0" r="0" b="0"/>
+          <a:pathLst>
+            <a:path>
+              <a:moveTo>
+                <a:pt x="0" y="0"/>
+              </a:moveTo>
+              <a:lnTo>
+                <a:pt x="0" y="294935"/>
+              </a:lnTo>
+              <a:lnTo>
+                <a:pt x="2728203" y="294935"/>
+              </a:lnTo>
+              <a:lnTo>
+                <a:pt x="2728203" y="432792"/>
+              </a:lnTo>
+            </a:path>
+          </a:pathLst>
+        </a:custGeom>
+        <a:noFill/>
+        <a:ln w="12700" cap="flat" cmpd="sng" algn="ctr">
+          <a:solidFill>
+            <a:schemeClr val="accent1">
+              <a:shade val="60000"/>
+              <a:hueOff val="0"/>
+              <a:satOff val="0"/>
+              <a:lumOff val="0"/>
+              <a:alphaOff val="0"/>
+            </a:schemeClr>
+          </a:solidFill>
+          <a:prstDash val="solid"/>
+          <a:miter lim="800000"/>
+        </a:ln>
+        <a:effectLst/>
+      </dsp:spPr>
+      <dsp:style>
+        <a:lnRef idx="2">
+          <a:scrgbClr r="0" g="0" b="0"/>
+        </a:lnRef>
+        <a:fillRef idx="0">
+          <a:scrgbClr r="0" g="0" b="0"/>
+        </a:fillRef>
+        <a:effectRef idx="0">
+          <a:scrgbClr r="0" g="0" b="0"/>
+        </a:effectRef>
+        <a:fontRef idx="minor"/>
+      </dsp:style>
+    </dsp:sp>
+    <dsp:sp modelId="{C505C4D1-B3A1-48FB-BDF4-4D9EC55854D8}">
+      <dsp:nvSpPr>
+        <dsp:cNvPr id="0" name=""/>
+        <dsp:cNvSpPr/>
+      </dsp:nvSpPr>
+      <dsp:spPr>
+        <a:xfrm>
+          <a:off x="3474343" y="1564820"/>
+          <a:ext cx="909401" cy="432792"/>
+        </a:xfrm>
+        <a:custGeom>
+          <a:avLst/>
+          <a:gdLst/>
+          <a:ahLst/>
+          <a:cxnLst/>
+          <a:rect l="0" t="0" r="0" b="0"/>
+          <a:pathLst>
+            <a:path>
+              <a:moveTo>
+                <a:pt x="0" y="0"/>
+              </a:moveTo>
+              <a:lnTo>
+                <a:pt x="0" y="294935"/>
+              </a:lnTo>
+              <a:lnTo>
+                <a:pt x="909401" y="294935"/>
+              </a:lnTo>
+              <a:lnTo>
+                <a:pt x="909401" y="432792"/>
+              </a:lnTo>
+            </a:path>
+          </a:pathLst>
+        </a:custGeom>
+        <a:noFill/>
+        <a:ln w="12700" cap="flat" cmpd="sng" algn="ctr">
+          <a:solidFill>
+            <a:schemeClr val="accent1">
+              <a:shade val="60000"/>
+              <a:hueOff val="0"/>
+              <a:satOff val="0"/>
+              <a:lumOff val="0"/>
+              <a:alphaOff val="0"/>
+            </a:schemeClr>
+          </a:solidFill>
+          <a:prstDash val="solid"/>
+          <a:miter lim="800000"/>
+        </a:ln>
+        <a:effectLst/>
+      </dsp:spPr>
+      <dsp:style>
+        <a:lnRef idx="2">
+          <a:scrgbClr r="0" g="0" b="0"/>
+        </a:lnRef>
+        <a:fillRef idx="0">
+          <a:scrgbClr r="0" g="0" b="0"/>
+        </a:fillRef>
+        <a:effectRef idx="0">
+          <a:scrgbClr r="0" g="0" b="0"/>
+        </a:effectRef>
+        <a:fontRef idx="minor"/>
+      </dsp:style>
+    </dsp:sp>
+    <dsp:sp modelId="{22883215-3F5F-4FDE-BCAD-72372CF7AAC9}">
+      <dsp:nvSpPr>
+        <dsp:cNvPr id="0" name=""/>
+        <dsp:cNvSpPr/>
+      </dsp:nvSpPr>
+      <dsp:spPr>
+        <a:xfrm>
+          <a:off x="2564942" y="1564820"/>
+          <a:ext cx="909401" cy="432792"/>
+        </a:xfrm>
+        <a:custGeom>
+          <a:avLst/>
+          <a:gdLst/>
+          <a:ahLst/>
+          <a:cxnLst/>
+          <a:rect l="0" t="0" r="0" b="0"/>
+          <a:pathLst>
+            <a:path>
+              <a:moveTo>
+                <a:pt x="909401" y="0"/>
+              </a:moveTo>
+              <a:lnTo>
+                <a:pt x="909401" y="294935"/>
+              </a:lnTo>
+              <a:lnTo>
+                <a:pt x="0" y="294935"/>
+              </a:lnTo>
+              <a:lnTo>
+                <a:pt x="0" y="432792"/>
+              </a:lnTo>
+            </a:path>
+          </a:pathLst>
+        </a:custGeom>
+        <a:noFill/>
+        <a:ln w="12700" cap="flat" cmpd="sng" algn="ctr">
+          <a:solidFill>
+            <a:schemeClr val="accent1">
+              <a:shade val="60000"/>
+              <a:hueOff val="0"/>
+              <a:satOff val="0"/>
+              <a:lumOff val="0"/>
+              <a:alphaOff val="0"/>
+            </a:schemeClr>
+          </a:solidFill>
+          <a:prstDash val="solid"/>
+          <a:miter lim="800000"/>
+        </a:ln>
+        <a:effectLst/>
+      </dsp:spPr>
+      <dsp:style>
+        <a:lnRef idx="2">
+          <a:scrgbClr r="0" g="0" b="0"/>
+        </a:lnRef>
+        <a:fillRef idx="0">
+          <a:scrgbClr r="0" g="0" b="0"/>
+        </a:fillRef>
+        <a:effectRef idx="0">
+          <a:scrgbClr r="0" g="0" b="0"/>
+        </a:effectRef>
+        <a:fontRef idx="minor"/>
+      </dsp:style>
+    </dsp:sp>
+    <dsp:sp modelId="{211B0341-713E-496E-B8A5-CE1D2571685A}">
+      <dsp:nvSpPr>
+        <dsp:cNvPr id="0" name=""/>
+        <dsp:cNvSpPr/>
+      </dsp:nvSpPr>
+      <dsp:spPr>
+        <a:xfrm>
+          <a:off x="746139" y="1564820"/>
+          <a:ext cx="2728203" cy="432792"/>
+        </a:xfrm>
+        <a:custGeom>
+          <a:avLst/>
+          <a:gdLst/>
+          <a:ahLst/>
+          <a:cxnLst/>
+          <a:rect l="0" t="0" r="0" b="0"/>
+          <a:pathLst>
+            <a:path>
+              <a:moveTo>
+                <a:pt x="2728203" y="0"/>
+              </a:moveTo>
+              <a:lnTo>
+                <a:pt x="2728203" y="294935"/>
+              </a:lnTo>
+              <a:lnTo>
+                <a:pt x="0" y="294935"/>
+              </a:lnTo>
+              <a:lnTo>
+                <a:pt x="0" y="432792"/>
+              </a:lnTo>
+            </a:path>
+          </a:pathLst>
+        </a:custGeom>
+        <a:noFill/>
+        <a:ln w="12700" cap="flat" cmpd="sng" algn="ctr">
+          <a:solidFill>
+            <a:schemeClr val="accent1">
+              <a:shade val="60000"/>
+              <a:hueOff val="0"/>
+              <a:satOff val="0"/>
+              <a:lumOff val="0"/>
+              <a:alphaOff val="0"/>
+            </a:schemeClr>
+          </a:solidFill>
+          <a:prstDash val="solid"/>
+          <a:miter lim="800000"/>
+        </a:ln>
+        <a:effectLst/>
+      </dsp:spPr>
+      <dsp:style>
+        <a:lnRef idx="2">
+          <a:scrgbClr r="0" g="0" b="0"/>
+        </a:lnRef>
+        <a:fillRef idx="0">
+          <a:scrgbClr r="0" g="0" b="0"/>
+        </a:fillRef>
+        <a:effectRef idx="0">
+          <a:scrgbClr r="0" g="0" b="0"/>
+        </a:effectRef>
+        <a:fontRef idx="minor"/>
+      </dsp:style>
+    </dsp:sp>
+    <dsp:sp modelId="{D54B0968-1653-44ED-8ED3-BE422063C553}">
+      <dsp:nvSpPr>
+        <dsp:cNvPr id="0" name=""/>
+        <dsp:cNvSpPr/>
+      </dsp:nvSpPr>
+      <dsp:spPr>
+        <a:xfrm>
+          <a:off x="2730287" y="619870"/>
+          <a:ext cx="1488110" cy="944950"/>
+        </a:xfrm>
+        <a:prstGeom prst="roundRect">
+          <a:avLst>
+            <a:gd name="adj" fmla="val 10000"/>
+          </a:avLst>
+        </a:prstGeom>
+        <a:solidFill>
+          <a:schemeClr val="accent1">
+            <a:hueOff val="0"/>
+            <a:satOff val="0"/>
+            <a:lumOff val="0"/>
+            <a:alphaOff val="0"/>
+          </a:schemeClr>
+        </a:solidFill>
+        <a:ln w="12700" cap="flat" cmpd="sng" algn="ctr">
+          <a:solidFill>
+            <a:schemeClr val="lt1">
+              <a:hueOff val="0"/>
+              <a:satOff val="0"/>
+              <a:lumOff val="0"/>
+              <a:alphaOff val="0"/>
+            </a:schemeClr>
+          </a:solidFill>
+          <a:prstDash val="solid"/>
+          <a:miter lim="800000"/>
+        </a:ln>
+        <a:effectLst/>
+      </dsp:spPr>
+      <dsp:style>
+        <a:lnRef idx="2">
+          <a:scrgbClr r="0" g="0" b="0"/>
+        </a:lnRef>
+        <a:fillRef idx="1">
+          <a:scrgbClr r="0" g="0" b="0"/>
+        </a:fillRef>
+        <a:effectRef idx="0">
+          <a:scrgbClr r="0" g="0" b="0"/>
+        </a:effectRef>
+        <a:fontRef idx="minor">
+          <a:schemeClr val="lt1"/>
+        </a:fontRef>
+      </dsp:style>
+    </dsp:sp>
+    <dsp:sp modelId="{2C042F47-8123-44B6-82D1-2A50380BFE45}">
+      <dsp:nvSpPr>
+        <dsp:cNvPr id="0" name=""/>
+        <dsp:cNvSpPr/>
+      </dsp:nvSpPr>
+      <dsp:spPr>
+        <a:xfrm>
+          <a:off x="2895633" y="776948"/>
+          <a:ext cx="1488110" cy="944950"/>
+        </a:xfrm>
+        <a:prstGeom prst="roundRect">
+          <a:avLst>
+            <a:gd name="adj" fmla="val 10000"/>
+          </a:avLst>
+        </a:prstGeom>
+        <a:solidFill>
+          <a:schemeClr val="lt1">
+            <a:alpha val="90000"/>
+            <a:hueOff val="0"/>
+            <a:satOff val="0"/>
+            <a:lumOff val="0"/>
+            <a:alphaOff val="0"/>
+          </a:schemeClr>
+        </a:solidFill>
+        <a:ln w="12700" cap="flat" cmpd="sng" algn="ctr">
+          <a:solidFill>
+            <a:schemeClr val="accent1">
+              <a:hueOff val="0"/>
+              <a:satOff val="0"/>
+              <a:lumOff val="0"/>
+              <a:alphaOff val="0"/>
+            </a:schemeClr>
+          </a:solidFill>
+          <a:prstDash val="solid"/>
+          <a:miter lim="800000"/>
+        </a:ln>
+        <a:effectLst/>
+      </dsp:spPr>
+      <dsp:style>
+        <a:lnRef idx="2">
+          <a:scrgbClr r="0" g="0" b="0"/>
+        </a:lnRef>
+        <a:fillRef idx="1">
+          <a:scrgbClr r="0" g="0" b="0"/>
+        </a:fillRef>
+        <a:effectRef idx="0">
+          <a:scrgbClr r="0" g="0" b="0"/>
+        </a:effectRef>
+        <a:fontRef idx="minor"/>
+      </dsp:style>
+      <dsp:txBody>
+        <a:bodyPr spcFirstLastPara="0" vert="horz" wrap="square" lIns="83820" tIns="83820" rIns="83820" bIns="83820" numCol="1" spcCol="1270" anchor="ctr" anchorCtr="0">
+          <a:noAutofit/>
+        </a:bodyPr>
+        <a:lstStyle/>
+        <a:p>
+          <a:pPr marL="0" lvl="0" indent="0" algn="ctr" defTabSz="977900">
+            <a:lnSpc>
+              <a:spcPct val="90000"/>
+            </a:lnSpc>
+            <a:spcBef>
+              <a:spcPct val="0"/>
+            </a:spcBef>
+            <a:spcAft>
+              <a:spcPct val="35000"/>
+            </a:spcAft>
+            <a:buNone/>
+          </a:pPr>
+          <a:r>
+            <a:rPr lang="en-US" sz="2200" kern="1200" dirty="0"/>
+            <a:t>Semester 2</a:t>
+          </a:r>
+          <a:endParaRPr lang="en-IN" sz="2200" kern="1200" dirty="0"/>
+        </a:p>
+      </dsp:txBody>
+      <dsp:txXfrm>
+        <a:off x="2923310" y="804625"/>
+        <a:ext cx="1432756" cy="889596"/>
+      </dsp:txXfrm>
+    </dsp:sp>
+    <dsp:sp modelId="{44D15D10-1B8E-4E57-A54C-A332D0A0B5DF}">
+      <dsp:nvSpPr>
+        <dsp:cNvPr id="0" name=""/>
+        <dsp:cNvSpPr/>
+      </dsp:nvSpPr>
+      <dsp:spPr>
+        <a:xfrm>
+          <a:off x="2084" y="1997612"/>
+          <a:ext cx="1488110" cy="944950"/>
+        </a:xfrm>
+        <a:prstGeom prst="roundRect">
+          <a:avLst>
+            <a:gd name="adj" fmla="val 10000"/>
+          </a:avLst>
+        </a:prstGeom>
+        <a:solidFill>
+          <a:schemeClr val="accent1">
+            <a:hueOff val="0"/>
+            <a:satOff val="0"/>
+            <a:lumOff val="0"/>
+            <a:alphaOff val="0"/>
+          </a:schemeClr>
+        </a:solidFill>
+        <a:ln w="12700" cap="flat" cmpd="sng" algn="ctr">
+          <a:solidFill>
+            <a:schemeClr val="lt1">
+              <a:hueOff val="0"/>
+              <a:satOff val="0"/>
+              <a:lumOff val="0"/>
+              <a:alphaOff val="0"/>
+            </a:schemeClr>
+          </a:solidFill>
+          <a:prstDash val="solid"/>
+          <a:miter lim="800000"/>
+        </a:ln>
+        <a:effectLst/>
+      </dsp:spPr>
+      <dsp:style>
+        <a:lnRef idx="2">
+          <a:scrgbClr r="0" g="0" b="0"/>
+        </a:lnRef>
+        <a:fillRef idx="1">
+          <a:scrgbClr r="0" g="0" b="0"/>
+        </a:fillRef>
+        <a:effectRef idx="0">
+          <a:scrgbClr r="0" g="0" b="0"/>
+        </a:effectRef>
+        <a:fontRef idx="minor">
+          <a:schemeClr val="lt1"/>
+        </a:fontRef>
+      </dsp:style>
+    </dsp:sp>
+    <dsp:sp modelId="{AB3C8179-3C81-483A-B603-BFF049176008}">
+      <dsp:nvSpPr>
+        <dsp:cNvPr id="0" name=""/>
+        <dsp:cNvSpPr/>
+      </dsp:nvSpPr>
+      <dsp:spPr>
+        <a:xfrm>
+          <a:off x="167429" y="2154691"/>
+          <a:ext cx="1488110" cy="944950"/>
+        </a:xfrm>
+        <a:prstGeom prst="roundRect">
+          <a:avLst>
+            <a:gd name="adj" fmla="val 10000"/>
+          </a:avLst>
+        </a:prstGeom>
+        <a:solidFill>
+          <a:schemeClr val="lt1">
+            <a:alpha val="90000"/>
+            <a:hueOff val="0"/>
+            <a:satOff val="0"/>
+            <a:lumOff val="0"/>
+            <a:alphaOff val="0"/>
+          </a:schemeClr>
+        </a:solidFill>
+        <a:ln w="12700" cap="flat" cmpd="sng" algn="ctr">
+          <a:solidFill>
+            <a:schemeClr val="accent1">
+              <a:hueOff val="0"/>
+              <a:satOff val="0"/>
+              <a:lumOff val="0"/>
+              <a:alphaOff val="0"/>
+            </a:schemeClr>
+          </a:solidFill>
+          <a:prstDash val="solid"/>
+          <a:miter lim="800000"/>
+        </a:ln>
+        <a:effectLst/>
+      </dsp:spPr>
+      <dsp:style>
+        <a:lnRef idx="2">
+          <a:scrgbClr r="0" g="0" b="0"/>
+        </a:lnRef>
+        <a:fillRef idx="1">
+          <a:scrgbClr r="0" g="0" b="0"/>
+        </a:fillRef>
+        <a:effectRef idx="0">
+          <a:scrgbClr r="0" g="0" b="0"/>
+        </a:effectRef>
+        <a:fontRef idx="minor"/>
+      </dsp:style>
+      <dsp:txBody>
+        <a:bodyPr spcFirstLastPara="0" vert="horz" wrap="square" lIns="83820" tIns="83820" rIns="83820" bIns="83820" numCol="1" spcCol="1270" anchor="ctr" anchorCtr="0">
+          <a:noAutofit/>
+        </a:bodyPr>
+        <a:lstStyle/>
+        <a:p>
+          <a:pPr marL="0" lvl="0" indent="0" algn="ctr" defTabSz="977900">
+            <a:lnSpc>
+              <a:spcPct val="90000"/>
+            </a:lnSpc>
+            <a:spcBef>
+              <a:spcPct val="0"/>
+            </a:spcBef>
+            <a:spcAft>
+              <a:spcPct val="35000"/>
+            </a:spcAft>
+            <a:buNone/>
+          </a:pPr>
+          <a:r>
+            <a:rPr lang="en-US" sz="2200" kern="1200" dirty="0"/>
+            <a:t>OOPJ</a:t>
+          </a:r>
+          <a:endParaRPr lang="en-IN" sz="2200" kern="1200" dirty="0"/>
+        </a:p>
+      </dsp:txBody>
+      <dsp:txXfrm>
+        <a:off x="195106" y="2182368"/>
+        <a:ext cx="1432756" cy="889596"/>
+      </dsp:txXfrm>
+    </dsp:sp>
+    <dsp:sp modelId="{790C4331-0984-4677-8034-71508EFF1562}">
+      <dsp:nvSpPr>
+        <dsp:cNvPr id="0" name=""/>
+        <dsp:cNvSpPr/>
+      </dsp:nvSpPr>
+      <dsp:spPr>
+        <a:xfrm>
+          <a:off x="1820886" y="1997612"/>
+          <a:ext cx="1488110" cy="944950"/>
+        </a:xfrm>
+        <a:prstGeom prst="roundRect">
+          <a:avLst>
+            <a:gd name="adj" fmla="val 10000"/>
+          </a:avLst>
+        </a:prstGeom>
+        <a:solidFill>
+          <a:schemeClr val="accent1">
+            <a:hueOff val="0"/>
+            <a:satOff val="0"/>
+            <a:lumOff val="0"/>
+            <a:alphaOff val="0"/>
+          </a:schemeClr>
+        </a:solidFill>
+        <a:ln w="12700" cap="flat" cmpd="sng" algn="ctr">
+          <a:solidFill>
+            <a:schemeClr val="lt1">
+              <a:hueOff val="0"/>
+              <a:satOff val="0"/>
+              <a:lumOff val="0"/>
+              <a:alphaOff val="0"/>
+            </a:schemeClr>
+          </a:solidFill>
+          <a:prstDash val="solid"/>
+          <a:miter lim="800000"/>
+        </a:ln>
+        <a:effectLst/>
+      </dsp:spPr>
+      <dsp:style>
+        <a:lnRef idx="2">
+          <a:scrgbClr r="0" g="0" b="0"/>
+        </a:lnRef>
+        <a:fillRef idx="1">
+          <a:scrgbClr r="0" g="0" b="0"/>
+        </a:fillRef>
+        <a:effectRef idx="0">
+          <a:scrgbClr r="0" g="0" b="0"/>
+        </a:effectRef>
+        <a:fontRef idx="minor">
+          <a:schemeClr val="lt1"/>
+        </a:fontRef>
+      </dsp:style>
+    </dsp:sp>
+    <dsp:sp modelId="{0A6FAFBC-C178-4C35-9D06-88069C7EFF63}">
+      <dsp:nvSpPr>
+        <dsp:cNvPr id="0" name=""/>
+        <dsp:cNvSpPr/>
+      </dsp:nvSpPr>
+      <dsp:spPr>
+        <a:xfrm>
+          <a:off x="1986232" y="2154691"/>
+          <a:ext cx="1488110" cy="944950"/>
+        </a:xfrm>
+        <a:prstGeom prst="roundRect">
+          <a:avLst>
+            <a:gd name="adj" fmla="val 10000"/>
+          </a:avLst>
+        </a:prstGeom>
+        <a:solidFill>
+          <a:schemeClr val="lt1">
+            <a:alpha val="90000"/>
+            <a:hueOff val="0"/>
+            <a:satOff val="0"/>
+            <a:lumOff val="0"/>
+            <a:alphaOff val="0"/>
+          </a:schemeClr>
+        </a:solidFill>
+        <a:ln w="12700" cap="flat" cmpd="sng" algn="ctr">
+          <a:solidFill>
+            <a:schemeClr val="accent1">
+              <a:hueOff val="0"/>
+              <a:satOff val="0"/>
+              <a:lumOff val="0"/>
+              <a:alphaOff val="0"/>
+            </a:schemeClr>
+          </a:solidFill>
+          <a:prstDash val="solid"/>
+          <a:miter lim="800000"/>
+        </a:ln>
+        <a:effectLst/>
+      </dsp:spPr>
+      <dsp:style>
+        <a:lnRef idx="2">
+          <a:scrgbClr r="0" g="0" b="0"/>
+        </a:lnRef>
+        <a:fillRef idx="1">
+          <a:scrgbClr r="0" g="0" b="0"/>
+        </a:fillRef>
+        <a:effectRef idx="0">
+          <a:scrgbClr r="0" g="0" b="0"/>
+        </a:effectRef>
+        <a:fontRef idx="minor"/>
+      </dsp:style>
+      <dsp:txBody>
+        <a:bodyPr spcFirstLastPara="0" vert="horz" wrap="square" lIns="83820" tIns="83820" rIns="83820" bIns="83820" numCol="1" spcCol="1270" anchor="ctr" anchorCtr="0">
+          <a:noAutofit/>
+        </a:bodyPr>
+        <a:lstStyle/>
+        <a:p>
+          <a:pPr marL="0" lvl="0" indent="0" algn="ctr" defTabSz="977900">
+            <a:lnSpc>
+              <a:spcPct val="90000"/>
+            </a:lnSpc>
+            <a:spcBef>
+              <a:spcPct val="0"/>
+            </a:spcBef>
+            <a:spcAft>
+              <a:spcPct val="35000"/>
+            </a:spcAft>
+            <a:buNone/>
+          </a:pPr>
+          <a:r>
+            <a:rPr lang="en-US" sz="2200" kern="1200" dirty="0"/>
+            <a:t>WD</a:t>
+          </a:r>
+          <a:endParaRPr lang="en-IN" sz="2200" kern="1200" dirty="0"/>
+        </a:p>
+      </dsp:txBody>
+      <dsp:txXfrm>
+        <a:off x="2013909" y="2182368"/>
+        <a:ext cx="1432756" cy="889596"/>
+      </dsp:txXfrm>
+    </dsp:sp>
+    <dsp:sp modelId="{BC8D022A-B9CB-45DA-944A-4148F2DD27BD}">
+      <dsp:nvSpPr>
+        <dsp:cNvPr id="0" name=""/>
+        <dsp:cNvSpPr/>
+      </dsp:nvSpPr>
+      <dsp:spPr>
+        <a:xfrm>
+          <a:off x="3639688" y="1997612"/>
+          <a:ext cx="1488110" cy="944950"/>
+        </a:xfrm>
+        <a:prstGeom prst="roundRect">
+          <a:avLst>
+            <a:gd name="adj" fmla="val 10000"/>
+          </a:avLst>
+        </a:prstGeom>
+        <a:solidFill>
+          <a:schemeClr val="accent1">
+            <a:hueOff val="0"/>
+            <a:satOff val="0"/>
+            <a:lumOff val="0"/>
+            <a:alphaOff val="0"/>
+          </a:schemeClr>
+        </a:solidFill>
+        <a:ln w="12700" cap="flat" cmpd="sng" algn="ctr">
+          <a:solidFill>
+            <a:schemeClr val="lt1">
+              <a:hueOff val="0"/>
+              <a:satOff val="0"/>
+              <a:lumOff val="0"/>
+              <a:alphaOff val="0"/>
+            </a:schemeClr>
+          </a:solidFill>
+          <a:prstDash val="solid"/>
+          <a:miter lim="800000"/>
+        </a:ln>
+        <a:effectLst/>
+      </dsp:spPr>
+      <dsp:style>
+        <a:lnRef idx="2">
+          <a:scrgbClr r="0" g="0" b="0"/>
+        </a:lnRef>
+        <a:fillRef idx="1">
+          <a:scrgbClr r="0" g="0" b="0"/>
+        </a:fillRef>
+        <a:effectRef idx="0">
+          <a:scrgbClr r="0" g="0" b="0"/>
+        </a:effectRef>
+        <a:fontRef idx="minor">
+          <a:schemeClr val="lt1"/>
+        </a:fontRef>
+      </dsp:style>
+    </dsp:sp>
+    <dsp:sp modelId="{78A6DF7A-B372-4CB3-AC8B-01027A3C7710}">
+      <dsp:nvSpPr>
+        <dsp:cNvPr id="0" name=""/>
+        <dsp:cNvSpPr/>
+      </dsp:nvSpPr>
+      <dsp:spPr>
+        <a:xfrm>
+          <a:off x="3805034" y="2154691"/>
+          <a:ext cx="1488110" cy="944950"/>
+        </a:xfrm>
+        <a:prstGeom prst="roundRect">
+          <a:avLst>
+            <a:gd name="adj" fmla="val 10000"/>
+          </a:avLst>
+        </a:prstGeom>
+        <a:solidFill>
+          <a:schemeClr val="lt1">
+            <a:alpha val="90000"/>
+            <a:hueOff val="0"/>
+            <a:satOff val="0"/>
+            <a:lumOff val="0"/>
+            <a:alphaOff val="0"/>
+          </a:schemeClr>
+        </a:solidFill>
+        <a:ln w="12700" cap="flat" cmpd="sng" algn="ctr">
+          <a:solidFill>
+            <a:schemeClr val="accent1">
+              <a:hueOff val="0"/>
+              <a:satOff val="0"/>
+              <a:lumOff val="0"/>
+              <a:alphaOff val="0"/>
+            </a:schemeClr>
+          </a:solidFill>
+          <a:prstDash val="solid"/>
+          <a:miter lim="800000"/>
+        </a:ln>
+        <a:effectLst/>
+      </dsp:spPr>
+      <dsp:style>
+        <a:lnRef idx="2">
+          <a:scrgbClr r="0" g="0" b="0"/>
+        </a:lnRef>
+        <a:fillRef idx="1">
+          <a:scrgbClr r="0" g="0" b="0"/>
+        </a:fillRef>
+        <a:effectRef idx="0">
+          <a:scrgbClr r="0" g="0" b="0"/>
+        </a:effectRef>
+        <a:fontRef idx="minor"/>
+      </dsp:style>
+      <dsp:txBody>
+        <a:bodyPr spcFirstLastPara="0" vert="horz" wrap="square" lIns="83820" tIns="83820" rIns="83820" bIns="83820" numCol="1" spcCol="1270" anchor="ctr" anchorCtr="0">
+          <a:noAutofit/>
+        </a:bodyPr>
+        <a:lstStyle/>
+        <a:p>
+          <a:pPr marL="0" lvl="0" indent="0" algn="ctr" defTabSz="977900">
+            <a:lnSpc>
+              <a:spcPct val="90000"/>
+            </a:lnSpc>
+            <a:spcBef>
+              <a:spcPct val="0"/>
+            </a:spcBef>
+            <a:spcAft>
+              <a:spcPct val="35000"/>
+            </a:spcAft>
+            <a:buNone/>
+          </a:pPr>
+          <a:r>
+            <a:rPr lang="en-US" sz="2200" kern="1200" dirty="0"/>
+            <a:t>MATHS-2</a:t>
+          </a:r>
+          <a:endParaRPr lang="en-IN" sz="2200" kern="1200" dirty="0"/>
+        </a:p>
+      </dsp:txBody>
+      <dsp:txXfrm>
+        <a:off x="3832711" y="2182368"/>
+        <a:ext cx="1432756" cy="889596"/>
+      </dsp:txXfrm>
+    </dsp:sp>
+    <dsp:sp modelId="{8D56630C-761B-4B79-8F99-C5197DA30E6A}">
+      <dsp:nvSpPr>
+        <dsp:cNvPr id="0" name=""/>
+        <dsp:cNvSpPr/>
+      </dsp:nvSpPr>
+      <dsp:spPr>
+        <a:xfrm>
+          <a:off x="5458491" y="1997612"/>
+          <a:ext cx="1488110" cy="944950"/>
+        </a:xfrm>
+        <a:prstGeom prst="roundRect">
+          <a:avLst>
+            <a:gd name="adj" fmla="val 10000"/>
+          </a:avLst>
+        </a:prstGeom>
+        <a:solidFill>
+          <a:schemeClr val="accent1">
+            <a:hueOff val="0"/>
+            <a:satOff val="0"/>
+            <a:lumOff val="0"/>
+            <a:alphaOff val="0"/>
+          </a:schemeClr>
+        </a:solidFill>
+        <a:ln w="12700" cap="flat" cmpd="sng" algn="ctr">
+          <a:solidFill>
+            <a:schemeClr val="lt1">
+              <a:hueOff val="0"/>
+              <a:satOff val="0"/>
+              <a:lumOff val="0"/>
+              <a:alphaOff val="0"/>
+            </a:schemeClr>
+          </a:solidFill>
+          <a:prstDash val="solid"/>
+          <a:miter lim="800000"/>
+        </a:ln>
+        <a:effectLst/>
+      </dsp:spPr>
+      <dsp:style>
+        <a:lnRef idx="2">
+          <a:scrgbClr r="0" g="0" b="0"/>
+        </a:lnRef>
+        <a:fillRef idx="1">
+          <a:scrgbClr r="0" g="0" b="0"/>
+        </a:fillRef>
+        <a:effectRef idx="0">
+          <a:scrgbClr r="0" g="0" b="0"/>
+        </a:effectRef>
+        <a:fontRef idx="minor">
+          <a:schemeClr val="lt1"/>
+        </a:fontRef>
+      </dsp:style>
+    </dsp:sp>
+    <dsp:sp modelId="{5B3CF940-6223-4896-9D29-481C3D5EAAD0}">
+      <dsp:nvSpPr>
+        <dsp:cNvPr id="0" name=""/>
+        <dsp:cNvSpPr/>
+      </dsp:nvSpPr>
+      <dsp:spPr>
+        <a:xfrm>
+          <a:off x="5623836" y="2154691"/>
+          <a:ext cx="1488110" cy="944950"/>
+        </a:xfrm>
+        <a:prstGeom prst="roundRect">
+          <a:avLst>
+            <a:gd name="adj" fmla="val 10000"/>
+          </a:avLst>
+        </a:prstGeom>
+        <a:solidFill>
+          <a:schemeClr val="lt1">
+            <a:alpha val="90000"/>
+            <a:hueOff val="0"/>
+            <a:satOff val="0"/>
+            <a:lumOff val="0"/>
+            <a:alphaOff val="0"/>
+          </a:schemeClr>
+        </a:solidFill>
+        <a:ln w="12700" cap="flat" cmpd="sng" algn="ctr">
+          <a:solidFill>
+            <a:schemeClr val="accent1">
+              <a:hueOff val="0"/>
+              <a:satOff val="0"/>
+              <a:lumOff val="0"/>
+              <a:alphaOff val="0"/>
+            </a:schemeClr>
+          </a:solidFill>
+          <a:prstDash val="solid"/>
+          <a:miter lim="800000"/>
+        </a:ln>
+        <a:effectLst/>
+      </dsp:spPr>
+      <dsp:style>
+        <a:lnRef idx="2">
+          <a:scrgbClr r="0" g="0" b="0"/>
+        </a:lnRef>
+        <a:fillRef idx="1">
+          <a:scrgbClr r="0" g="0" b="0"/>
+        </a:fillRef>
+        <a:effectRef idx="0">
+          <a:scrgbClr r="0" g="0" b="0"/>
+        </a:effectRef>
+        <a:fontRef idx="minor"/>
+      </dsp:style>
+      <dsp:txBody>
+        <a:bodyPr spcFirstLastPara="0" vert="horz" wrap="square" lIns="83820" tIns="83820" rIns="83820" bIns="83820" numCol="1" spcCol="1270" anchor="ctr" anchorCtr="0">
+          <a:noAutofit/>
+        </a:bodyPr>
+        <a:lstStyle/>
+        <a:p>
+          <a:pPr marL="0" lvl="0" indent="0" algn="ctr" defTabSz="977900">
+            <a:lnSpc>
+              <a:spcPct val="90000"/>
+            </a:lnSpc>
+            <a:spcBef>
+              <a:spcPct val="0"/>
+            </a:spcBef>
+            <a:spcAft>
+              <a:spcPct val="35000"/>
+            </a:spcAft>
+            <a:buNone/>
+          </a:pPr>
+          <a:r>
+            <a:rPr lang="en-US" sz="2200" kern="1200" dirty="0"/>
+            <a:t>EG</a:t>
+          </a:r>
+          <a:endParaRPr lang="en-IN" sz="2200" kern="1200" dirty="0"/>
+        </a:p>
+      </dsp:txBody>
+      <dsp:txXfrm>
+        <a:off x="5651513" y="2182368"/>
+        <a:ext cx="1432756" cy="889596"/>
+      </dsp:txXfrm>
+    </dsp:sp>
+  </dsp:spTree>
+</dsp:drawing>
+</file>
+
+<file path=ppt/diagrams/layout1.xml><?xml version="1.0" encoding="utf-8"?>
+<dgm:layoutDef xmlns:dgm="http://schemas.openxmlformats.org/drawingml/2006/diagram" xmlns:a="http://schemas.openxmlformats.org/drawingml/2006/main" uniqueId="urn:microsoft.com/office/officeart/2005/8/layout/hierarchy1">
+  <dgm:title val=""/>
+  <dgm:desc val=""/>
+  <dgm:catLst>
+    <dgm:cat type="hierarchy" pri="2000"/>
+  </dgm:catLst>
+  <dgm:sampData>
+    <dgm:dataModel>
+      <dgm:ptLst>
+        <dgm:pt modelId="0" type="doc"/>
+        <dgm:pt modelId="1">
+          <dgm:prSet phldr="1"/>
+        </dgm:pt>
+        <dgm:pt modelId="2">
+          <dgm:prSet phldr="1"/>
+        </dgm:pt>
+        <dgm:pt modelId="21">
+          <dgm:prSet phldr="1"/>
+        </dgm:pt>
+        <dgm:pt modelId="22">
+          <dgm:prSet phldr="1"/>
+        </dgm:pt>
+        <dgm:pt modelId="3">
+          <dgm:prSet phldr="1"/>
+        </dgm:pt>
+        <dgm:pt modelId="31">
+          <dgm:prSet phldr="1"/>
+        </dgm:pt>
+      </dgm:ptLst>
+      <dgm:cxnLst>
+        <dgm:cxn modelId="4" srcId="0" destId="1" srcOrd="0" destOrd="0"/>
+        <dgm:cxn modelId="5" srcId="1" destId="2" srcOrd="0" destOrd="0"/>
+        <dgm:cxn modelId="6" srcId="1" destId="3" srcOrd="1" destOrd="0"/>
+        <dgm:cxn modelId="23" srcId="2" destId="21" srcOrd="0" destOrd="0"/>
+        <dgm:cxn modelId="24" srcId="2" destId="22" srcOrd="1" destOrd="0"/>
+        <dgm:cxn modelId="33" srcId="3" destId="31" srcOrd="0" destOrd="0"/>
+      </dgm:cxnLst>
+      <dgm:bg/>
+      <dgm:whole/>
+    </dgm:dataModel>
+  </dgm:sampData>
+  <dgm:styleData>
+    <dgm:dataModel>
+      <dgm:ptLst>
+        <dgm:pt modelId="0" type="doc"/>
+        <dgm:pt modelId="1"/>
+        <dgm:pt modelId="11"/>
+        <dgm:pt modelId="12"/>
+      </dgm:ptLst>
+      <dgm:cxnLst>
+        <dgm:cxn modelId="2" srcId="0" destId="1" srcOrd="0" destOrd="0"/>
+        <dgm:cxn modelId="13" srcId="1" destId="11" srcOrd="0" destOrd="0"/>
+        <dgm:cxn modelId="14" srcId="1" destId="12" srcOrd="1" destOrd="0"/>
+      </dgm:cxnLst>
+      <dgm:bg/>
+      <dgm:whole/>
+    </dgm:dataModel>
+  </dgm:styleData>
+  <dgm:clrData>
+    <dgm:dataModel>
+      <dgm:ptLst>
+        <dgm:pt modelId="0" type="doc"/>
+        <dgm:pt modelId="1"/>
+        <dgm:pt modelId="2"/>
+        <dgm:pt modelId="21"/>
+        <dgm:pt modelId="211"/>
+        <dgm:pt modelId="3"/>
+        <dgm:pt modelId="31"/>
+        <dgm:pt modelId="311"/>
+      </dgm:ptLst>
+      <dgm:cxnLst>
+        <dgm:cxn modelId="4" srcId="0" destId="1" srcOrd="0" destOrd="0"/>
+        <dgm:cxn modelId="5" srcId="1" destId="2" srcOrd="0" destOrd="0"/>
+        <dgm:cxn modelId="6" srcId="1" destId="3" srcOrd="1" destOrd="0"/>
+        <dgm:cxn modelId="23" srcId="2" destId="21" srcOrd="0" destOrd="0"/>
+        <dgm:cxn modelId="24" srcId="21" destId="211" srcOrd="0" destOrd="0"/>
+        <dgm:cxn modelId="33" srcId="3" destId="31" srcOrd="0" destOrd="0"/>
+        <dgm:cxn modelId="34" srcId="31" destId="311" srcOrd="0" destOrd="0"/>
+      </dgm:cxnLst>
+      <dgm:bg/>
+      <dgm:whole/>
+    </dgm:dataModel>
+  </dgm:clrData>
+  <dgm:layoutNode name="hierChild1">
+    <dgm:varLst>
+      <dgm:chPref val="1"/>
+      <dgm:dir/>
+      <dgm:animOne val="branch"/>
+      <dgm:animLvl val="lvl"/>
+      <dgm:resizeHandles/>
+    </dgm:varLst>
+    <dgm:choose name="Name0">
+      <dgm:if name="Name1" func="var" arg="dir" op="equ" val="norm">
+        <dgm:alg type="hierChild">
+          <dgm:param type="linDir" val="fromL"/>
+        </dgm:alg>
+      </dgm:if>
+      <dgm:else name="Name2">
+        <dgm:alg type="hierChild">
+          <dgm:param type="linDir" val="fromR"/>
+        </dgm:alg>
+      </dgm:else>
+    </dgm:choose>
+    <dgm:shape xmlns:r="http://schemas.openxmlformats.org/officeDocument/2006/relationships" r:blip="">
+      <dgm:adjLst/>
+    </dgm:shape>
+    <dgm:presOf/>
+    <dgm:constrLst>
+      <dgm:constr type="primFontSz" for="des" ptType="node" op="equ" val="65"/>
+      <dgm:constr type="w" for="des" forName="composite" refType="w"/>
+      <dgm:constr type="h" for="des" forName="composite" refType="w" refFor="des" refForName="composite" fact="0.667"/>
+      <dgm:constr type="w" for="des" forName="composite2" refType="w" refFor="des" refForName="composite"/>
+      <dgm:constr type="h" for="des" forName="composite2" refType="h" refFor="des" refForName="composite"/>
+      <dgm:constr type="w" for="des" forName="composite3" refType="w" refFor="des" refForName="composite"/>
+      <dgm:constr type="h" for="des" forName="composite3" refType="h" refFor="des" refForName="composite"/>
+      <dgm:constr type="w" for="des" forName="composite4" refType="w" refFor="des" refForName="composite"/>
+      <dgm:constr type="h" for="des" forName="composite4" refType="h" refFor="des" refForName="composite"/>
+      <dgm:constr type="w" for="des" forName="composite5" refType="w" refFor="des" refForName="composite"/>
+      <dgm:constr type="h" for="des" forName="composite5" refType="h" refFor="des" refForName="composite"/>
+      <dgm:constr type="sibSp" refType="w" refFor="des" refForName="composite" fact="0.1"/>
+      <dgm:constr type="sibSp" for="des" forName="hierChild2" refType="sibSp"/>
+      <dgm:constr type="sibSp" for="des" forName="hierChild3" refType="sibSp"/>
+      <dgm:constr type="sibSp" for="des" forName="hierChild4" refType="sibSp"/>
+      <dgm:constr type="sibSp" for="des" forName="hierChild5" refType="sibSp"/>
+      <dgm:constr type="sibSp" for="des" forName="hierChild6" refType="sibSp"/>
+      <dgm:constr type="sp" for="des" forName="hierRoot1" refType="h" refFor="des" refForName="composite" fact="0.25"/>
+      <dgm:constr type="sp" for="des" forName="hierRoot2" refType="sp" refFor="des" refForName="hierRoot1"/>
+      <dgm:constr type="sp" for="des" forName="hierRoot3" refType="sp" refFor="des" refForName="hierRoot1"/>
+      <dgm:constr type="sp" for="des" forName="hierRoot4" refType="sp" refFor="des" refForName="hierRoot1"/>
+      <dgm:constr type="sp" for="des" forName="hierRoot5" refType="sp" refFor="des" refForName="hierRoot1"/>
+    </dgm:constrLst>
+    <dgm:ruleLst/>
+    <dgm:forEach name="Name3" axis="ch">
+      <dgm:forEach name="Name4" axis="self" ptType="node">
+        <dgm:layoutNode name="hierRoot1">
+          <dgm:alg type="hierRoot"/>
+          <dgm:shape xmlns:r="http://schemas.openxmlformats.org/officeDocument/2006/relationships" r:blip="">
+            <dgm:adjLst/>
+          </dgm:shape>
+          <dgm:presOf/>
+          <dgm:constrLst>
+            <dgm:constr type="bendDist" for="des" ptType="parTrans" refType="sp" fact="0.5"/>
+          </dgm:constrLst>
+          <dgm:ruleLst/>
+          <dgm:layoutNode name="composite">
+            <dgm:alg type="composite"/>
+            <dgm:shape xmlns:r="http://schemas.openxmlformats.org/officeDocument/2006/relationships" r:blip="">
+              <dgm:adjLst/>
+            </dgm:shape>
+            <dgm:presOf/>
+            <dgm:constrLst>
+              <dgm:constr type="w" for="ch" forName="background" refType="w" fact="0.9"/>
+              <dgm:constr type="h" for="ch" forName="background" refType="w" refFor="ch" refForName="background" fact="0.635"/>
+              <dgm:constr type="t" for="ch" forName="background"/>
+              <dgm:constr type="l" for="ch" forName="background"/>
+              <dgm:constr type="w" for="ch" forName="text" refType="w" fact="0.9"/>
+              <dgm:constr type="h" for="ch" forName="text" refType="w" refFor="ch" refForName="text" fact="0.635"/>
+              <dgm:constr type="t" for="ch" forName="text" refType="w" fact="0.095"/>
+              <dgm:constr type="l" for="ch" forName="text" refType="w" fact="0.1"/>
+            </dgm:constrLst>
+            <dgm:ruleLst/>
+            <dgm:layoutNode name="background" styleLbl="node0" moveWith="text">
+              <dgm:alg type="sp"/>
+              <dgm:shape xmlns:r="http://schemas.openxmlformats.org/officeDocument/2006/relationships" type="roundRect" r:blip="">
+                <dgm:adjLst>
+                  <dgm:adj idx="1" val="0.1"/>
+                </dgm:adjLst>
+              </dgm:shape>
+              <dgm:presOf/>
+              <dgm:constrLst/>
+              <dgm:ruleLst/>
+            </dgm:layoutNode>
+            <dgm:layoutNode name="text" styleLbl="fgAcc0">
+              <dgm:varLst>
+                <dgm:chPref val="3"/>
+              </dgm:varLst>
+              <dgm:alg type="tx"/>
+              <dgm:shape xmlns:r="http://schemas.openxmlformats.org/officeDocument/2006/relationships" type="roundRect" r:blip="">
+                <dgm:adjLst>
+                  <dgm:adj idx="1" val="0.1"/>
+                </dgm:adjLst>
+              </dgm:shape>
+              <dgm:presOf axis="self"/>
+              <dgm:constrLst>
+                <dgm:constr type="tMarg" refType="primFontSz" fact="0.3"/>
+                <dgm:constr type="bMarg" refType="primFontSz" fact="0.3"/>
+                <dgm:constr type="lMarg" refType="primFontSz" fact="0.3"/>
+                <dgm:constr type="rMarg" refType="primFontSz" fact="0.3"/>
+              </dgm:constrLst>
+              <dgm:ruleLst>
+                <dgm:rule type="primFontSz" val="5" fact="NaN" max="NaN"/>
+              </dgm:ruleLst>
+            </dgm:layoutNode>
+          </dgm:layoutNode>
+          <dgm:layoutNode name="hierChild2">
+            <dgm:choose name="Name5">
+              <dgm:if name="Name6" func="var" arg="dir" op="equ" val="norm">
+                <dgm:alg type="hierChild">
+                  <dgm:param type="linDir" val="fromL"/>
+                </dgm:alg>
+              </dgm:if>
+              <dgm:else name="Name7">
+                <dgm:alg type="hierChild">
+                  <dgm:param type="linDir" val="fromR"/>
+                </dgm:alg>
+              </dgm:else>
+            </dgm:choose>
+            <dgm:shape xmlns:r="http://schemas.openxmlformats.org/officeDocument/2006/relationships" r:blip="">
+              <dgm:adjLst/>
+            </dgm:shape>
+            <dgm:presOf/>
+            <dgm:constrLst/>
+            <dgm:ruleLst/>
+            <dgm:forEach name="Name8" axis="ch">
+              <dgm:forEach name="Name9" axis="self" ptType="parTrans" cnt="1">
+                <dgm:layoutNode name="Name10">
+                  <dgm:alg type="conn">
+                    <dgm:param type="dim" val="1D"/>
+                    <dgm:param type="endSty" val="noArr"/>
+                    <dgm:param type="connRout" val="bend"/>
+                    <dgm:param type="bendPt" val="end"/>
+                    <dgm:param type="begPts" val="bCtr"/>
+                    <dgm:param type="endPts" val="tCtr"/>
+                    <dgm:param type="srcNode" val="background"/>
+                    <dgm:param type="dstNode" val="background2"/>
+                  </dgm:alg>
+                  <dgm:shape xmlns:r="http://schemas.openxmlformats.org/officeDocument/2006/relationships" type="conn" r:blip="" zOrderOff="-999">
+                    <dgm:adjLst/>
+                  </dgm:shape>
+                  <dgm:presOf axis="self"/>
+                  <dgm:constrLst>
+                    <dgm:constr type="begPad"/>
+                    <dgm:constr type="endPad"/>
+                  </dgm:constrLst>
+                  <dgm:ruleLst/>
+                </dgm:layoutNode>
+              </dgm:forEach>
+              <dgm:forEach name="Name11" axis="self" ptType="node">
+                <dgm:layoutNode name="hierRoot2">
+                  <dgm:alg type="hierRoot"/>
+                  <dgm:shape xmlns:r="http://schemas.openxmlformats.org/officeDocument/2006/relationships" r:blip="">
+                    <dgm:adjLst/>
+                  </dgm:shape>
+                  <dgm:presOf/>
+                  <dgm:constrLst>
+                    <dgm:constr type="bendDist" for="des" ptType="parTrans" refType="sp" fact="0.5"/>
+                  </dgm:constrLst>
+                  <dgm:ruleLst/>
+                  <dgm:layoutNode name="composite2">
+                    <dgm:alg type="composite"/>
+                    <dgm:shape xmlns:r="http://schemas.openxmlformats.org/officeDocument/2006/relationships" r:blip="">
+                      <dgm:adjLst/>
+                    </dgm:shape>
+                    <dgm:presOf/>
+                    <dgm:constrLst>
+                      <dgm:constr type="w" for="ch" forName="background2" refType="w" fact="0.9"/>
+                      <dgm:constr type="h" for="ch" forName="background2" refType="w" refFor="ch" refForName="background2" fact="0.635"/>
+                      <dgm:constr type="t" for="ch" forName="background2"/>
+                      <dgm:constr type="l" for="ch" forName="background2"/>
+                      <dgm:constr type="w" for="ch" forName="text2" refType="w" fact="0.9"/>
+                      <dgm:constr type="h" for="ch" forName="text2" refType="w" refFor="ch" refForName="text2" fact="0.635"/>
+                      <dgm:constr type="t" for="ch" forName="text2" refType="w" fact="0.095"/>
+                      <dgm:constr type="l" for="ch" forName="text2" refType="w" fact="0.1"/>
+                    </dgm:constrLst>
+                    <dgm:ruleLst/>
+                    <dgm:layoutNode name="background2" moveWith="text2">
+                      <dgm:alg type="sp"/>
+                      <dgm:shape xmlns:r="http://schemas.openxmlformats.org/officeDocument/2006/relationships" type="roundRect" r:blip="">
+                        <dgm:adjLst>
+                          <dgm:adj idx="1" val="0.1"/>
+                        </dgm:adjLst>
+                      </dgm:shape>
+                      <dgm:presOf/>
+                      <dgm:constrLst/>
+                      <dgm:ruleLst/>
+                    </dgm:layoutNode>
+                    <dgm:layoutNode name="text2" styleLbl="fgAcc2">
+                      <dgm:varLst>
+                        <dgm:chPref val="3"/>
+                      </dgm:varLst>
+                      <dgm:alg type="tx"/>
+                      <dgm:shape xmlns:r="http://schemas.openxmlformats.org/officeDocument/2006/relationships" type="roundRect" r:blip="">
+                        <dgm:adjLst>
+                          <dgm:adj idx="1" val="0.1"/>
+                        </dgm:adjLst>
+                      </dgm:shape>
+                      <dgm:presOf axis="self"/>
+                      <dgm:constrLst>
+                        <dgm:constr type="tMarg" refType="primFontSz" fact="0.3"/>
+                        <dgm:constr type="bMarg" refType="primFontSz" fact="0.3"/>
+                        <dgm:constr type="lMarg" refType="primFontSz" fact="0.3"/>
+                        <dgm:constr type="rMarg" refType="primFontSz" fact="0.3"/>
+                      </dgm:constrLst>
+                      <dgm:ruleLst>
+                        <dgm:rule type="primFontSz" val="5" fact="NaN" max="NaN"/>
+                      </dgm:ruleLst>
+                    </dgm:layoutNode>
+                  </dgm:layoutNode>
+                  <dgm:layoutNode name="hierChild3">
+                    <dgm:choose name="Name12">
+                      <dgm:if name="Name13" func="var" arg="dir" op="equ" val="norm">
+                        <dgm:alg type="hierChild">
+                          <dgm:param type="linDir" val="fromL"/>
+                        </dgm:alg>
+                      </dgm:if>
+                      <dgm:else name="Name14">
+                        <dgm:alg type="hierChild">
+                          <dgm:param type="linDir" val="fromR"/>
+                        </dgm:alg>
+                      </dgm:else>
+                    </dgm:choose>
+                    <dgm:shape xmlns:r="http://schemas.openxmlformats.org/officeDocument/2006/relationships" r:blip="">
+                      <dgm:adjLst/>
+                    </dgm:shape>
+                    <dgm:presOf/>
+                    <dgm:constrLst/>
+                    <dgm:ruleLst/>
+                    <dgm:forEach name="Name15" axis="ch">
+                      <dgm:forEach name="Name16" axis="self" ptType="parTrans" cnt="1">
+                        <dgm:layoutNode name="Name17">
+                          <dgm:alg type="conn">
+                            <dgm:param type="dim" val="1D"/>
+                            <dgm:param type="endSty" val="noArr"/>
+                            <dgm:param type="connRout" val="bend"/>
+                            <dgm:param type="bendPt" val="end"/>
+                            <dgm:param type="begPts" val="bCtr"/>
+                            <dgm:param type="endPts" val="tCtr"/>
+                            <dgm:param type="srcNode" val="background2"/>
+                            <dgm:param type="dstNode" val="background3"/>
+                          </dgm:alg>
+                          <dgm:shape xmlns:r="http://schemas.openxmlformats.org/officeDocument/2006/relationships" type="conn" r:blip="" zOrderOff="-999">
+                            <dgm:adjLst/>
+                          </dgm:shape>
+                          <dgm:presOf axis="self"/>
+                          <dgm:constrLst>
+                            <dgm:constr type="begPad"/>
+                            <dgm:constr type="endPad"/>
+                          </dgm:constrLst>
+                          <dgm:ruleLst/>
+                        </dgm:layoutNode>
+                      </dgm:forEach>
+                      <dgm:forEach name="Name18" axis="self" ptType="node">
+                        <dgm:layoutNode name="hierRoot3">
+                          <dgm:alg type="hierRoot"/>
+                          <dgm:shape xmlns:r="http://schemas.openxmlformats.org/officeDocument/2006/relationships" r:blip="">
+                            <dgm:adjLst/>
+                          </dgm:shape>
+                          <dgm:presOf/>
+                          <dgm:constrLst>
+                            <dgm:constr type="bendDist" for="des" ptType="parTrans" refType="sp" fact="0.5"/>
+                          </dgm:constrLst>
+                          <dgm:ruleLst/>
+                          <dgm:layoutNode name="composite3">
+                            <dgm:alg type="composite"/>
+                            <dgm:shape xmlns:r="http://schemas.openxmlformats.org/officeDocument/2006/relationships" r:blip="">
+                              <dgm:adjLst/>
+                            </dgm:shape>
+                            <dgm:presOf/>
+                            <dgm:constrLst>
+                              <dgm:constr type="w" for="ch" forName="background3" refType="w" fact="0.9"/>
+                              <dgm:constr type="h" for="ch" forName="background3" refType="w" refFor="ch" refForName="background3" fact="0.635"/>
+                              <dgm:constr type="t" for="ch" forName="background3"/>
+                              <dgm:constr type="l" for="ch" forName="background3"/>
+                              <dgm:constr type="w" for="ch" forName="text3" refType="w" fact="0.9"/>
+                              <dgm:constr type="h" for="ch" forName="text3" refType="w" refFor="ch" refForName="text3" fact="0.635"/>
+                              <dgm:constr type="t" for="ch" forName="text3" refType="w" fact="0.095"/>
+                              <dgm:constr type="l" for="ch" forName="text3" refType="w" fact="0.1"/>
+                            </dgm:constrLst>
+                            <dgm:ruleLst/>
+                            <dgm:layoutNode name="background3" moveWith="text3">
+                              <dgm:alg type="sp"/>
+                              <dgm:shape xmlns:r="http://schemas.openxmlformats.org/officeDocument/2006/relationships" type="roundRect" r:blip="">
+                                <dgm:adjLst>
+                                  <dgm:adj idx="1" val="0.1"/>
+                                </dgm:adjLst>
+                              </dgm:shape>
+                              <dgm:presOf/>
+                              <dgm:constrLst/>
+                              <dgm:ruleLst/>
+                            </dgm:layoutNode>
+                            <dgm:layoutNode name="text3" styleLbl="fgAcc3">
+                              <dgm:varLst>
+                                <dgm:chPref val="3"/>
+                              </dgm:varLst>
+                              <dgm:alg type="tx"/>
+                              <dgm:shape xmlns:r="http://schemas.openxmlformats.org/officeDocument/2006/relationships" type="roundRect" r:blip="">
+                                <dgm:adjLst>
+                                  <dgm:adj idx="1" val="0.1"/>
+                                </dgm:adjLst>
+                              </dgm:shape>
+                              <dgm:presOf axis="self"/>
+                              <dgm:constrLst>
+                                <dgm:constr type="tMarg" refType="primFontSz" fact="0.3"/>
+                                <dgm:constr type="bMarg" refType="primFontSz" fact="0.3"/>
+                                <dgm:constr type="lMarg" refType="primFontSz" fact="0.3"/>
+                                <dgm:constr type="rMarg" refType="primFontSz" fact="0.3"/>
+                              </dgm:constrLst>
+                              <dgm:ruleLst>
+                                <dgm:rule type="primFontSz" val="5" fact="NaN" max="NaN"/>
+                              </dgm:ruleLst>
+                            </dgm:layoutNode>
+                          </dgm:layoutNode>
+                          <dgm:layoutNode name="hierChild4">
+                            <dgm:choose name="Name19">
+                              <dgm:if name="Name20" func="var" arg="dir" op="equ" val="norm">
+                                <dgm:alg type="hierChild">
+                                  <dgm:param type="linDir" val="fromL"/>
+                                </dgm:alg>
+                              </dgm:if>
+                              <dgm:else name="Name21">
+                                <dgm:alg type="hierChild">
+                                  <dgm:param type="linDir" val="fromR"/>
+                                </dgm:alg>
+                              </dgm:else>
+                            </dgm:choose>
+                            <dgm:shape xmlns:r="http://schemas.openxmlformats.org/officeDocument/2006/relationships" r:blip="">
+                              <dgm:adjLst/>
+                            </dgm:shape>
+                            <dgm:presOf/>
+                            <dgm:constrLst/>
+                            <dgm:ruleLst/>
+                            <dgm:forEach name="repeat" axis="ch">
+                              <dgm:forEach name="Name22" axis="self" ptType="parTrans" cnt="1">
+                                <dgm:layoutNode name="Name23">
+                                  <dgm:choose name="Name24">
+                                    <dgm:if name="Name25" axis="self" func="depth" op="lte" val="4">
+                                      <dgm:alg type="conn">
+                                        <dgm:param type="dim" val="1D"/>
+                                        <dgm:param type="endSty" val="noArr"/>
+                                        <dgm:param type="connRout" val="bend"/>
+                                        <dgm:param type="bendPt" val="end"/>
+                                        <dgm:param type="begPts" val="bCtr"/>
+                                        <dgm:param type="endPts" val="tCtr"/>
+                                        <dgm:param type="srcNode" val="background3"/>
+                                        <dgm:param type="dstNode" val="background4"/>
+                                      </dgm:alg>
+                                    </dgm:if>
+                                    <dgm:else name="Name26">
+                                      <dgm:alg type="conn">
+                                        <dgm:param type="dim" val="1D"/>
+                                        <dgm:param type="endSty" val="noArr"/>
+                                        <dgm:param type="connRout" val="bend"/>
+                                        <dgm:param type="bendPt" val="end"/>
+                                        <dgm:param type="begPts" val="bCtr"/>
+                                        <dgm:param type="endPts" val="tCtr"/>
+                                        <dgm:param type="srcNode" val="background4"/>
+                                        <dgm:param type="dstNode" val="background4"/>
+                                      </dgm:alg>
+                                    </dgm:else>
+                                  </dgm:choose>
+                                  <dgm:shape xmlns:r="http://schemas.openxmlformats.org/officeDocument/2006/relationships" type="conn" r:blip="" zOrderOff="-999">
+                                    <dgm:adjLst/>
+                                  </dgm:shape>
+                                  <dgm:presOf axis="self"/>
+                                  <dgm:constrLst>
+                                    <dgm:constr type="begPad"/>
+                                    <dgm:constr type="endPad"/>
+                                  </dgm:constrLst>
+                                  <dgm:ruleLst/>
+                                </dgm:layoutNode>
+                              </dgm:forEach>
+                              <dgm:forEach name="Name27" axis="self" ptType="node">
+                                <dgm:layoutNode name="hierRoot4">
+                                  <dgm:alg type="hierRoot"/>
+                                  <dgm:shape xmlns:r="http://schemas.openxmlformats.org/officeDocument/2006/relationships" r:blip="">
+                                    <dgm:adjLst/>
+                                  </dgm:shape>
+                                  <dgm:presOf/>
+                                  <dgm:constrLst>
+                                    <dgm:constr type="bendDist" for="des" ptType="parTrans" refType="sp" fact="0.5"/>
+                                  </dgm:constrLst>
+                                  <dgm:ruleLst/>
+                                  <dgm:layoutNode name="composite4">
+                                    <dgm:alg type="composite"/>
+                                    <dgm:shape xmlns:r="http://schemas.openxmlformats.org/officeDocument/2006/relationships" r:blip="">
+                                      <dgm:adjLst/>
+                                    </dgm:shape>
+                                    <dgm:presOf/>
+                                    <dgm:constrLst>
+                                      <dgm:constr type="w" for="ch" forName="background4" refType="w" fact="0.9"/>
+                                      <dgm:constr type="h" for="ch" forName="background4" refType="w" refFor="ch" refForName="background4" fact="0.635"/>
+                                      <dgm:constr type="t" for="ch" forName="background4"/>
+                                      <dgm:constr type="l" for="ch" forName="background4"/>
+                                      <dgm:constr type="w" for="ch" forName="text4" refType="w" fact="0.9"/>
+                                      <dgm:constr type="h" for="ch" forName="text4" refType="w" refFor="ch" refForName="text4" fact="0.635"/>
+                                      <dgm:constr type="t" for="ch" forName="text4" refType="w" fact="0.095"/>
+                                      <dgm:constr type="l" for="ch" forName="text4" refType="w" fact="0.1"/>
+                                    </dgm:constrLst>
+                                    <dgm:ruleLst/>
+                                    <dgm:layoutNode name="background4" moveWith="text4">
+                                      <dgm:alg type="sp"/>
+                                      <dgm:shape xmlns:r="http://schemas.openxmlformats.org/officeDocument/2006/relationships" type="roundRect" r:blip="">
+                                        <dgm:adjLst>
+                                          <dgm:adj idx="1" val="0.1"/>
+                                        </dgm:adjLst>
+                                      </dgm:shape>
+                                      <dgm:presOf/>
+                                      <dgm:constrLst/>
+                                      <dgm:ruleLst/>
+                                    </dgm:layoutNode>
+                                    <dgm:layoutNode name="text4" styleLbl="fgAcc4">
+                                      <dgm:varLst>
+                                        <dgm:chPref val="3"/>
+                                      </dgm:varLst>
+                                      <dgm:alg type="tx"/>
+                                      <dgm:shape xmlns:r="http://schemas.openxmlformats.org/officeDocument/2006/relationships" type="roundRect" r:blip="">
+                                        <dgm:adjLst>
+                                          <dgm:adj idx="1" val="0.1"/>
+                                        </dgm:adjLst>
+                                      </dgm:shape>
+                                      <dgm:presOf axis="self"/>
+                                      <dgm:constrLst>
+                                        <dgm:constr type="tMarg" refType="primFontSz" fact="0.3"/>
+                                        <dgm:constr type="bMarg" refType="primFontSz" fact="0.3"/>
+                                        <dgm:constr type="lMarg" refType="primFontSz" fact="0.3"/>
+                                        <dgm:constr type="rMarg" refType="primFontSz" fact="0.3"/>
+                                      </dgm:constrLst>
+                                      <dgm:ruleLst>
+                                        <dgm:rule type="primFontSz" val="5" fact="NaN" max="NaN"/>
+                                      </dgm:ruleLst>
+                                    </dgm:layoutNode>
+                                  </dgm:layoutNode>
+                                  <dgm:layoutNode name="hierChild5">
+                                    <dgm:choose name="Name28">
+                                      <dgm:if name="Name29" func="var" arg="dir" op="equ" val="norm">
+                                        <dgm:alg type="hierChild">
+                                          <dgm:param type="linDir" val="fromL"/>
+                                        </dgm:alg>
+                                      </dgm:if>
+                                      <dgm:else name="Name30">
+                                        <dgm:alg type="hierChild">
+                                          <dgm:param type="linDir" val="fromR"/>
+                                        </dgm:alg>
+                                      </dgm:else>
+                                    </dgm:choose>
+                                    <dgm:shape xmlns:r="http://schemas.openxmlformats.org/officeDocument/2006/relationships" r:blip="">
+                                      <dgm:adjLst/>
+                                    </dgm:shape>
+                                    <dgm:presOf/>
+                                    <dgm:constrLst/>
+                                    <dgm:ruleLst/>
+                                    <dgm:forEach name="Name31" ref="repeat"/>
+                                  </dgm:layoutNode>
+                                </dgm:layoutNode>
+                              </dgm:forEach>
+                            </dgm:forEach>
+                          </dgm:layoutNode>
+                        </dgm:layoutNode>
+                      </dgm:forEach>
+                    </dgm:forEach>
+                  </dgm:layoutNode>
+                </dgm:layoutNode>
+              </dgm:forEach>
+            </dgm:forEach>
+          </dgm:layoutNode>
+        </dgm:layoutNode>
+      </dgm:forEach>
+    </dgm:forEach>
+  </dgm:layoutNode>
+</dgm:layoutDef>
+</file>
+
+<file path=ppt/diagrams/quickStyle1.xml><?xml version="1.0" encoding="utf-8"?>
+<dgm:styleDef xmlns:dgm="http://schemas.openxmlformats.org/drawingml/2006/diagram" xmlns:a="http://schemas.openxmlformats.org/drawingml/2006/main" uniqueId="urn:microsoft.com/office/officeart/2005/8/quickstyle/simple1">
+  <dgm:title val=""/>
+  <dgm:desc val=""/>
+  <dgm:catLst>
+    <dgm:cat type="simple" pri="10100"/>
+  </dgm:catLst>
+  <dgm:scene3d>
+    <a:camera prst="orthographicFront"/>
+    <a:lightRig rig="threePt" dir="t"/>
+  </dgm:scene3d>
+  <dgm:styleLbl name="node0">
+    <dgm:scene3d>
+      <a:camera prst="orthographicFront"/>
+      <a:lightRig rig="threePt" dir="t"/>
+    </dgm:scene3d>
+    <dgm:sp3d/>
+    <dgm:txPr/>
+    <dgm:style>
+      <a:lnRef idx="2">
+        <a:scrgbClr r="0" g="0" b="0"/>
+      </a:lnRef>
+      <a:fillRef idx="1">
+        <a:scrgbClr r="0" g="0" b="0"/>
+      </a:fillRef>
+      <a:effectRef idx="0">
+        <a:scrgbClr r="0" g="0" b="0"/>
+      </a:effectRef>
+      <a:fontRef idx="minor">
+        <a:schemeClr val="lt1"/>
+      </a:fontRef>
+    </dgm:style>
+  </dgm:styleLbl>
+  <dgm:styleLbl name="node0NoLn">
+    <dgm:scene3d>
+      <a:camera prst="orthographicFront"/>
+      <a:lightRig rig="threePt" dir="t"/>
+    </dgm:scene3d>
+    <dgm:sp3d/>
+    <dgm:txPr/>
+    <dgm:style>
+      <a:lnRef idx="1">
+        <a:scrgbClr r="0" g="0" b="0"/>
+      </a:lnRef>
+      <a:fillRef idx="1">
+        <a:scrgbClr r="0" g="0" b="0"/>
+      </a:fillRef>
+      <a:effectRef idx="0">
+        <a:scrgbClr r="0" g="0" b="0"/>
+      </a:effectRef>
+      <a:fontRef idx="minor">
+        <a:schemeClr val="lt1"/>
+      </a:fontRef>
+    </dgm:style>
+  </dgm:styleLbl>
+  <dgm:styleLbl name="lnNode1">
+    <dgm:scene3d>
+      <a:camera prst="orthographicFront"/>
+      <a:lightRig rig="threePt" dir="t"/>
+    </dgm:scene3d>
+    <dgm:sp3d/>
+    <dgm:txPr/>
+    <dgm:style>
+      <a:lnRef idx="2">
+        <a:scrgbClr r="0" g="0" b="0"/>
+      </a:lnRef>
+      <a:fillRef idx="1">
+        <a:scrgbClr r="0" g="0" b="0"/>
+      </a:fillRef>
+      <a:effectRef idx="0">
+        <a:scrgbClr r="0" g="0" b="0"/>
+      </a:effectRef>
+      <a:fontRef idx="minor">
+        <a:schemeClr val="lt1"/>
+      </a:fontRef>
+    </dgm:style>
+  </dgm:styleLbl>
+  <dgm:styleLbl name="vennNode1">
+    <dgm:scene3d>
+      <a:camera prst="orthographicFront"/>
+      <a:lightRig rig="threePt" dir="t"/>
+    </dgm:scene3d>
+    <dgm:sp3d/>
+    <dgm:txPr/>
+    <dgm:style>
+      <a:lnRef idx="2">
+        <a:scrgbClr r="0" g="0" b="0"/>
+      </a:lnRef>
+      <a:fillRef idx="1">
+        <a:scrgbClr r="0" g="0" b="0"/>
+      </a:fillRef>
+      <a:effectRef idx="0">
+        <a:scrgbClr r="0" g="0" b="0"/>
+      </a:effectRef>
+      <a:fontRef idx="minor">
+        <a:schemeClr val="tx1"/>
+      </a:fontRef>
+    </dgm:style>
+  </dgm:styleLbl>
+  <dgm:styleLbl name="alignNode1">
+    <dgm:scene3d>
+      <a:camera prst="orthographicFront"/>
+      <a:lightRig rig="threePt" dir="t"/>
+    </dgm:scene3d>
+    <dgm:sp3d/>
+    <dgm:txPr/>
+    <dgm:style>
+      <a:lnRef idx="2">
+        <a:scrgbClr r="0" g="0" b="0"/>
+      </a:lnRef>
+      <a:fillRef idx="1">
+        <a:scrgbClr r="0" g="0" b="0"/>
+      </a:fillRef>
+      <a:effectRef idx="0">
+        <a:scrgbClr r="0" g="0" b="0"/>
+      </a:effectRef>
+      <a:fontRef idx="minor">
+        <a:schemeClr val="lt1"/>
+      </a:fontRef>
+    </dgm:style>
+  </dgm:styleLbl>
+  <dgm:styleLbl name="node1">
+    <dgm:scene3d>
+      <a:camera prst="orthographicFront"/>
+      <a:lightRig rig="threePt" dir="t"/>
+    </dgm:scene3d>
+    <dgm:sp3d/>
+    <dgm:txPr/>
+    <dgm:style>
+      <a:lnRef idx="2">
+        <a:scrgbClr r="0" g="0" b="0"/>
+      </a:lnRef>
+      <a:fillRef idx="1">
+        <a:scrgbClr r="0" g="0" b="0"/>
+      </a:fillRef>
+      <a:effectRef idx="0">
+        <a:scrgbClr r="0" g="0" b="0"/>
+      </a:effectRef>
+      <a:fontRef idx="minor">
+        <a:schemeClr val="lt1"/>
+      </a:fontRef>
+    </dgm:style>
+  </dgm:styleLbl>
+  <dgm:styleLbl name="node1NoLn">
+    <dgm:scene3d>
+      <a:camera prst="orthographicFront"/>
+      <a:lightRig rig="threePt" dir="t"/>
+    </dgm:scene3d>
+    <dgm:sp3d/>
+    <dgm:txPr/>
+    <dgm:style>
+      <a:lnRef idx="1">
+        <a:scrgbClr r="0" g="0" b="0"/>
+      </a:lnRef>
+      <a:fillRef idx="1">
+        <a:scrgbClr r="0" g="0" b="0"/>
+      </a:fillRef>
+      <a:effectRef idx="0">
+        <a:scrgbClr r="0" g="0" b="0"/>
+      </a:effectRef>
+      <a:fontRef idx="minor">
+        <a:schemeClr val="lt1"/>
+      </a:fontRef>
+    </dgm:style>
+  </dgm:styleLbl>
+  <dgm:styleLbl name="ltNode1NoLn">
+    <dgm:scene3d>
+      <a:camera prst="orthographicFront"/>
+      <a:lightRig rig="threePt" dir="t"/>
+    </dgm:scene3d>
+    <dgm:sp3d/>
+    <dgm:txPr/>
+    <dgm:style>
+      <a:lnRef idx="1">
+        <a:scrgbClr r="0" g="0" b="0"/>
+      </a:lnRef>
+      <a:fillRef idx="1">
+        <a:scrgbClr r="0" g="0" b="0"/>
+      </a:fillRef>
+      <a:effectRef idx="0">
+        <a:scrgbClr r="0" g="0" b="0"/>
+      </a:effectRef>
+      <a:fontRef idx="minor">
+        <a:schemeClr val="lt1"/>
+      </a:fontRef>
+    </dgm:style>
+  </dgm:styleLbl>
+  <dgm:styleLbl name="node2">
+    <dgm:scene3d>
+      <a:camera prst="orthographicFront"/>
+      <a:lightRig rig="threePt" dir="t"/>
+    </dgm:scene3d>
+    <dgm:sp3d/>
+    <dgm:txPr/>
+    <dgm:style>
+      <a:lnRef idx="2">
+        <a:scrgbClr r="0" g="0" b="0"/>
+      </a:lnRef>
+      <a:fillRef idx="1">
+        <a:scrgbClr r="0" g="0" b="0"/>
+      </a:fillRef>
+      <a:effectRef idx="0">
+        <a:scrgbClr r="0" g="0" b="0"/>
+      </a:effectRef>
+      <a:fontRef idx="minor">
+        <a:schemeClr val="lt1"/>
+      </a:fontRef>
+    </dgm:style>
+  </dgm:styleLbl>
+  <dgm:styleLbl name="node2NoLn">
+    <dgm:scene3d>
+      <a:camera prst="orthographicFront"/>
+      <a:lightRig rig="threePt" dir="t"/>
+    </dgm:scene3d>
+    <dgm:sp3d/>
+    <dgm:txPr/>
+    <dgm:style>
+      <a:lnRef idx="1">
+        <a:scrgbClr r="0" g="0" b="0"/>
+      </a:lnRef>
+      <a:fillRef idx="1">
+        <a:scrgbClr r="0" g="0" b="0"/>
+      </a:fillRef>
+      <a:effectRef idx="0">
+        <a:scrgbClr r="0" g="0" b="0"/>
+      </a:effectRef>
+      <a:fontRef idx="minor">
+        <a:schemeClr val="lt1"/>
+      </a:fontRef>
+    </dgm:style>
+  </dgm:styleLbl>
+  <dgm:styleLbl name="node3">
+    <dgm:scene3d>
+      <a:camera prst="orthographicFront"/>
+      <a:lightRig rig="threePt" dir="t"/>
+    </dgm:scene3d>
+    <dgm:sp3d/>
+    <dgm:txPr/>
+    <dgm:style>
+      <a:lnRef idx="2">
+        <a:scrgbClr r="0" g="0" b="0"/>
+      </a:lnRef>
+      <a:fillRef idx="1">
+        <a:scrgbClr r="0" g="0" b="0"/>
+      </a:fillRef>
+      <a:effectRef idx="0">
+        <a:scrgbClr r="0" g="0" b="0"/>
+      </a:effectRef>
+      <a:fontRef idx="minor">
+        <a:schemeClr val="lt1"/>
+      </a:fontRef>
+    </dgm:style>
+  </dgm:styleLbl>
+  <dgm:styleLbl name="node3NoLn">
+    <dgm:scene3d>
+      <a:camera prst="orthographicFront"/>
+      <a:lightRig rig="threePt" dir="t"/>
+    </dgm:scene3d>
+    <dgm:sp3d/>
+    <dgm:txPr/>
+    <dgm:style>
+      <a:lnRef idx="1">
+        <a:scrgbClr r="0" g="0" b="0"/>
+      </a:lnRef>
+      <a:fillRef idx="1">
+        <a:scrgbClr r="0" g="0" b="0"/>
+      </a:fillRef>
+      <a:effectRef idx="0">
+        <a:scrgbClr r="0" g="0" b="0"/>
+      </a:effectRef>
+      <a:fontRef idx="minor">
+        <a:schemeClr val="lt1"/>
+      </a:fontRef>
+    </dgm:style>
+  </dgm:styleLbl>
+  <dgm:styleLbl name="node4">
+    <dgm:scene3d>
+      <a:camera prst="orthographicFront"/>
+      <a:lightRig rig="threePt" dir="t"/>
+    </dgm:scene3d>
+    <dgm:sp3d/>
+    <dgm:txPr/>
+    <dgm:style>
+      <a:lnRef idx="2">
+        <a:scrgbClr r="0" g="0" b="0"/>
+      </a:lnRef>
+      <a:fillRef idx="1">
+        <a:scrgbClr r="0" g="0" b="0"/>
+      </a:fillRef>
+      <a:effectRef idx="0">
+        <a:scrgbClr r="0" g="0" b="0"/>
+      </a:effectRef>
+      <a:fontRef idx="minor">
+        <a:schemeClr val="lt1"/>
+      </a:fontRef>
+    </dgm:style>
+  </dgm:styleLbl>
+  <dgm:styleLbl name="node4NoLn">
+    <dgm:scene3d>
+      <a:camera prst="orthographicFront"/>
+      <a:lightRig rig="threePt" dir="t"/>
+    </dgm:scene3d>
+    <dgm:sp3d/>
+    <dgm:txPr/>
+    <dgm:style>
+      <a:lnRef idx="1">
+        <a:scrgbClr r="0" g="0" b="0"/>
+      </a:lnRef>
+      <a:fillRef idx="1">
+        <a:scrgbClr r="0" g="0" b="0"/>
+      </a:fillRef>
+      <a:effectRef idx="0">
+        <a:scrgbClr r="0" g="0" b="0"/>
+      </a:effectRef>
+      <a:fontRef idx="minor">
+        <a:schemeClr val="lt1"/>
+      </a:fontRef>
+    </dgm:style>
+  </dgm:styleLbl>
+  <dgm:styleLbl name="fgImgPlace1">
+    <dgm:scene3d>
+      <a:camera prst="orthographicFront"/>
+      <a:lightRig rig="threePt" dir="t"/>
+    </dgm:scene3d>
+    <dgm:sp3d/>
+    <dgm:txPr/>
+    <dgm:style>
+      <a:lnRef idx="2">
+        <a:scrgbClr r="0" g="0" b="0"/>
+      </a:lnRef>
+      <a:fillRef idx="1">
+        <a:scrgbClr r="0" g="0" b="0"/>
+      </a:fillRef>
+      <a:effectRef idx="0">
+        <a:scrgbClr r="0" g="0" b="0"/>
+      </a:effectRef>
+      <a:fontRef idx="minor"/>
+    </dgm:style>
+  </dgm:styleLbl>
+  <dgm:styleLbl name="alignImgPlace1">
+    <dgm:scene3d>
+      <a:camera prst="orthographicFront"/>
+      <a:lightRig rig="threePt" dir="t"/>
+    </dgm:scene3d>
+    <dgm:sp3d/>
+    <dgm:txPr/>
+    <dgm:style>
+      <a:lnRef idx="2">
+        <a:scrgbClr r="0" g="0" b="0"/>
+      </a:lnRef>
+      <a:fillRef idx="1">
+        <a:scrgbClr r="0" g="0" b="0"/>
+      </a:fillRef>
+      <a:effectRef idx="0">
+        <a:scrgbClr r="0" g="0" b="0"/>
+      </a:effectRef>
+      <a:fontRef idx="minor"/>
+    </dgm:style>
+  </dgm:styleLbl>
+  <dgm:styleLbl name="bgImgPlace1">
+    <dgm:scene3d>
+      <a:camera prst="orthographicFront"/>
+      <a:lightRig rig="threePt" dir="t"/>
+    </dgm:scene3d>
+    <dgm:sp3d/>
+    <dgm:txPr/>
+    <dgm:style>
+      <a:lnRef idx="2">
+        <a:scrgbClr r="0" g="0" b="0"/>
+      </a:lnRef>
+      <a:fillRef idx="1">
+        <a:scrgbClr r="0" g="0" b="0"/>
+      </a:fillRef>
+      <a:effectRef idx="0">
+        <a:scrgbClr r="0" g="0" b="0"/>
+      </a:effectRef>
+      <a:fontRef idx="minor"/>
+    </dgm:style>
+  </dgm:styleLbl>
+  <dgm:styleLbl name="sibTrans2D1">
+    <dgm:scene3d>
+      <a:camera prst="orthographicFront"/>
+      <a:lightRig rig="threePt" dir="t"/>
+    </dgm:scene3d>
+    <dgm:sp3d/>
+    <dgm:txPr/>
+    <dgm:style>
+      <a:lnRef idx="0">
+        <a:scrgbClr r="0" g="0" b="0"/>
+      </a:lnRef>
+      <a:fillRef idx="1">
+        <a:scrgbClr r="0" g="0" b="0"/>
+      </a:fillRef>
+      <a:effectRef idx="0">
+        <a:scrgbClr r="0" g="0" b="0"/>
+      </a:effectRef>
+      <a:fontRef idx="minor">
+        <a:schemeClr val="lt1"/>
+      </a:fontRef>
+    </dgm:style>
+  </dgm:styleLbl>
+  <dgm:styleLbl name="fgSibTrans2D1">
+    <dgm:scene3d>
+      <a:camera prst="orthographicFront"/>
+      <a:lightRig rig="threePt" dir="t"/>
+    </dgm:scene3d>
+    <dgm:sp3d/>
+    <dgm:txPr/>
+    <dgm:style>
+      <a:lnRef idx="0">
+        <a:scrgbClr r="0" g="0" b="0"/>
+      </a:lnRef>
+      <a:fillRef idx="1">
+        <a:scrgbClr r="0" g="0" b="0"/>
+      </a:fillRef>
+      <a:effectRef idx="0">
+        <a:scrgbClr r="0" g="0" b="0"/>
+      </a:effectRef>
+      <a:fontRef idx="minor">
+        <a:schemeClr val="lt1"/>
+      </a:fontRef>
+    </dgm:style>
+  </dgm:styleLbl>
+  <dgm:styleLbl name="bgSibTrans2D1">
+    <dgm:scene3d>
+      <a:camera prst="orthographicFront"/>
+      <a:lightRig rig="threePt" dir="t"/>
+    </dgm:scene3d>
+    <dgm:sp3d/>
+    <dgm:txPr/>
+    <dgm:style>
+      <a:lnRef idx="0">
+        <a:scrgbClr r="0" g="0" b="0"/>
+      </a:lnRef>
+      <a:fillRef idx="1">
+        <a:scrgbClr r="0" g="0" b="0"/>
+      </a:fillRef>
+      <a:effectRef idx="0">
+        <a:scrgbClr r="0" g="0" b="0"/>
+      </a:effectRef>
+      <a:fontRef idx="minor">
+        <a:schemeClr val="lt1"/>
+      </a:fontRef>
+    </dgm:style>
+  </dgm:styleLbl>
+  <dgm:styleLbl name="sibTrans1D1">
+    <dgm:scene3d>
+      <a:camera prst="orthographicFront"/>
+      <a:lightRig rig="threePt" dir="t"/>
+    </dgm:scene3d>
+    <dgm:sp3d/>
+    <dgm:txPr/>
+    <dgm:style>
+      <a:lnRef idx="1">
+        <a:scrgbClr r="0" g="0" b="0"/>
+      </a:lnRef>
+      <a:fillRef idx="0">
+        <a:scrgbClr r="0" g="0" b="0"/>
+      </a:fillRef>
+      <a:effectRef idx="0">
+        <a:scrgbClr r="0" g="0" b="0"/>
+      </a:effectRef>
+      <a:fontRef idx="minor"/>
+    </dgm:style>
+  </dgm:styleLbl>
+  <dgm:styleLbl name="callout">
+    <dgm:scene3d>
+      <a:camera prst="orthographicFront"/>
+      <a:lightRig rig="threePt" dir="t"/>
+    </dgm:scene3d>
+    <dgm:sp3d/>
+    <dgm:txPr/>
+    <dgm:style>
+      <a:lnRef idx="2">
+        <a:scrgbClr r="0" g="0" b="0"/>
+      </a:lnRef>
+      <a:fillRef idx="1">
+        <a:scrgbClr r="0" g="0" b="0"/>
+      </a:fillRef>
+      <a:effectRef idx="0">
+        <a:scrgbClr r="0" g="0" b="0"/>
+      </a:effectRef>
+      <a:fontRef idx="minor"/>
+    </dgm:style>
+  </dgm:styleLbl>
+  <dgm:styleLbl name="asst0">
+    <dgm:scene3d>
+      <a:camera prst="orthographicFront"/>
+      <a:lightRig rig="threePt" dir="t"/>
+    </dgm:scene3d>
+    <dgm:sp3d/>
+    <dgm:txPr/>
+    <dgm:style>
+      <a:lnRef idx="2">
+        <a:scrgbClr r="0" g="0" b="0"/>
+      </a:lnRef>
+      <a:fillRef idx="1">
+        <a:scrgbClr r="0" g="0" b="0"/>
+      </a:fillRef>
+      <a:effectRef idx="0">
+        <a:scrgbClr r="0" g="0" b="0"/>
+      </a:effectRef>
+      <a:fontRef idx="minor">
+        <a:schemeClr val="lt1"/>
+      </a:fontRef>
+    </dgm:style>
+  </dgm:styleLbl>
+  <dgm:styleLbl name="asst1">
+    <dgm:scene3d>
+      <a:camera prst="orthographicFront"/>
+      <a:lightRig rig="threePt" dir="t"/>
+    </dgm:scene3d>
+    <dgm:sp3d/>
+    <dgm:txPr/>
+    <dgm:style>
+      <a:lnRef idx="2">
+        <a:scrgbClr r="0" g="0" b="0"/>
+      </a:lnRef>
+      <a:fillRef idx="1">
+        <a:scrgbClr r="0" g="0" b="0"/>
+      </a:fillRef>
+      <a:effectRef idx="0">
+        <a:scrgbClr r="0" g="0" b="0"/>
+      </a:effectRef>
+      <a:fontRef idx="minor">
+        <a:schemeClr val="lt1"/>
+      </a:fontRef>
+    </dgm:style>
+  </dgm:styleLbl>
+  <dgm:styleLbl name="asst2">
+    <dgm:scene3d>
+      <a:camera prst="orthographicFront"/>
+      <a:lightRig rig="threePt" dir="t"/>
+    </dgm:scene3d>
+    <dgm:sp3d/>
+    <dgm:txPr/>
+    <dgm:style>
+      <a:lnRef idx="2">
+        <a:scrgbClr r="0" g="0" b="0"/>
+      </a:lnRef>
+      <a:fillRef idx="1">
+        <a:scrgbClr r="0" g="0" b="0"/>
+      </a:fillRef>
+      <a:effectRef idx="0">
+        <a:scrgbClr r="0" g="0" b="0"/>
+      </a:effectRef>
+      <a:fontRef idx="minor">
+        <a:schemeClr val="lt1"/>
+      </a:fontRef>
+    </dgm:style>
+  </dgm:styleLbl>
+  <dgm:styleLbl name="asst3">
+    <dgm:scene3d>
+      <a:camera prst="orthographicFront"/>
+      <a:lightRig rig="threePt" dir="t"/>
+    </dgm:scene3d>
+    <dgm:sp3d/>
+    <dgm:txPr/>
+    <dgm:style>
+      <a:lnRef idx="2">
+        <a:scrgbClr r="0" g="0" b="0"/>
+      </a:lnRef>
+      <a:fillRef idx="1">
+        <a:scrgbClr r="0" g="0" b="0"/>
+      </a:fillRef>
+      <a:effectRef idx="0">
+        <a:scrgbClr r="0" g="0" b="0"/>
+      </a:effectRef>
+      <a:fontRef idx="minor">
+        <a:schemeClr val="lt1"/>
+      </a:fontRef>
+    </dgm:style>
+  </dgm:styleLbl>
+  <dgm:styleLbl name="asst4">
+    <dgm:scene3d>
+      <a:camera prst="orthographicFront"/>
+      <a:lightRig rig="threePt" dir="t"/>
+    </dgm:scene3d>
+    <dgm:sp3d/>
+    <dgm:txPr/>
+    <dgm:style>
+      <a:lnRef idx="2">
+        <a:scrgbClr r="0" g="0" b="0"/>
+      </a:lnRef>
+      <a:fillRef idx="1">
+        <a:scrgbClr r="0" g="0" b="0"/>
+      </a:fillRef>
+      <a:effectRef idx="0">
+        <a:scrgbClr r="0" g="0" b="0"/>
+      </a:effectRef>
+      <a:fontRef idx="minor">
+        <a:schemeClr val="lt1"/>
+      </a:fontRef>
+    </dgm:style>
+  </dgm:styleLbl>
+  <dgm:styleLbl name="parChTrans2D1">
+    <dgm:scene3d>
+      <a:camera prst="orthographicFront"/>
+      <a:lightRig rig="threePt" dir="t"/>
+    </dgm:scene3d>
+    <dgm:sp3d/>
+    <dgm:txPr/>
+    <dgm:style>
+      <a:lnRef idx="2">
+        <a:scrgbClr r="0" g="0" b="0"/>
+      </a:lnRef>
+      <a:fillRef idx="1">
+        <a:scrgbClr r="0" g="0" b="0"/>
+      </a:fillRef>
+      <a:effectRef idx="0">
+        <a:scrgbClr r="0" g="0" b="0"/>
+      </a:effectRef>
+      <a:fontRef idx="minor">
+        <a:schemeClr val="lt1"/>
+      </a:fontRef>
+    </dgm:style>
+  </dgm:styleLbl>
+  <dgm:styleLbl name="parChTrans2D2">
+    <dgm:scene3d>
+      <a:camera prst="orthographicFront"/>
+      <a:lightRig rig="threePt" dir="t"/>
+    </dgm:scene3d>
+    <dgm:sp3d/>
+    <dgm:txPr/>
+    <dgm:style>
+      <a:lnRef idx="2">
+        <a:scrgbClr r="0" g="0" b="0"/>
+      </a:lnRef>
+      <a:fillRef idx="1">
+        <a:scrgbClr r="0" g="0" b="0"/>
+      </a:fillRef>
+      <a:effectRef idx="0">
+        <a:scrgbClr r="0" g="0" b="0"/>
+      </a:effectRef>
+      <a:fontRef idx="minor">
+        <a:schemeClr val="lt1"/>
+      </a:fontRef>
+    </dgm:style>
+  </dgm:styleLbl>
+  <dgm:styleLbl name="parChTrans2D3">
+    <dgm:scene3d>
+      <a:camera prst="orthographicFront"/>
+      <a:lightRig rig="threePt" dir="t"/>
+    </dgm:scene3d>
+    <dgm:sp3d/>
+    <dgm:txPr/>
+    <dgm:style>
+      <a:lnRef idx="2">
+        <a:scrgbClr r="0" g="0" b="0"/>
+      </a:lnRef>
+      <a:fillRef idx="1">
+        <a:scrgbClr r="0" g="0" b="0"/>
+      </a:fillRef>
+      <a:effectRef idx="0">
+        <a:scrgbClr r="0" g="0" b="0"/>
+      </a:effectRef>
+      <a:fontRef idx="minor">
+        <a:schemeClr val="lt1"/>
+      </a:fontRef>
+    </dgm:style>
+  </dgm:styleLbl>
+  <dgm:styleLbl name="parChTrans2D4">
+    <dgm:scene3d>
+      <a:camera prst="orthographicFront"/>
+      <a:lightRig rig="threePt" dir="t"/>
+    </dgm:scene3d>
+    <dgm:sp3d/>
+    <dgm:txPr/>
+    <dgm:style>
+      <a:lnRef idx="2">
+        <a:scrgbClr r="0" g="0" b="0"/>
+      </a:lnRef>
+      <a:fillRef idx="1">
+        <a:scrgbClr r="0" g="0" b="0"/>
+      </a:fillRef>
+      <a:effectRef idx="0">
+        <a:scrgbClr r="0" g="0" b="0"/>
+      </a:effectRef>
+      <a:fontRef idx="minor">
+        <a:schemeClr val="lt1"/>
+      </a:fontRef>
+    </dgm:style>
+  </dgm:styleLbl>
+  <dgm:styleLbl name="parChTrans1D1">
+    <dgm:scene3d>
+      <a:camera prst="orthographicFront"/>
+      <a:lightRig rig="threePt" dir="t"/>
+    </dgm:scene3d>
+    <dgm:sp3d/>
+    <dgm:txPr/>
+    <dgm:style>
+      <a:lnRef idx="2">
+        <a:scrgbClr r="0" g="0" b="0"/>
+      </a:lnRef>
+      <a:fillRef idx="0">
+        <a:scrgbClr r="0" g="0" b="0"/>
+      </a:fillRef>
+      <a:effectRef idx="0">
+        <a:scrgbClr r="0" g="0" b="0"/>
+      </a:effectRef>
+      <a:fontRef idx="minor"/>
+    </dgm:style>
+  </dgm:styleLbl>
+  <dgm:styleLbl name="parChTrans1D2">
+    <dgm:scene3d>
+      <a:camera prst="orthographicFront"/>
+      <a:lightRig rig="threePt" dir="t"/>
+    </dgm:scene3d>
+    <dgm:sp3d/>
+    <dgm:txPr/>
+    <dgm:style>
+      <a:lnRef idx="2">
+        <a:scrgbClr r="0" g="0" b="0"/>
+      </a:lnRef>
+      <a:fillRef idx="0">
+        <a:scrgbClr r="0" g="0" b="0"/>
+      </a:fillRef>
+      <a:effectRef idx="0">
+        <a:scrgbClr r="0" g="0" b="0"/>
+      </a:effectRef>
+      <a:fontRef idx="minor"/>
+    </dgm:style>
+  </dgm:styleLbl>
+  <dgm:styleLbl name="parChTrans1D3">
+    <dgm:scene3d>
+      <a:camera prst="orthographicFront"/>
+      <a:lightRig rig="threePt" dir="t"/>
+    </dgm:scene3d>
+    <dgm:sp3d/>
+    <dgm:txPr/>
+    <dgm:style>
+      <a:lnRef idx="2">
+        <a:scrgbClr r="0" g="0" b="0"/>
+      </a:lnRef>
+      <a:fillRef idx="0">
+        <a:scrgbClr r="0" g="0" b="0"/>
+      </a:fillRef>
+      <a:effectRef idx="0">
+        <a:scrgbClr r="0" g="0" b="0"/>
+      </a:effectRef>
+      <a:fontRef idx="minor"/>
+    </dgm:style>
+  </dgm:styleLbl>
+  <dgm:styleLbl name="parChTrans1D4">
+    <dgm:scene3d>
+      <a:camera prst="orthographicFront"/>
+      <a:lightRig rig="threePt" dir="t"/>
+    </dgm:scene3d>
+    <dgm:sp3d/>
+    <dgm:txPr/>
+    <dgm:style>
+      <a:lnRef idx="2">
+        <a:scrgbClr r="0" g="0" b="0"/>
+      </a:lnRef>
+      <a:fillRef idx="0">
+        <a:scrgbClr r="0" g="0" b="0"/>
+      </a:fillRef>
+      <a:effectRef idx="0">
+        <a:scrgbClr r="0" g="0" b="0"/>
+      </a:effectRef>
+      <a:fontRef idx="minor"/>
+    </dgm:style>
+  </dgm:styleLbl>
+  <dgm:styleLbl name="fgAcc1">
+    <dgm:scene3d>
+      <a:camera prst="orthographicFront"/>
+      <a:lightRig rig="threePt" dir="t"/>
+    </dgm:scene3d>
+    <dgm:sp3d/>
+    <dgm:txPr/>
+    <dgm:style>
+      <a:lnRef idx="2">
+        <a:scrgbClr r="0" g="0" b="0"/>
+      </a:lnRef>
+      <a:fillRef idx="1">
+        <a:scrgbClr r="0" g="0" b="0"/>
+      </a:fillRef>
+      <a:effectRef idx="0">
+        <a:scrgbClr r="0" g="0" b="0"/>
+      </a:effectRef>
+      <a:fontRef idx="minor"/>
+    </dgm:style>
+  </dgm:styleLbl>
+  <dgm:styleLbl name="conFgAcc1">
+    <dgm:scene3d>
+      <a:camera prst="orthographicFront"/>
+      <a:lightRig rig="threePt" dir="t"/>
+    </dgm:scene3d>
+    <dgm:sp3d/>
+    <dgm:txPr/>
+    <dgm:style>
+      <a:lnRef idx="2">
+        <a:scrgbClr r="0" g="0" b="0"/>
+      </a:lnRef>
+      <a:fillRef idx="1">
+        <a:scrgbClr r="0" g="0" b="0"/>
+      </a:fillRef>
+      <a:effectRef idx="0">
+        <a:scrgbClr r="0" g="0" b="0"/>
+      </a:effectRef>
+      <a:fontRef idx="minor"/>
+    </dgm:style>
+  </dgm:styleLbl>
+  <dgm:styleLbl name="alignAcc1">
+    <dgm:scene3d>
+      <a:camera prst="orthographicFront"/>
+      <a:lightRig rig="threePt" dir="t"/>
+    </dgm:scene3d>
+    <dgm:sp3d/>
+    <dgm:txPr/>
+    <dgm:style>
+      <a:lnRef idx="2">
+        <a:scrgbClr r="0" g="0" b="0"/>
+      </a:lnRef>
+      <a:fillRef idx="1">
+        <a:scrgbClr r="0" g="0" b="0"/>
+      </a:fillRef>
+      <a:effectRef idx="0">
+        <a:scrgbClr r="0" g="0" b="0"/>
+      </a:effectRef>
+      <a:fontRef idx="minor"/>
+    </dgm:style>
+  </dgm:styleLbl>
+  <dgm:styleLbl name="trAlignAcc1">
+    <dgm:scene3d>
+      <a:camera prst="orthographicFront"/>
+      <a:lightRig rig="threePt" dir="t"/>
+    </dgm:scene3d>
+    <dgm:sp3d/>
+    <dgm:txPr/>
+    <dgm:style>
+      <a:lnRef idx="1">
+        <a:scrgbClr r="0" g="0" b="0"/>
+      </a:lnRef>
+      <a:fillRef idx="1">
+        <a:scrgbClr r="0" g="0" b="0"/>
+      </a:fillRef>
+      <a:effectRef idx="0">
+        <a:scrgbClr r="0" g="0" b="0"/>
+      </a:effectRef>
+      <a:fontRef idx="minor"/>
+    </dgm:style>
+  </dgm:styleLbl>
+  <dgm:styleLbl name="bgAcc1">
+    <dgm:scene3d>
+      <a:camera prst="orthographicFront"/>
+      <a:lightRig rig="threePt" dir="t"/>
+    </dgm:scene3d>
+    <dgm:sp3d/>
+    <dgm:txPr/>
+    <dgm:style>
+      <a:lnRef idx="2">
+        <a:scrgbClr r="0" g="0" b="0"/>
+      </a:lnRef>
+      <a:fillRef idx="1">
+        <a:scrgbClr r="0" g="0" b="0"/>
+      </a:fillRef>
+      <a:effectRef idx="0">
+        <a:scrgbClr r="0" g="0" b="0"/>
+      </a:effectRef>
+      <a:fontRef idx="minor"/>
+    </dgm:style>
+  </dgm:styleLbl>
+  <dgm:styleLbl name="solidFgAcc1">
+    <dgm:scene3d>
+      <a:camera prst="orthographicFront"/>
+      <a:lightRig rig="threePt" dir="t"/>
+    </dgm:scene3d>
+    <dgm:sp3d/>
+    <dgm:txPr/>
+    <dgm:style>
+      <a:lnRef idx="2">
+        <a:scrgbClr r="0" g="0" b="0"/>
+      </a:lnRef>
+      <a:fillRef idx="1">
+        <a:scrgbClr r="0" g="0" b="0"/>
+      </a:fillRef>
+      <a:effectRef idx="0">
+        <a:scrgbClr r="0" g="0" b="0"/>
+      </a:effectRef>
+      <a:fontRef idx="minor"/>
+    </dgm:style>
+  </dgm:styleLbl>
+  <dgm:styleLbl name="solidAlignAcc1">
+    <dgm:scene3d>
+      <a:camera prst="orthographicFront"/>
+      <a:lightRig rig="threePt" dir="t"/>
+    </dgm:scene3d>
+    <dgm:sp3d/>
+    <dgm:txPr/>
+    <dgm:style>
+      <a:lnRef idx="2">
+        <a:scrgbClr r="0" g="0" b="0"/>
+      </a:lnRef>
+      <a:fillRef idx="1">
+        <a:scrgbClr r="0" g="0" b="0"/>
+      </a:fillRef>
+      <a:effectRef idx="0">
+        <a:scrgbClr r="0" g="0" b="0"/>
+      </a:effectRef>
+      <a:fontRef idx="minor"/>
+    </dgm:style>
+  </dgm:styleLbl>
+  <dgm:styleLbl name="solidBgAcc1">
+    <dgm:scene3d>
+      <a:camera prst="orthographicFront"/>
+      <a:lightRig rig="threePt" dir="t"/>
+    </dgm:scene3d>
+    <dgm:sp3d/>
+    <dgm:txPr/>
+    <dgm:style>
+      <a:lnRef idx="2">
+        <a:scrgbClr r="0" g="0" b="0"/>
+      </a:lnRef>
+      <a:fillRef idx="1">
+        <a:scrgbClr r="0" g="0" b="0"/>
+      </a:fillRef>
+      <a:effectRef idx="0">
+        <a:scrgbClr r="0" g="0" b="0"/>
+      </a:effectRef>
+      <a:fontRef idx="minor"/>
+    </dgm:style>
+  </dgm:styleLbl>
+  <dgm:styleLbl name="fgAccFollowNode1">
+    <dgm:scene3d>
+      <a:camera prst="orthographicFront"/>
+      <a:lightRig rig="threePt" dir="t"/>
+    </dgm:scene3d>
+    <dgm:sp3d/>
+    <dgm:txPr/>
+    <dgm:style>
+      <a:lnRef idx="2">
+        <a:scrgbClr r="0" g="0" b="0"/>
+      </a:lnRef>
+      <a:fillRef idx="1">
+        <a:scrgbClr r="0" g="0" b="0"/>
+      </a:fillRef>
+      <a:effectRef idx="0">
+        <a:scrgbClr r="0" g="0" b="0"/>
+      </a:effectRef>
+      <a:fontRef idx="minor"/>
+    </dgm:style>
+  </dgm:styleLbl>
+  <dgm:styleLbl name="alignAccFollowNode1">
+    <dgm:scene3d>
+      <a:camera prst="orthographicFront"/>
+      <a:lightRig rig="threePt" dir="t"/>
+    </dgm:scene3d>
+    <dgm:sp3d/>
+    <dgm:txPr/>
+    <dgm:style>
+      <a:lnRef idx="2">
+        <a:scrgbClr r="0" g="0" b="0"/>
+      </a:lnRef>
+      <a:fillRef idx="1">
+        <a:scrgbClr r="0" g="0" b="0"/>
+      </a:fillRef>
+      <a:effectRef idx="0">
+        <a:scrgbClr r="0" g="0" b="0"/>
+      </a:effectRef>
+      <a:fontRef idx="minor"/>
+    </dgm:style>
+  </dgm:styleLbl>
+  <dgm:styleLbl name="bgAccFollowNode1">
+    <dgm:scene3d>
+      <a:camera prst="orthographicFront"/>
+      <a:lightRig rig="threePt" dir="t"/>
+    </dgm:scene3d>
+    <dgm:sp3d/>
+    <dgm:txPr/>
+    <dgm:style>
+      <a:lnRef idx="2">
+        <a:scrgbClr r="0" g="0" b="0"/>
+      </a:lnRef>
+      <a:fillRef idx="1">
+        <a:scrgbClr r="0" g="0" b="0"/>
+      </a:fillRef>
+      <a:effectRef idx="0">
+        <a:scrgbClr r="0" g="0" b="0"/>
+      </a:effectRef>
+      <a:fontRef idx="minor"/>
+    </dgm:style>
+  </dgm:styleLbl>
+  <dgm:styleLbl name="fgAcc0">
+    <dgm:scene3d>
+      <a:camera prst="orthographicFront"/>
+      <a:lightRig rig="threePt" dir="t"/>
+    </dgm:scene3d>
+    <dgm:sp3d/>
+    <dgm:txPr/>
+    <dgm:style>
+      <a:lnRef idx="2">
+        <a:scrgbClr r="0" g="0" b="0"/>
+      </a:lnRef>
+      <a:fillRef idx="1">
+        <a:scrgbClr r="0" g="0" b="0"/>
+      </a:fillRef>
+      <a:effectRef idx="0">
+        <a:scrgbClr r="0" g="0" b="0"/>
+      </a:effectRef>
+      <a:fontRef idx="minor"/>
+    </dgm:style>
+  </dgm:styleLbl>
+  <dgm:styleLbl name="fgAcc2">
+    <dgm:scene3d>
+      <a:camera prst="orthographicFront"/>
+      <a:lightRig rig="threePt" dir="t"/>
+    </dgm:scene3d>
+    <dgm:sp3d/>
+    <dgm:txPr/>
+    <dgm:style>
+      <a:lnRef idx="2">
+        <a:scrgbClr r="0" g="0" b="0"/>
+      </a:lnRef>
+      <a:fillRef idx="1">
+        <a:scrgbClr r="0" g="0" b="0"/>
+      </a:fillRef>
+      <a:effectRef idx="0">
+        <a:scrgbClr r="0" g="0" b="0"/>
+      </a:effectRef>
+      <a:fontRef idx="minor"/>
+    </dgm:style>
+  </dgm:styleLbl>
+  <dgm:styleLbl name="fgAcc3">
+    <dgm:scene3d>
+      <a:camera prst="orthographicFront"/>
+      <a:lightRig rig="threePt" dir="t"/>
+    </dgm:scene3d>
+    <dgm:sp3d/>
+    <dgm:txPr/>
+    <dgm:style>
+      <a:lnRef idx="2">
+        <a:scrgbClr r="0" g="0" b="0"/>
+      </a:lnRef>
+      <a:fillRef idx="1">
+        <a:scrgbClr r="0" g="0" b="0"/>
+      </a:fillRef>
+      <a:effectRef idx="0">
+        <a:scrgbClr r="0" g="0" b="0"/>
+      </a:effectRef>
+      <a:fontRef idx="minor"/>
+    </dgm:style>
+  </dgm:styleLbl>
+  <dgm:styleLbl name="fgAcc4">
+    <dgm:scene3d>
+      <a:camera prst="orthographicFront"/>
+      <a:lightRig rig="threePt" dir="t"/>
+    </dgm:scene3d>
+    <dgm:sp3d/>
+    <dgm:txPr/>
+    <dgm:style>
+      <a:lnRef idx="2">
+        <a:scrgbClr r="0" g="0" b="0"/>
+      </a:lnRef>
+      <a:fillRef idx="1">
+        <a:scrgbClr r="0" g="0" b="0"/>
+      </a:fillRef>
+      <a:effectRef idx="0">
+        <a:scrgbClr r="0" g="0" b="0"/>
+      </a:effectRef>
+      <a:fontRef idx="minor"/>
+    </dgm:style>
+  </dgm:styleLbl>
+  <dgm:styleLbl name="bgShp">
+    <dgm:scene3d>
+      <a:camera prst="orthographicFront"/>
+      <a:lightRig rig="threePt" dir="t"/>
+    </dgm:scene3d>
+    <dgm:sp3d/>
+    <dgm:txPr/>
+    <dgm:style>
+      <a:lnRef idx="0">
+        <a:scrgbClr r="0" g="0" b="0"/>
+      </a:lnRef>
+      <a:fillRef idx="1">
+        <a:scrgbClr r="0" g="0" b="0"/>
+      </a:fillRef>
+      <a:effectRef idx="0">
+        <a:scrgbClr r="0" g="0" b="0"/>
+      </a:effectRef>
+      <a:fontRef idx="minor"/>
+    </dgm:style>
+  </dgm:styleLbl>
+  <dgm:styleLbl name="dkBgShp">
+    <dgm:scene3d>
+      <a:camera prst="orthographicFront"/>
+      <a:lightRig rig="threePt" dir="t"/>
+    </dgm:scene3d>
+    <dgm:sp3d/>
+    <dgm:txPr/>
+    <dgm:style>
+      <a:lnRef idx="0">
+        <a:scrgbClr r="0" g="0" b="0"/>
+      </a:lnRef>
+      <a:fillRef idx="1">
+        <a:scrgbClr r="0" g="0" b="0"/>
+      </a:fillRef>
+      <a:effectRef idx="0">
+        <a:scrgbClr r="0" g="0" b="0"/>
+      </a:effectRef>
+      <a:fontRef idx="minor"/>
+    </dgm:style>
+  </dgm:styleLbl>
+  <dgm:styleLbl name="trBgShp">
+    <dgm:scene3d>
+      <a:camera prst="orthographicFront"/>
+      <a:lightRig rig="threePt" dir="t"/>
+    </dgm:scene3d>
+    <dgm:sp3d/>
+    <dgm:txPr/>
+    <dgm:style>
+      <a:lnRef idx="0">
+        <a:scrgbClr r="0" g="0" b="0"/>
+      </a:lnRef>
+      <a:fillRef idx="1">
+        <a:scrgbClr r="0" g="0" b="0"/>
+      </a:fillRef>
+      <a:effectRef idx="0">
+        <a:scrgbClr r="0" g="0" b="0"/>
+      </a:effectRef>
+      <a:fontRef idx="minor"/>
+    </dgm:style>
+  </dgm:styleLbl>
+  <dgm:styleLbl name="fgShp">
+    <dgm:scene3d>
+      <a:camera prst="orthographicFront"/>
+      <a:lightRig rig="threePt" dir="t"/>
+    </dgm:scene3d>
+    <dgm:sp3d/>
+    <dgm:txPr/>
+    <dgm:style>
+      <a:lnRef idx="2">
+        <a:scrgbClr r="0" g="0" b="0"/>
+      </a:lnRef>
+      <a:fillRef idx="1">
+        <a:scrgbClr r="0" g="0" b="0"/>
+      </a:fillRef>
+      <a:effectRef idx="0">
+        <a:scrgbClr r="0" g="0" b="0"/>
+      </a:effectRef>
+      <a:fontRef idx="minor"/>
+    </dgm:style>
+  </dgm:styleLbl>
+  <dgm:styleLbl name="revTx">
+    <dgm:scene3d>
+      <a:camera prst="orthographicFront"/>
+      <a:lightRig rig="threePt" dir="t"/>
+    </dgm:scene3d>
+    <dgm:sp3d/>
+    <dgm:txPr/>
+    <dgm:style>
+      <a:lnRef idx="0">
+        <a:scrgbClr r="0" g="0" b="0"/>
+      </a:lnRef>
+      <a:fillRef idx="0">
+        <a:scrgbClr r="0" g="0" b="0"/>
+      </a:fillRef>
+      <a:effectRef idx="0">
+        <a:scrgbClr r="0" g="0" b="0"/>
+      </a:effectRef>
+      <a:fontRef idx="minor"/>
+    </dgm:style>
+  </dgm:styleLbl>
+  <dgm:styleLbl name="revTxLt">
+    <dgm:scene3d>
+      <a:camera prst="orthographicFront"/>
+      <a:lightRig rig="threePt" dir="t"/>
+    </dgm:scene3d>
+    <dgm:sp3d/>
+    <dgm:txPr/>
+    <dgm:style>
+      <a:lnRef idx="0">
+        <a:scrgbClr r="0" g="0" b="0"/>
+      </a:lnRef>
+      <a:fillRef idx="0">
+        <a:scrgbClr r="0" g="0" b="0"/>
+      </a:fillRef>
+      <a:effectRef idx="0">
+        <a:scrgbClr r="0" g="0" b="0"/>
+      </a:effectRef>
+      <a:fontRef idx="minor">
+        <a:schemeClr val="lt1"/>
+      </a:fontRef>
+    </dgm:style>
+  </dgm:styleLbl>
+</dgm:styleDef>
 </file>
 
 <file path=ppt/handoutMasters/handoutMaster1.xml><?xml version="1.0" encoding="utf-8"?>
@@ -994,6 +7063,18 @@
   <p:clrMapOvr>
     <a:masterClrMapping/>
   </p:clrMapOvr>
+  <mc:AlternateContent xmlns:mc="http://schemas.openxmlformats.org/markup-compatibility/2006">
+    <mc:Choice xmlns:p14="http://schemas.microsoft.com/office/powerpoint/2010/main" Requires="p14">
+      <p:transition spd="slow" p14:dur="4000">
+        <p14:vortex dir="r"/>
+      </p:transition>
+    </mc:Choice>
+    <mc:Fallback>
+      <p:transition spd="slow">
+        <p:fade/>
+      </p:transition>
+    </mc:Fallback>
+  </mc:AlternateContent>
   <p:extLst>
     <p:ext uri="{DCECCB84-F9BA-43D5-87BE-67443E8EF086}">
       <p15:sldGuideLst xmlns:p15="http://schemas.microsoft.com/office/powerpoint/2012/main">
@@ -1578,6 +7659,18 @@
   <p:clrMapOvr>
     <a:masterClrMapping/>
   </p:clrMapOvr>
+  <mc:AlternateContent xmlns:mc="http://schemas.openxmlformats.org/markup-compatibility/2006">
+    <mc:Choice xmlns:p14="http://schemas.microsoft.com/office/powerpoint/2010/main" Requires="p14">
+      <p:transition spd="slow" p14:dur="4000">
+        <p14:vortex dir="r"/>
+      </p:transition>
+    </mc:Choice>
+    <mc:Fallback>
+      <p:transition spd="slow">
+        <p:fade/>
+      </p:transition>
+    </mc:Fallback>
+  </mc:AlternateContent>
 </p:sldLayout>
 </file>
 
@@ -2313,6 +8406,18 @@
   <p:clrMapOvr>
     <a:masterClrMapping/>
   </p:clrMapOvr>
+  <mc:AlternateContent xmlns:mc="http://schemas.openxmlformats.org/markup-compatibility/2006">
+    <mc:Choice xmlns:p14="http://schemas.microsoft.com/office/powerpoint/2010/main" Requires="p14">
+      <p:transition spd="slow" p14:dur="4000">
+        <p14:vortex dir="r"/>
+      </p:transition>
+    </mc:Choice>
+    <mc:Fallback>
+      <p:transition spd="slow">
+        <p:fade/>
+      </p:transition>
+    </mc:Fallback>
+  </mc:AlternateContent>
 </p:sldLayout>
 </file>
 
@@ -2635,6 +8740,18 @@
   <p:clrMapOvr>
     <a:masterClrMapping/>
   </p:clrMapOvr>
+  <mc:AlternateContent xmlns:mc="http://schemas.openxmlformats.org/markup-compatibility/2006">
+    <mc:Choice xmlns:p14="http://schemas.microsoft.com/office/powerpoint/2010/main" Requires="p14">
+      <p:transition spd="slow" p14:dur="4000">
+        <p14:vortex dir="r"/>
+      </p:transition>
+    </mc:Choice>
+    <mc:Fallback>
+      <p:transition spd="slow">
+        <p:fade/>
+      </p:transition>
+    </mc:Fallback>
+  </mc:AlternateContent>
 </p:sldLayout>
 </file>
 
@@ -3049,6 +9166,18 @@
   <p:clrMapOvr>
     <a:masterClrMapping/>
   </p:clrMapOvr>
+  <mc:AlternateContent xmlns:mc="http://schemas.openxmlformats.org/markup-compatibility/2006">
+    <mc:Choice xmlns:p14="http://schemas.microsoft.com/office/powerpoint/2010/main" Requires="p14">
+      <p:transition spd="slow" p14:dur="4000">
+        <p14:vortex dir="r"/>
+      </p:transition>
+    </mc:Choice>
+    <mc:Fallback>
+      <p:transition spd="slow">
+        <p:fade/>
+      </p:transition>
+    </mc:Fallback>
+  </mc:AlternateContent>
 </p:sldLayout>
 </file>
 
@@ -5059,6 +11188,18 @@
   <p:clrMapOvr>
     <a:masterClrMapping/>
   </p:clrMapOvr>
+  <mc:AlternateContent xmlns:mc="http://schemas.openxmlformats.org/markup-compatibility/2006">
+    <mc:Choice xmlns:p14="http://schemas.microsoft.com/office/powerpoint/2010/main" Requires="p14">
+      <p:transition spd="slow" p14:dur="4000">
+        <p14:vortex dir="r"/>
+      </p:transition>
+    </mc:Choice>
+    <mc:Fallback>
+      <p:transition spd="slow">
+        <p:fade/>
+      </p:transition>
+    </mc:Fallback>
+  </mc:AlternateContent>
 </p:sldLayout>
 </file>
 
@@ -7047,6 +13188,18 @@
   <p:clrMapOvr>
     <a:masterClrMapping/>
   </p:clrMapOvr>
+  <mc:AlternateContent xmlns:mc="http://schemas.openxmlformats.org/markup-compatibility/2006">
+    <mc:Choice xmlns:p14="http://schemas.microsoft.com/office/powerpoint/2010/main" Requires="p14">
+      <p:transition spd="slow" p14:dur="4000">
+        <p14:vortex dir="r"/>
+      </p:transition>
+    </mc:Choice>
+    <mc:Fallback>
+      <p:transition spd="slow">
+        <p:fade/>
+      </p:transition>
+    </mc:Fallback>
+  </mc:AlternateContent>
 </p:sldLayout>
 </file>
 
@@ -8254,6 +14407,18 @@
   <p:clrMapOvr>
     <a:masterClrMapping/>
   </p:clrMapOvr>
+  <mc:AlternateContent xmlns:mc="http://schemas.openxmlformats.org/markup-compatibility/2006">
+    <mc:Choice xmlns:p14="http://schemas.microsoft.com/office/powerpoint/2010/main" Requires="p14">
+      <p:transition spd="slow" p14:dur="4000">
+        <p14:vortex dir="r"/>
+      </p:transition>
+    </mc:Choice>
+    <mc:Fallback>
+      <p:transition spd="slow">
+        <p:fade/>
+      </p:transition>
+    </mc:Fallback>
+  </mc:AlternateContent>
 </p:sldLayout>
 </file>
 
@@ -9443,6 +15608,18 @@
   <p:clrMapOvr>
     <a:masterClrMapping/>
   </p:clrMapOvr>
+  <mc:AlternateContent xmlns:mc="http://schemas.openxmlformats.org/markup-compatibility/2006">
+    <mc:Choice xmlns:p14="http://schemas.microsoft.com/office/powerpoint/2010/main" Requires="p14">
+      <p:transition spd="slow" p14:dur="4000">
+        <p14:vortex dir="r"/>
+      </p:transition>
+    </mc:Choice>
+    <mc:Fallback>
+      <p:transition spd="slow">
+        <p:fade/>
+      </p:transition>
+    </mc:Fallback>
+  </mc:AlternateContent>
 </p:sldLayout>
 </file>
 
@@ -10124,6 +16301,18 @@
   <p:clrMapOvr>
     <a:masterClrMapping/>
   </p:clrMapOvr>
+  <mc:AlternateContent xmlns:mc="http://schemas.openxmlformats.org/markup-compatibility/2006">
+    <mc:Choice xmlns:p14="http://schemas.microsoft.com/office/powerpoint/2010/main" Requires="p14">
+      <p:transition spd="slow" p14:dur="4000">
+        <p14:vortex dir="r"/>
+      </p:transition>
+    </mc:Choice>
+    <mc:Fallback>
+      <p:transition spd="slow">
+        <p:fade/>
+      </p:transition>
+    </mc:Fallback>
+  </mc:AlternateContent>
 </p:sldLayout>
 </file>
 
@@ -10690,6 +16879,18 @@
   <p:clrMapOvr>
     <a:masterClrMapping/>
   </p:clrMapOvr>
+  <mc:AlternateContent xmlns:mc="http://schemas.openxmlformats.org/markup-compatibility/2006">
+    <mc:Choice xmlns:p14="http://schemas.microsoft.com/office/powerpoint/2010/main" Requires="p14">
+      <p:transition spd="slow" p14:dur="4000">
+        <p14:vortex dir="r"/>
+      </p:transition>
+    </mc:Choice>
+    <mc:Fallback>
+      <p:transition spd="slow">
+        <p:fade/>
+      </p:transition>
+    </mc:Fallback>
+  </mc:AlternateContent>
 </p:sldLayout>
 </file>
 
@@ -11184,6 +17385,18 @@
   <p:clrMapOvr>
     <a:masterClrMapping/>
   </p:clrMapOvr>
+  <mc:AlternateContent xmlns:mc="http://schemas.openxmlformats.org/markup-compatibility/2006">
+    <mc:Choice xmlns:p14="http://schemas.microsoft.com/office/powerpoint/2010/main" Requires="p14">
+      <p:transition spd="slow" p14:dur="4000">
+        <p14:vortex dir="r"/>
+      </p:transition>
+    </mc:Choice>
+    <mc:Fallback>
+      <p:transition spd="slow">
+        <p:fade/>
+      </p:transition>
+    </mc:Fallback>
+  </mc:AlternateContent>
 </p:sldLayout>
 </file>
 
@@ -12608,6 +18821,18 @@
   <p:clrMapOvr>
     <a:masterClrMapping/>
   </p:clrMapOvr>
+  <mc:AlternateContent xmlns:mc="http://schemas.openxmlformats.org/markup-compatibility/2006">
+    <mc:Choice xmlns:p14="http://schemas.microsoft.com/office/powerpoint/2010/main" Requires="p14">
+      <p:transition spd="slow" p14:dur="4000">
+        <p14:vortex dir="r"/>
+      </p:transition>
+    </mc:Choice>
+    <mc:Fallback>
+      <p:transition spd="slow">
+        <p:fade/>
+      </p:transition>
+    </mc:Fallback>
+  </mc:AlternateContent>
 </p:sldLayout>
 </file>
 
@@ -13933,6 +20158,18 @@
   <p:clrMapOvr>
     <a:masterClrMapping/>
   </p:clrMapOvr>
+  <mc:AlternateContent xmlns:mc="http://schemas.openxmlformats.org/markup-compatibility/2006">
+    <mc:Choice xmlns:p14="http://schemas.microsoft.com/office/powerpoint/2010/main" Requires="p14">
+      <p:transition spd="slow" p14:dur="4000">
+        <p14:vortex dir="r"/>
+      </p:transition>
+    </mc:Choice>
+    <mc:Fallback>
+      <p:transition spd="slow">
+        <p:fade/>
+      </p:transition>
+    </mc:Fallback>
+  </mc:AlternateContent>
 </p:sldLayout>
 </file>
 
@@ -14602,6 +20839,18 @@
   <p:clrMapOvr>
     <a:masterClrMapping/>
   </p:clrMapOvr>
+  <mc:AlternateContent xmlns:mc="http://schemas.openxmlformats.org/markup-compatibility/2006">
+    <mc:Choice xmlns:p14="http://schemas.microsoft.com/office/powerpoint/2010/main" Requires="p14">
+      <p:transition spd="slow" p14:dur="4000">
+        <p14:vortex dir="r"/>
+      </p:transition>
+    </mc:Choice>
+    <mc:Fallback>
+      <p:transition spd="slow">
+        <p:fade/>
+      </p:transition>
+    </mc:Fallback>
+  </mc:AlternateContent>
 </p:sldLayout>
 </file>
 
@@ -15669,6 +21918,18 @@
   <p:clrMapOvr>
     <a:masterClrMapping/>
   </p:clrMapOvr>
+  <mc:AlternateContent xmlns:mc="http://schemas.openxmlformats.org/markup-compatibility/2006">
+    <mc:Choice xmlns:p14="http://schemas.microsoft.com/office/powerpoint/2010/main" Requires="p14">
+      <p:transition spd="slow" p14:dur="4000">
+        <p14:vortex dir="r"/>
+      </p:transition>
+    </mc:Choice>
+    <mc:Fallback>
+      <p:transition spd="slow">
+        <p:fade/>
+      </p:transition>
+    </mc:Fallback>
+  </mc:AlternateContent>
 </p:sldLayout>
 </file>
 
@@ -16307,6 +22568,18 @@
   <p:clrMapOvr>
     <a:masterClrMapping/>
   </p:clrMapOvr>
+  <mc:AlternateContent xmlns:mc="http://schemas.openxmlformats.org/markup-compatibility/2006">
+    <mc:Choice xmlns:p14="http://schemas.microsoft.com/office/powerpoint/2010/main" Requires="p14">
+      <p:transition spd="slow" p14:dur="4000">
+        <p14:vortex dir="r"/>
+      </p:transition>
+    </mc:Choice>
+    <mc:Fallback>
+      <p:transition spd="slow">
+        <p:fade/>
+      </p:transition>
+    </mc:Fallback>
+  </mc:AlternateContent>
 </p:sldLayout>
 </file>
 
@@ -16496,6 +22769,18 @@
     <p:sldLayoutId id="2147483658" r:id="rId16"/>
     <p:sldLayoutId id="2147483659" r:id="rId17"/>
   </p:sldLayoutIdLst>
+  <mc:AlternateContent xmlns:mc="http://schemas.openxmlformats.org/markup-compatibility/2006">
+    <mc:Choice xmlns:p14="http://schemas.microsoft.com/office/powerpoint/2010/main" Requires="p14">
+      <p:transition spd="slow" p14:dur="4000">
+        <p14:vortex dir="r"/>
+      </p:transition>
+    </mc:Choice>
+    <mc:Fallback>
+      <p:transition spd="slow">
+        <p:fade/>
+      </p:transition>
+    </mc:Fallback>
+  </mc:AlternateContent>
   <p:hf hdr="0" ftr="0" dt="0"/>
   <p:txStyles>
     <p:titleStyle>
@@ -16847,6 +23132,18 @@
   <p:clrMapOvr>
     <a:masterClrMapping/>
   </p:clrMapOvr>
+  <mc:AlternateContent xmlns:mc="http://schemas.openxmlformats.org/markup-compatibility/2006">
+    <mc:Choice xmlns:p14="http://schemas.microsoft.com/office/powerpoint/2010/main" Requires="p14">
+      <p:transition spd="slow" p14:dur="4000">
+        <p14:vortex dir="r"/>
+      </p:transition>
+    </mc:Choice>
+    <mc:Fallback>
+      <p:transition spd="slow">
+        <p:fade/>
+      </p:transition>
+    </mc:Fallback>
+  </mc:AlternateContent>
 </p:sld>
 </file>
 
@@ -16888,35 +23185,401 @@
           <a:bodyPr/>
           <a:lstStyle/>
           <a:p>
-            <a:endParaRPr lang="en-IN"/>
+            <a:r>
+              <a:rPr lang="en-US" dirty="0"/>
+              <a:t>DATA</a:t>
+            </a:r>
+            <a:endParaRPr lang="en-IN" dirty="0"/>
           </a:p>
         </p:txBody>
       </p:sp>
-      <p:sp>
-        <p:nvSpPr>
-          <p:cNvPr id="3" name="Content Placeholder 2">
+      <p:graphicFrame>
+        <p:nvGraphicFramePr>
+          <p:cNvPr id="5" name="Content Placeholder 4">
             <a:extLst>
               <a:ext uri="{FF2B5EF4-FFF2-40B4-BE49-F238E27FC236}">
-                <a16:creationId xmlns:a16="http://schemas.microsoft.com/office/drawing/2014/main" id="{BA6D5B73-59D7-DC97-D1A7-5134E45B715C}"/>
+                <a16:creationId xmlns:a16="http://schemas.microsoft.com/office/drawing/2014/main" id="{4F0D3DB0-F9C6-51C0-44D3-AE32B8BCFDFD}"/>
               </a:ext>
             </a:extLst>
           </p:cNvPr>
-          <p:cNvSpPr>
-            <a:spLocks noGrp="1"/>
-          </p:cNvSpPr>
+          <p:cNvGraphicFramePr>
+            <a:graphicFrameLocks noGrp="1"/>
+          </p:cNvGraphicFramePr>
           <p:nvPr>
             <p:ph idx="1"/>
+            <p:extLst>
+              <p:ext uri="{D42A27DB-BD31-4B8C-83A1-F6EECF244321}">
+                <p14:modId xmlns:p14="http://schemas.microsoft.com/office/powerpoint/2010/main" val="1999845601"/>
+              </p:ext>
+            </p:extLst>
           </p:nvPr>
-        </p:nvSpPr>
-        <p:spPr/>
-        <p:txBody>
-          <a:bodyPr/>
-          <a:lstStyle/>
-          <a:p>
-            <a:endParaRPr lang="en-IN"/>
-          </a:p>
-        </p:txBody>
-      </p:sp>
+        </p:nvGraphicFramePr>
+        <p:xfrm>
+          <a:off x="914400" y="2835275"/>
+          <a:ext cx="6583360" cy="2291080"/>
+        </p:xfrm>
+        <a:graphic>
+          <a:graphicData uri="http://schemas.openxmlformats.org/drawingml/2006/table">
+            <a:tbl>
+              <a:tblPr firstRow="1" bandRow="1">
+                <a:tableStyleId>{0E3FDE45-AF77-4B5C-9715-49D594BDF05E}</a:tableStyleId>
+              </a:tblPr>
+              <a:tblGrid>
+                <a:gridCol w="1316672">
+                  <a:extLst>
+                    <a:ext uri="{9D8B030D-6E8A-4147-A177-3AD203B41FA5}">
+                      <a16:colId xmlns:a16="http://schemas.microsoft.com/office/drawing/2014/main" val="4007968248"/>
+                    </a:ext>
+                  </a:extLst>
+                </a:gridCol>
+                <a:gridCol w="1316672">
+                  <a:extLst>
+                    <a:ext uri="{9D8B030D-6E8A-4147-A177-3AD203B41FA5}">
+                      <a16:colId xmlns:a16="http://schemas.microsoft.com/office/drawing/2014/main" val="2056448593"/>
+                    </a:ext>
+                  </a:extLst>
+                </a:gridCol>
+                <a:gridCol w="1316672">
+                  <a:extLst>
+                    <a:ext uri="{9D8B030D-6E8A-4147-A177-3AD203B41FA5}">
+                      <a16:colId xmlns:a16="http://schemas.microsoft.com/office/drawing/2014/main" val="416898917"/>
+                    </a:ext>
+                  </a:extLst>
+                </a:gridCol>
+                <a:gridCol w="1316672">
+                  <a:extLst>
+                    <a:ext uri="{9D8B030D-6E8A-4147-A177-3AD203B41FA5}">
+                      <a16:colId xmlns:a16="http://schemas.microsoft.com/office/drawing/2014/main" val="317435880"/>
+                    </a:ext>
+                  </a:extLst>
+                </a:gridCol>
+                <a:gridCol w="1316672">
+                  <a:extLst>
+                    <a:ext uri="{9D8B030D-6E8A-4147-A177-3AD203B41FA5}">
+                      <a16:colId xmlns:a16="http://schemas.microsoft.com/office/drawing/2014/main" val="808319454"/>
+                    </a:ext>
+                  </a:extLst>
+                </a:gridCol>
+              </a:tblGrid>
+              <a:tr h="370840">
+                <a:tc>
+                  <a:txBody>
+                    <a:bodyPr/>
+                    <a:lstStyle/>
+                    <a:p>
+                      <a:r>
+                        <a:rPr lang="en-US" dirty="0"/>
+                        <a:t>NAME</a:t>
+                      </a:r>
+                      <a:endParaRPr lang="en-IN" dirty="0"/>
+                    </a:p>
+                  </a:txBody>
+                  <a:tcPr/>
+                </a:tc>
+                <a:tc>
+                  <a:txBody>
+                    <a:bodyPr/>
+                    <a:lstStyle/>
+                    <a:p>
+                      <a:r>
+                        <a:rPr lang="en-US" dirty="0"/>
+                        <a:t>OOPJ</a:t>
+                      </a:r>
+                      <a:endParaRPr lang="en-IN" dirty="0"/>
+                    </a:p>
+                  </a:txBody>
+                  <a:tcPr/>
+                </a:tc>
+                <a:tc>
+                  <a:txBody>
+                    <a:bodyPr/>
+                    <a:lstStyle/>
+                    <a:p>
+                      <a:r>
+                        <a:rPr lang="en-US" dirty="0"/>
+                        <a:t>MATHS-2</a:t>
+                      </a:r>
+                      <a:endParaRPr lang="en-IN" dirty="0"/>
+                    </a:p>
+                  </a:txBody>
+                  <a:tcPr/>
+                </a:tc>
+                <a:tc>
+                  <a:txBody>
+                    <a:bodyPr/>
+                    <a:lstStyle/>
+                    <a:p>
+                      <a:r>
+                        <a:rPr lang="en-US" dirty="0"/>
+                        <a:t>WD</a:t>
+                      </a:r>
+                      <a:endParaRPr lang="en-IN" dirty="0"/>
+                    </a:p>
+                  </a:txBody>
+                  <a:tcPr/>
+                </a:tc>
+                <a:tc>
+                  <a:txBody>
+                    <a:bodyPr/>
+                    <a:lstStyle/>
+                    <a:p>
+                      <a:r>
+                        <a:rPr lang="en-US" dirty="0"/>
+                        <a:t>EG</a:t>
+                      </a:r>
+                      <a:endParaRPr lang="en-IN" dirty="0"/>
+                    </a:p>
+                  </a:txBody>
+                  <a:tcPr/>
+                </a:tc>
+                <a:extLst>
+                  <a:ext uri="{0D108BD9-81ED-4DB2-BD59-A6C34878D82A}">
+                    <a16:rowId xmlns:a16="http://schemas.microsoft.com/office/drawing/2014/main" val="2149960961"/>
+                  </a:ext>
+                </a:extLst>
+              </a:tr>
+              <a:tr h="370840">
+                <a:tc>
+                  <a:txBody>
+                    <a:bodyPr/>
+                    <a:lstStyle/>
+                    <a:p>
+                      <a:r>
+                        <a:rPr lang="en-US" dirty="0"/>
+                        <a:t>Shreena</a:t>
+                      </a:r>
+                      <a:r>
+                        <a:rPr lang="en-IN" dirty="0"/>
+                        <a:t> Solia</a:t>
+                      </a:r>
+                      <a:endParaRPr lang="en-US" dirty="0"/>
+                    </a:p>
+                  </a:txBody>
+                  <a:tcPr/>
+                </a:tc>
+                <a:tc>
+                  <a:txBody>
+                    <a:bodyPr/>
+                    <a:lstStyle/>
+                    <a:p>
+                      <a:r>
+                        <a:rPr lang="en-US" dirty="0"/>
+                        <a:t>98</a:t>
+                      </a:r>
+                      <a:endParaRPr lang="en-IN" dirty="0"/>
+                    </a:p>
+                  </a:txBody>
+                  <a:tcPr/>
+                </a:tc>
+                <a:tc>
+                  <a:txBody>
+                    <a:bodyPr/>
+                    <a:lstStyle/>
+                    <a:p>
+                      <a:r>
+                        <a:rPr lang="en-US" dirty="0"/>
+                        <a:t>95</a:t>
+                      </a:r>
+                      <a:endParaRPr lang="en-IN" dirty="0"/>
+                    </a:p>
+                  </a:txBody>
+                  <a:tcPr/>
+                </a:tc>
+                <a:tc>
+                  <a:txBody>
+                    <a:bodyPr/>
+                    <a:lstStyle/>
+                    <a:p>
+                      <a:r>
+                        <a:rPr lang="en-US" dirty="0"/>
+                        <a:t>96</a:t>
+                      </a:r>
+                      <a:endParaRPr lang="en-IN" dirty="0"/>
+                    </a:p>
+                  </a:txBody>
+                  <a:tcPr/>
+                </a:tc>
+                <a:tc>
+                  <a:txBody>
+                    <a:bodyPr/>
+                    <a:lstStyle/>
+                    <a:p>
+                      <a:r>
+                        <a:rPr lang="en-US" dirty="0"/>
+                        <a:t>97</a:t>
+                      </a:r>
+                      <a:endParaRPr lang="en-IN" dirty="0"/>
+                    </a:p>
+                  </a:txBody>
+                  <a:tcPr/>
+                </a:tc>
+                <a:extLst>
+                  <a:ext uri="{0D108BD9-81ED-4DB2-BD59-A6C34878D82A}">
+                    <a16:rowId xmlns:a16="http://schemas.microsoft.com/office/drawing/2014/main" val="1430972965"/>
+                  </a:ext>
+                </a:extLst>
+              </a:tr>
+              <a:tr h="370840">
+                <a:tc>
+                  <a:txBody>
+                    <a:bodyPr/>
+                    <a:lstStyle/>
+                    <a:p>
+                      <a:r>
+                        <a:rPr lang="en-US" dirty="0"/>
+                        <a:t>Priyal Chapla</a:t>
+                      </a:r>
+                    </a:p>
+                  </a:txBody>
+                  <a:tcPr/>
+                </a:tc>
+                <a:tc>
+                  <a:txBody>
+                    <a:bodyPr/>
+                    <a:lstStyle/>
+                    <a:p>
+                      <a:r>
+                        <a:rPr lang="en-US" dirty="0"/>
+                        <a:t>97</a:t>
+                      </a:r>
+                      <a:endParaRPr lang="en-IN" dirty="0"/>
+                    </a:p>
+                  </a:txBody>
+                  <a:tcPr/>
+                </a:tc>
+                <a:tc>
+                  <a:txBody>
+                    <a:bodyPr/>
+                    <a:lstStyle/>
+                    <a:p>
+                      <a:r>
+                        <a:rPr lang="en-US" dirty="0"/>
+                        <a:t>98</a:t>
+                      </a:r>
+                      <a:endParaRPr lang="en-IN" dirty="0"/>
+                    </a:p>
+                  </a:txBody>
+                  <a:tcPr/>
+                </a:tc>
+                <a:tc>
+                  <a:txBody>
+                    <a:bodyPr/>
+                    <a:lstStyle/>
+                    <a:p>
+                      <a:r>
+                        <a:rPr lang="en-US" dirty="0"/>
+                        <a:t>96</a:t>
+                      </a:r>
+                      <a:endParaRPr lang="en-IN" dirty="0"/>
+                    </a:p>
+                  </a:txBody>
+                  <a:tcPr/>
+                </a:tc>
+                <a:tc>
+                  <a:txBody>
+                    <a:bodyPr/>
+                    <a:lstStyle/>
+                    <a:p>
+                      <a:r>
+                        <a:rPr lang="en-US" dirty="0"/>
+                        <a:t>92</a:t>
+                      </a:r>
+                      <a:endParaRPr lang="en-IN" dirty="0"/>
+                    </a:p>
+                  </a:txBody>
+                  <a:tcPr/>
+                </a:tc>
+                <a:extLst>
+                  <a:ext uri="{0D108BD9-81ED-4DB2-BD59-A6C34878D82A}">
+                    <a16:rowId xmlns:a16="http://schemas.microsoft.com/office/drawing/2014/main" val="2432933375"/>
+                  </a:ext>
+                </a:extLst>
+              </a:tr>
+              <a:tr h="370840">
+                <a:tc>
+                  <a:txBody>
+                    <a:bodyPr/>
+                    <a:lstStyle/>
+                    <a:p>
+                      <a:r>
+                        <a:rPr lang="en-US" dirty="0"/>
+                        <a:t>Swasti </a:t>
+                      </a:r>
+                      <a:r>
+                        <a:rPr lang="en-US" dirty="0" err="1"/>
+                        <a:t>Raiyani</a:t>
+                      </a:r>
+                      <a:endParaRPr lang="en-US" dirty="0"/>
+                    </a:p>
+                  </a:txBody>
+                  <a:tcPr/>
+                </a:tc>
+                <a:tc>
+                  <a:txBody>
+                    <a:bodyPr/>
+                    <a:lstStyle/>
+                    <a:p>
+                      <a:r>
+                        <a:rPr lang="en-US" dirty="0"/>
+                        <a:t>99</a:t>
+                      </a:r>
+                      <a:endParaRPr lang="en-IN" dirty="0"/>
+                    </a:p>
+                  </a:txBody>
+                  <a:tcPr/>
+                </a:tc>
+                <a:tc>
+                  <a:txBody>
+                    <a:bodyPr/>
+                    <a:lstStyle/>
+                    <a:p>
+                      <a:r>
+                        <a:rPr lang="en-US" dirty="0"/>
+                        <a:t>92</a:t>
+                      </a:r>
+                      <a:endParaRPr lang="en-IN" dirty="0"/>
+                    </a:p>
+                  </a:txBody>
+                  <a:tcPr/>
+                </a:tc>
+                <a:tc>
+                  <a:txBody>
+                    <a:bodyPr/>
+                    <a:lstStyle/>
+                    <a:p>
+                      <a:r>
+                        <a:rPr lang="en-US" dirty="0"/>
+                        <a:t>93</a:t>
+                      </a:r>
+                      <a:endParaRPr lang="en-IN" dirty="0"/>
+                    </a:p>
+                  </a:txBody>
+                  <a:tcPr/>
+                </a:tc>
+                <a:tc>
+                  <a:txBody>
+                    <a:bodyPr/>
+                    <a:lstStyle/>
+                    <a:p>
+                      <a:r>
+                        <a:rPr lang="en-US" dirty="0"/>
+                        <a:t>97</a:t>
+                      </a:r>
+                      <a:endParaRPr lang="en-IN" dirty="0"/>
+                    </a:p>
+                  </a:txBody>
+                  <a:tcPr/>
+                </a:tc>
+                <a:extLst>
+                  <a:ext uri="{0D108BD9-81ED-4DB2-BD59-A6C34878D82A}">
+                    <a16:rowId xmlns:a16="http://schemas.microsoft.com/office/drawing/2014/main" val="3141905867"/>
+                  </a:ext>
+                </a:extLst>
+              </a:tr>
+            </a:tbl>
+          </a:graphicData>
+        </a:graphic>
+      </p:graphicFrame>
       <p:sp>
         <p:nvSpPr>
           <p:cNvPr id="4" name="Slide Number Placeholder 3">
@@ -16957,6 +23620,503 @@
   <p:clrMapOvr>
     <a:masterClrMapping/>
   </p:clrMapOvr>
+  <mc:AlternateContent xmlns:mc="http://schemas.openxmlformats.org/markup-compatibility/2006">
+    <mc:Choice xmlns:p14="http://schemas.microsoft.com/office/powerpoint/2010/main" Requires="p14">
+      <p:transition spd="slow" p14:dur="4000">
+        <p14:vortex dir="r"/>
+      </p:transition>
+    </mc:Choice>
+    <mc:Fallback>
+      <p:transition spd="slow">
+        <p:fade/>
+      </p:transition>
+    </mc:Fallback>
+  </mc:AlternateContent>
+</p:sld>
+</file>
+
+<file path=ppt/slides/slide3.xml><?xml version="1.0" encoding="utf-8"?>
+<p:sld xmlns:a="http://schemas.openxmlformats.org/drawingml/2006/main" xmlns:r="http://schemas.openxmlformats.org/officeDocument/2006/relationships" xmlns:p="http://schemas.openxmlformats.org/presentationml/2006/main">
+  <p:cSld>
+    <p:spTree>
+      <p:nvGrpSpPr>
+        <p:cNvPr id="1" name=""/>
+        <p:cNvGrpSpPr/>
+        <p:nvPr/>
+      </p:nvGrpSpPr>
+      <p:grpSpPr>
+        <a:xfrm>
+          <a:off x="0" y="0"/>
+          <a:ext cx="0" cy="0"/>
+          <a:chOff x="0" y="0"/>
+          <a:chExt cx="0" cy="0"/>
+        </a:xfrm>
+      </p:grpSpPr>
+      <p:sp>
+        <p:nvSpPr>
+          <p:cNvPr id="2" name="Title 1">
+            <a:extLst>
+              <a:ext uri="{FF2B5EF4-FFF2-40B4-BE49-F238E27FC236}">
+                <a16:creationId xmlns:a16="http://schemas.microsoft.com/office/drawing/2014/main" id="{956C78D0-370D-5B52-FDDB-04139CD78388}"/>
+              </a:ext>
+            </a:extLst>
+          </p:cNvPr>
+          <p:cNvSpPr>
+            <a:spLocks noGrp="1"/>
+          </p:cNvSpPr>
+          <p:nvPr>
+            <p:ph type="title"/>
+          </p:nvPr>
+        </p:nvSpPr>
+        <p:spPr/>
+        <p:txBody>
+          <a:bodyPr/>
+          <a:lstStyle/>
+          <a:p>
+            <a:r>
+              <a:rPr lang="en-US" dirty="0"/>
+              <a:t>STUDENT VISE ANALYIS </a:t>
+            </a:r>
+            <a:endParaRPr lang="en-IN" dirty="0"/>
+          </a:p>
+        </p:txBody>
+      </p:sp>
+      <p:graphicFrame>
+        <p:nvGraphicFramePr>
+          <p:cNvPr id="7" name="Content Placeholder 6">
+            <a:extLst>
+              <a:ext uri="{FF2B5EF4-FFF2-40B4-BE49-F238E27FC236}">
+                <a16:creationId xmlns:a16="http://schemas.microsoft.com/office/drawing/2014/main" id="{C4151A5B-8970-3BE1-27C2-938313A8C7B5}"/>
+              </a:ext>
+            </a:extLst>
+          </p:cNvPr>
+          <p:cNvGraphicFramePr>
+            <a:graphicFrameLocks noGrp="1"/>
+          </p:cNvGraphicFramePr>
+          <p:nvPr>
+            <p:ph sz="half" idx="2"/>
+            <p:extLst>
+              <p:ext uri="{D42A27DB-BD31-4B8C-83A1-F6EECF244321}">
+                <p14:modId xmlns:p14="http://schemas.microsoft.com/office/powerpoint/2010/main" val="521149025"/>
+              </p:ext>
+            </p:extLst>
+          </p:nvPr>
+        </p:nvGraphicFramePr>
+        <p:xfrm>
+          <a:off x="3460750" y="2303463"/>
+          <a:ext cx="7964488" cy="3497262"/>
+        </p:xfrm>
+        <a:graphic>
+          <a:graphicData uri="http://schemas.openxmlformats.org/drawingml/2006/chart">
+            <c:chart xmlns:c="http://schemas.openxmlformats.org/drawingml/2006/chart" xmlns:r="http://schemas.openxmlformats.org/officeDocument/2006/relationships" r:id="rId2"/>
+          </a:graphicData>
+        </a:graphic>
+      </p:graphicFrame>
+      <p:sp>
+        <p:nvSpPr>
+          <p:cNvPr id="4" name="Slide Number Placeholder 3">
+            <a:extLst>
+              <a:ext uri="{FF2B5EF4-FFF2-40B4-BE49-F238E27FC236}">
+                <a16:creationId xmlns:a16="http://schemas.microsoft.com/office/drawing/2014/main" id="{91368302-3A55-E13A-D76F-CAAA7A5A3EB6}"/>
+              </a:ext>
+            </a:extLst>
+          </p:cNvPr>
+          <p:cNvSpPr>
+            <a:spLocks noGrp="1"/>
+          </p:cNvSpPr>
+          <p:nvPr>
+            <p:ph type="sldNum" sz="quarter" idx="10"/>
+          </p:nvPr>
+        </p:nvSpPr>
+        <p:spPr/>
+        <p:txBody>
+          <a:bodyPr/>
+          <a:lstStyle/>
+          <a:p>
+            <a:fld id="{48F63A3B-78C7-47BE-AE5E-E10140E04643}" type="slidenum">
+              <a:rPr lang="en-US" smtClean="0"/>
+              <a:pPr/>
+              <a:t>3</a:t>
+            </a:fld>
+            <a:endParaRPr lang="en-US" dirty="0"/>
+          </a:p>
+        </p:txBody>
+      </p:sp>
+    </p:spTree>
+    <p:extLst>
+      <p:ext uri="{BB962C8B-B14F-4D97-AF65-F5344CB8AC3E}">
+        <p14:creationId xmlns:p14="http://schemas.microsoft.com/office/powerpoint/2010/main" val="698342303"/>
+      </p:ext>
+    </p:extLst>
+  </p:cSld>
+  <p:clrMapOvr>
+    <a:masterClrMapping/>
+  </p:clrMapOvr>
+  <mc:AlternateContent xmlns:mc="http://schemas.openxmlformats.org/markup-compatibility/2006">
+    <mc:Choice xmlns:p14="http://schemas.microsoft.com/office/powerpoint/2010/main" Requires="p14">
+      <p:transition spd="slow" p14:dur="4000">
+        <p14:vortex dir="r"/>
+      </p:transition>
+    </mc:Choice>
+    <mc:Fallback>
+      <p:transition spd="slow">
+        <p:fade/>
+      </p:transition>
+    </mc:Fallback>
+  </mc:AlternateContent>
+</p:sld>
+</file>
+
+<file path=ppt/slides/slide4.xml><?xml version="1.0" encoding="utf-8"?>
+<p:sld xmlns:a="http://schemas.openxmlformats.org/drawingml/2006/main" xmlns:r="http://schemas.openxmlformats.org/officeDocument/2006/relationships" xmlns:p="http://schemas.openxmlformats.org/presentationml/2006/main">
+  <p:cSld>
+    <p:spTree>
+      <p:nvGrpSpPr>
+        <p:cNvPr id="1" name=""/>
+        <p:cNvGrpSpPr/>
+        <p:nvPr/>
+      </p:nvGrpSpPr>
+      <p:grpSpPr>
+        <a:xfrm>
+          <a:off x="0" y="0"/>
+          <a:ext cx="0" cy="0"/>
+          <a:chOff x="0" y="0"/>
+          <a:chExt cx="0" cy="0"/>
+        </a:xfrm>
+      </p:grpSpPr>
+      <p:sp>
+        <p:nvSpPr>
+          <p:cNvPr id="2" name="Title 1">
+            <a:extLst>
+              <a:ext uri="{FF2B5EF4-FFF2-40B4-BE49-F238E27FC236}">
+                <a16:creationId xmlns:a16="http://schemas.microsoft.com/office/drawing/2014/main" id="{FC39CBBB-3FBB-34D6-AB46-464C55BA8386}"/>
+              </a:ext>
+            </a:extLst>
+          </p:cNvPr>
+          <p:cNvSpPr>
+            <a:spLocks noGrp="1"/>
+          </p:cNvSpPr>
+          <p:nvPr>
+            <p:ph type="title"/>
+          </p:nvPr>
+        </p:nvSpPr>
+        <p:spPr/>
+        <p:txBody>
+          <a:bodyPr/>
+          <a:lstStyle/>
+          <a:p>
+            <a:r>
+              <a:rPr lang="en-US" dirty="0"/>
+              <a:t>SUBJECT OF SEMESTER 2</a:t>
+            </a:r>
+            <a:endParaRPr lang="en-IN" dirty="0"/>
+          </a:p>
+        </p:txBody>
+      </p:sp>
+      <p:sp>
+        <p:nvSpPr>
+          <p:cNvPr id="3" name="Slide Number Placeholder 2">
+            <a:extLst>
+              <a:ext uri="{FF2B5EF4-FFF2-40B4-BE49-F238E27FC236}">
+                <a16:creationId xmlns:a16="http://schemas.microsoft.com/office/drawing/2014/main" id="{BB56542E-02CB-591D-6C75-AC60C9B2B9CA}"/>
+              </a:ext>
+            </a:extLst>
+          </p:cNvPr>
+          <p:cNvSpPr>
+            <a:spLocks noGrp="1"/>
+          </p:cNvSpPr>
+          <p:nvPr>
+            <p:ph type="sldNum" sz="quarter" idx="10"/>
+          </p:nvPr>
+        </p:nvSpPr>
+        <p:spPr/>
+        <p:txBody>
+          <a:bodyPr/>
+          <a:lstStyle/>
+          <a:p>
+            <a:fld id="{48F63A3B-78C7-47BE-AE5E-E10140E04643}" type="slidenum">
+              <a:rPr lang="en-US" smtClean="0"/>
+              <a:pPr/>
+              <a:t>4</a:t>
+            </a:fld>
+            <a:endParaRPr lang="en-US" dirty="0"/>
+          </a:p>
+        </p:txBody>
+      </p:sp>
+      <p:graphicFrame>
+        <p:nvGraphicFramePr>
+          <p:cNvPr id="6" name="Content Placeholder 5">
+            <a:extLst>
+              <a:ext uri="{FF2B5EF4-FFF2-40B4-BE49-F238E27FC236}">
+                <a16:creationId xmlns:a16="http://schemas.microsoft.com/office/drawing/2014/main" id="{A1AA89A9-C27E-5E79-A2C2-4A2934D703A1}"/>
+              </a:ext>
+            </a:extLst>
+          </p:cNvPr>
+          <p:cNvGraphicFramePr>
+            <a:graphicFrameLocks noGrp="1"/>
+          </p:cNvGraphicFramePr>
+          <p:nvPr>
+            <p:ph sz="half" idx="2"/>
+            <p:extLst>
+              <p:ext uri="{D42A27DB-BD31-4B8C-83A1-F6EECF244321}">
+                <p14:modId xmlns:p14="http://schemas.microsoft.com/office/powerpoint/2010/main" val="2601964606"/>
+              </p:ext>
+            </p:extLst>
+          </p:nvPr>
+        </p:nvGraphicFramePr>
+        <p:xfrm>
+          <a:off x="914399" y="2057020"/>
+          <a:ext cx="7114032" cy="3719512"/>
+        </p:xfrm>
+        <a:graphic>
+          <a:graphicData uri="http://schemas.openxmlformats.org/drawingml/2006/diagram">
+            <dgm:relIds xmlns:dgm="http://schemas.openxmlformats.org/drawingml/2006/diagram" xmlns:r="http://schemas.openxmlformats.org/officeDocument/2006/relationships" r:dm="rId2" r:lo="rId3" r:qs="rId4" r:cs="rId5"/>
+          </a:graphicData>
+        </a:graphic>
+      </p:graphicFrame>
+    </p:spTree>
+    <p:extLst>
+      <p:ext uri="{BB962C8B-B14F-4D97-AF65-F5344CB8AC3E}">
+        <p14:creationId xmlns:p14="http://schemas.microsoft.com/office/powerpoint/2010/main" val="2113920447"/>
+      </p:ext>
+    </p:extLst>
+  </p:cSld>
+  <p:clrMapOvr>
+    <a:masterClrMapping/>
+  </p:clrMapOvr>
+  <mc:AlternateContent xmlns:mc="http://schemas.openxmlformats.org/markup-compatibility/2006">
+    <mc:Choice xmlns:p14="http://schemas.microsoft.com/office/powerpoint/2010/main" Requires="p14">
+      <p:transition spd="slow" p14:dur="4000">
+        <p14:vortex dir="r"/>
+      </p:transition>
+    </mc:Choice>
+    <mc:Fallback>
+      <p:transition spd="slow">
+        <p:fade/>
+      </p:transition>
+    </mc:Fallback>
+  </mc:AlternateContent>
+</p:sld>
+</file>
+
+<file path=ppt/slides/slide5.xml><?xml version="1.0" encoding="utf-8"?>
+<p:sld xmlns:a="http://schemas.openxmlformats.org/drawingml/2006/main" xmlns:r="http://schemas.openxmlformats.org/officeDocument/2006/relationships" xmlns:p="http://schemas.openxmlformats.org/presentationml/2006/main">
+  <p:cSld>
+    <p:spTree>
+      <p:nvGrpSpPr>
+        <p:cNvPr id="1" name=""/>
+        <p:cNvGrpSpPr/>
+        <p:nvPr/>
+      </p:nvGrpSpPr>
+      <p:grpSpPr>
+        <a:xfrm>
+          <a:off x="0" y="0"/>
+          <a:ext cx="0" cy="0"/>
+          <a:chOff x="0" y="0"/>
+          <a:chExt cx="0" cy="0"/>
+        </a:xfrm>
+      </p:grpSpPr>
+      <p:sp>
+        <p:nvSpPr>
+          <p:cNvPr id="2" name="Title 1">
+            <a:extLst>
+              <a:ext uri="{FF2B5EF4-FFF2-40B4-BE49-F238E27FC236}">
+                <a16:creationId xmlns:a16="http://schemas.microsoft.com/office/drawing/2014/main" id="{35FDD906-23FE-8838-8223-6E96DE400896}"/>
+              </a:ext>
+            </a:extLst>
+          </p:cNvPr>
+          <p:cNvSpPr>
+            <a:spLocks noGrp="1"/>
+          </p:cNvSpPr>
+          <p:nvPr>
+            <p:ph type="title"/>
+          </p:nvPr>
+        </p:nvSpPr>
+        <p:spPr>
+          <a:xfrm>
+            <a:off x="914234" y="1444752"/>
+            <a:ext cx="5259554" cy="1193150"/>
+          </a:xfrm>
+        </p:spPr>
+        <p:txBody>
+          <a:bodyPr/>
+          <a:lstStyle/>
+          <a:p>
+            <a:r>
+              <a:rPr lang="en-US" dirty="0"/>
+              <a:t>SUBJECT VISE ANALYIS</a:t>
+            </a:r>
+            <a:endParaRPr lang="en-IN" dirty="0"/>
+          </a:p>
+        </p:txBody>
+      </p:sp>
+      <p:graphicFrame>
+        <p:nvGraphicFramePr>
+          <p:cNvPr id="7" name="Content Placeholder 6">
+            <a:extLst>
+              <a:ext uri="{FF2B5EF4-FFF2-40B4-BE49-F238E27FC236}">
+                <a16:creationId xmlns:a16="http://schemas.microsoft.com/office/drawing/2014/main" id="{0B26DBFF-A3B6-61EA-FF63-C4D2A9AC3B4D}"/>
+              </a:ext>
+            </a:extLst>
+          </p:cNvPr>
+          <p:cNvGraphicFramePr>
+            <a:graphicFrameLocks noGrp="1"/>
+          </p:cNvGraphicFramePr>
+          <p:nvPr>
+            <p:ph idx="1"/>
+            <p:extLst>
+              <p:ext uri="{D42A27DB-BD31-4B8C-83A1-F6EECF244321}">
+                <p14:modId xmlns:p14="http://schemas.microsoft.com/office/powerpoint/2010/main" val="2066039491"/>
+              </p:ext>
+            </p:extLst>
+          </p:nvPr>
+        </p:nvGraphicFramePr>
+        <p:xfrm>
+          <a:off x="914400" y="2706624"/>
+          <a:ext cx="5259388" cy="3335401"/>
+        </p:xfrm>
+        <a:graphic>
+          <a:graphicData uri="http://schemas.openxmlformats.org/drawingml/2006/chart">
+            <c:chart xmlns:c="http://schemas.openxmlformats.org/drawingml/2006/chart" xmlns:r="http://schemas.openxmlformats.org/officeDocument/2006/relationships" r:id="rId2"/>
+          </a:graphicData>
+        </a:graphic>
+      </p:graphicFrame>
+      <p:sp>
+        <p:nvSpPr>
+          <p:cNvPr id="4" name="Picture Placeholder 3">
+            <a:extLst>
+              <a:ext uri="{FF2B5EF4-FFF2-40B4-BE49-F238E27FC236}">
+                <a16:creationId xmlns:a16="http://schemas.microsoft.com/office/drawing/2014/main" id="{7930971F-34C8-3688-F457-967BDCDD2266}"/>
+              </a:ext>
+            </a:extLst>
+          </p:cNvPr>
+          <p:cNvSpPr>
+            <a:spLocks noGrp="1"/>
+          </p:cNvSpPr>
+          <p:nvPr>
+            <p:ph type="pic" sz="quarter" idx="11"/>
+          </p:nvPr>
+        </p:nvSpPr>
+        <p:spPr/>
+      </p:sp>
+    </p:spTree>
+    <p:extLst>
+      <p:ext uri="{BB962C8B-B14F-4D97-AF65-F5344CB8AC3E}">
+        <p14:creationId xmlns:p14="http://schemas.microsoft.com/office/powerpoint/2010/main" val="3030372584"/>
+      </p:ext>
+    </p:extLst>
+  </p:cSld>
+  <p:clrMapOvr>
+    <a:masterClrMapping/>
+  </p:clrMapOvr>
+  <mc:AlternateContent xmlns:mc="http://schemas.openxmlformats.org/markup-compatibility/2006">
+    <mc:Choice xmlns:p14="http://schemas.microsoft.com/office/powerpoint/2010/main" Requires="p14">
+      <p:transition spd="slow" p14:dur="4000">
+        <p14:vortex dir="r"/>
+      </p:transition>
+    </mc:Choice>
+    <mc:Fallback>
+      <p:transition spd="slow">
+        <p:fade/>
+      </p:transition>
+    </mc:Fallback>
+  </mc:AlternateContent>
+</p:sld>
+</file>
+
+<file path=ppt/slides/slide6.xml><?xml version="1.0" encoding="utf-8"?>
+<p:sld xmlns:a="http://schemas.openxmlformats.org/drawingml/2006/main" xmlns:r="http://schemas.openxmlformats.org/officeDocument/2006/relationships" xmlns:p="http://schemas.openxmlformats.org/presentationml/2006/main">
+  <p:cSld>
+    <p:spTree>
+      <p:nvGrpSpPr>
+        <p:cNvPr id="1" name=""/>
+        <p:cNvGrpSpPr/>
+        <p:nvPr/>
+      </p:nvGrpSpPr>
+      <p:grpSpPr>
+        <a:xfrm>
+          <a:off x="0" y="0"/>
+          <a:ext cx="0" cy="0"/>
+          <a:chOff x="0" y="0"/>
+          <a:chExt cx="0" cy="0"/>
+        </a:xfrm>
+      </p:grpSpPr>
+      <p:sp>
+        <p:nvSpPr>
+          <p:cNvPr id="2" name="Title 1">
+            <a:extLst>
+              <a:ext uri="{FF2B5EF4-FFF2-40B4-BE49-F238E27FC236}">
+                <a16:creationId xmlns:a16="http://schemas.microsoft.com/office/drawing/2014/main" id="{4B3BF93E-E003-8281-ABF5-B12A64541BFB}"/>
+              </a:ext>
+            </a:extLst>
+          </p:cNvPr>
+          <p:cNvSpPr>
+            <a:spLocks noGrp="1"/>
+          </p:cNvSpPr>
+          <p:nvPr>
+            <p:ph type="ctrTitle"/>
+          </p:nvPr>
+        </p:nvSpPr>
+        <p:spPr/>
+        <p:txBody>
+          <a:bodyPr/>
+          <a:lstStyle/>
+          <a:p>
+            <a:r>
+              <a:rPr lang="en-US" dirty="0"/>
+              <a:t>THANK YOU :)</a:t>
+            </a:r>
+            <a:endParaRPr lang="en-IN" dirty="0"/>
+          </a:p>
+        </p:txBody>
+      </p:sp>
+      <p:sp>
+        <p:nvSpPr>
+          <p:cNvPr id="3" name="Subtitle 2">
+            <a:extLst>
+              <a:ext uri="{FF2B5EF4-FFF2-40B4-BE49-F238E27FC236}">
+                <a16:creationId xmlns:a16="http://schemas.microsoft.com/office/drawing/2014/main" id="{FA1C6ABC-969F-CAAA-E1C0-43F9F0162CD4}"/>
+              </a:ext>
+            </a:extLst>
+          </p:cNvPr>
+          <p:cNvSpPr>
+            <a:spLocks noGrp="1"/>
+          </p:cNvSpPr>
+          <p:nvPr>
+            <p:ph type="subTitle" idx="1"/>
+          </p:nvPr>
+        </p:nvSpPr>
+        <p:spPr/>
+        <p:txBody>
+          <a:bodyPr/>
+          <a:lstStyle/>
+          <a:p>
+            <a:endParaRPr lang="en-IN"/>
+          </a:p>
+        </p:txBody>
+      </p:sp>
+    </p:spTree>
+    <p:extLst>
+      <p:ext uri="{BB962C8B-B14F-4D97-AF65-F5344CB8AC3E}">
+        <p14:creationId xmlns:p14="http://schemas.microsoft.com/office/powerpoint/2010/main" val="691204220"/>
+      </p:ext>
+    </p:extLst>
+  </p:cSld>
+  <p:clrMapOvr>
+    <a:masterClrMapping/>
+  </p:clrMapOvr>
+  <mc:AlternateContent xmlns:mc="http://schemas.openxmlformats.org/markup-compatibility/2006">
+    <mc:Choice xmlns:p14="http://schemas.microsoft.com/office/powerpoint/2010/main" Requires="p14">
+      <p:transition spd="slow" p14:dur="4000">
+        <p14:vortex dir="r"/>
+      </p:transition>
+    </mc:Choice>
+    <mc:Fallback>
+      <p:transition spd="slow">
+        <p:fade/>
+      </p:transition>
+    </mc:Fallback>
+  </mc:AlternateContent>
 </p:sld>
 </file>
 
@@ -17772,15 +24932,6 @@
 </file>
 
 <file path=customXml/item2.xml><?xml version="1.0" encoding="utf-8"?>
-<?mso-contentType ?>
-<FormTemplates xmlns="http://schemas.microsoft.com/sharepoint/v3/contenttype/forms">
-  <Display>DocumentLibraryForm</Display>
-  <Edit>DocumentLibraryForm</Edit>
-  <New>DocumentLibraryForm</New>
-</FormTemplates>
-</file>
-
-<file path=customXml/item3.xml><?xml version="1.0" encoding="utf-8"?>
 <ct:contentTypeSchema xmlns:ct="http://schemas.microsoft.com/office/2006/metadata/contentType" xmlns:ma="http://schemas.microsoft.com/office/2006/metadata/properties/metaAttributes" ct:_="" ma:_="" ma:contentTypeName="Document" ma:contentTypeID="0x01010079F111ED35F8CC479449609E8A0923A6" ma:contentTypeVersion="28" ma:contentTypeDescription="Create a new document." ma:contentTypeScope="" ma:versionID="60f5a4f2d2b0abadcf532d48ebf9cb71">
   <xsd:schema xmlns:xsd="http://www.w3.org/2001/XMLSchema" xmlns:xs="http://www.w3.org/2001/XMLSchema" xmlns:p="http://schemas.microsoft.com/office/2006/metadata/properties" xmlns:ns1="http://schemas.microsoft.com/sharepoint/v3" xmlns:ns2="71af3243-3dd4-4a8d-8c0d-dd76da1f02a5" xmlns:ns3="16c05727-aa75-4e4a-9b5f-8a80a1165891" xmlns:ns4="230e9df3-be65-4c73-a93b-d1236ebd677e" targetNamespace="http://schemas.microsoft.com/office/2006/metadata/properties" ma:root="true" ma:fieldsID="7dd78129e6a1811f84807ad11c651531" ns1:_="" ns2:_="" ns3:_="" ns4:_="">
     <xsd:import namespace="http://schemas.microsoft.com/sharepoint/v3"/>
@@ -18092,6 +25243,15 @@
 </ct:contentTypeSchema>
 </file>
 
+<file path=customXml/item3.xml><?xml version="1.0" encoding="utf-8"?>
+<?mso-contentType ?>
+<FormTemplates xmlns="http://schemas.microsoft.com/sharepoint/v3/contenttype/forms">
+  <Display>DocumentLibraryForm</Display>
+  <Edit>DocumentLibraryForm</Edit>
+  <New>DocumentLibraryForm</New>
+</FormTemplates>
+</file>
+
 <file path=customXml/itemProps1.xml><?xml version="1.0" encoding="utf-8"?>
 <ds:datastoreItem xmlns:ds="http://schemas.openxmlformats.org/officeDocument/2006/customXml" ds:itemID="{BA719FA4-954C-4FA8-82CB-206659C3B826}">
   <ds:schemaRefs>
@@ -18105,14 +25265,6 @@
 </file>
 
 <file path=customXml/itemProps2.xml><?xml version="1.0" encoding="utf-8"?>
-<ds:datastoreItem xmlns:ds="http://schemas.openxmlformats.org/officeDocument/2006/customXml" ds:itemID="{16DBB56F-4362-4386-A1A1-3DF898896616}">
-  <ds:schemaRefs>
-    <ds:schemaRef ds:uri="http://schemas.microsoft.com/sharepoint/v3/contenttype/forms"/>
-  </ds:schemaRefs>
-</ds:datastoreItem>
-</file>
-
-<file path=customXml/itemProps3.xml><?xml version="1.0" encoding="utf-8"?>
 <ds:datastoreItem xmlns:ds="http://schemas.openxmlformats.org/officeDocument/2006/customXml" ds:itemID="{04948363-B267-4BAC-8655-100FBEC280C1}">
   <ds:schemaRefs>
     <ds:schemaRef ds:uri="http://schemas.microsoft.com/office/2006/metadata/contentType"/>
@@ -18133,6 +25285,14 @@
 </ds:datastoreItem>
 </file>
 
+<file path=customXml/itemProps3.xml><?xml version="1.0" encoding="utf-8"?>
+<ds:datastoreItem xmlns:ds="http://schemas.openxmlformats.org/officeDocument/2006/customXml" ds:itemID="{16DBB56F-4362-4386-A1A1-3DF898896616}">
+  <ds:schemaRefs>
+    <ds:schemaRef ds:uri="http://schemas.microsoft.com/sharepoint/v3/contenttype/forms"/>
+  </ds:schemaRefs>
+</ds:datastoreItem>
+</file>
+
 <file path=docMetadata/LabelInfo.xml><?xml version="1.0" encoding="utf-8"?>
 <clbl:labelList xmlns:clbl="http://schemas.microsoft.com/office/2020/mipLabelMetadata"/>
 </file>